--- a/docs/演示材料/顺德POC四助手架构.pptx
+++ b/docs/演示材料/顺德POC四助手架构.pptx
@@ -26,9 +26,17 @@
     <p:sldId id="274" r:id="rId20"/>
     <p:sldId id="275" r:id="rId21"/>
     <p:sldId id="276" r:id="rId22"/>
+    <p:sldId id="277" r:id="rId23"/>
+    <p:sldId id="278" r:id="rId24"/>
+    <p:sldId id="279" r:id="rId25"/>
+    <p:sldId id="280" r:id="rId26"/>
+    <p:sldId id="281" r:id="rId27"/>
+    <p:sldId id="282" r:id="rId28"/>
+    <p:sldId id="283" r:id="rId29"/>
+    <p:sldId id="284" r:id="rId30"/>
   </p:sldIdLst>
   <p:notesMasterIdLst>
-    <p:notesMasterId r:id="rId23"/>
+    <p:notesMasterId r:id="rId31"/>
   </p:notesMasterIdLst>
   <p:sldSz cx="12192000" cy="6858000"/>
   <p:notesSz cx="6858000" cy="12192000"/>
@@ -2199,6 +2207,710 @@
             <a:fld id="{F7021451-1387-4CA6-816F-3879F97B5CBC}" type="slidenum">
               <a:rPr lang="en-US"/>
               <a:t>21</a:t>
+            </a:fld>
+            <a:endParaRPr lang="en-US"/>
+          </a:p>
+        </p:txBody>
+      </p:sp>
+    </p:spTree>
+    <p:extLst>
+      <p:ext uri="{BB962C8B-B14F-4D97-AF65-F5344CB8AC3E}">
+        <p14:creationId xmlns:p14="http://schemas.microsoft.com/office/powerpoint/2010/main" val="1024086991"/>
+      </p:ext>
+    </p:extLst>
+  </p:cSld>
+  <p:clrMapOvr>
+    <a:masterClrMapping/>
+  </p:clrMapOvr>
+</p:notes>
+</file>
+
+<file path=ppt/notesSlides/notesSlide22.xml><?xml version="1.0" encoding="utf-8"?>
+<p:notes xmlns:a="http://schemas.openxmlformats.org/drawingml/2006/main" xmlns:r="http://schemas.openxmlformats.org/officeDocument/2006/relationships" xmlns:p="http://schemas.openxmlformats.org/presentationml/2006/main">
+  <p:cSld>
+    <p:spTree>
+      <p:nvGrpSpPr>
+        <p:cNvPr id="1" name=""/>
+        <p:cNvGrpSpPr/>
+        <p:nvPr/>
+      </p:nvGrpSpPr>
+      <p:grpSpPr>
+        <a:xfrm>
+          <a:off x="0" y="0"/>
+          <a:ext cx="0" cy="0"/>
+          <a:chOff x="0" y="0"/>
+          <a:chExt cx="0" cy="0"/>
+        </a:xfrm>
+      </p:grpSpPr>
+      <p:sp>
+        <p:nvSpPr>
+          <p:cNvPr id="2" name="Slide Image Placeholder 1"/>
+          <p:cNvSpPr>
+            <a:spLocks noGrp="1" noRot="1" noChangeAspect="1"/>
+          </p:cNvSpPr>
+          <p:nvPr>
+            <p:ph type="sldImg"/>
+          </p:nvPr>
+        </p:nvSpPr>
+        <p:spPr/>
+      </p:sp>
+      <p:sp>
+        <p:nvSpPr>
+          <p:cNvPr id="3" name="Notes Placeholder 2"/>
+          <p:cNvSpPr>
+            <a:spLocks noGrp="1"/>
+          </p:cNvSpPr>
+          <p:nvPr>
+            <p:ph type="body" idx="1"/>
+          </p:nvPr>
+        </p:nvSpPr>
+        <p:spPr/>
+        <p:txBody>
+          <a:bodyPr/>
+          <a:lstStyle/>
+          <a:p>
+            <a:r>
+              <a:rPr lang="en-US" dirty="0"/>
+              <a:t/>
+            </a:r>
+            <a:endParaRPr lang="en-US" dirty="0"/>
+          </a:p>
+        </p:txBody>
+      </p:sp>
+      <p:sp>
+        <p:nvSpPr>
+          <p:cNvPr id="4" name="Slide Number Placeholder 3"/>
+          <p:cNvSpPr>
+            <a:spLocks noGrp="1"/>
+          </p:cNvSpPr>
+          <p:nvPr>
+            <p:ph type="sldNum" sz="quarter" idx="10"/>
+          </p:nvPr>
+        </p:nvSpPr>
+        <p:spPr/>
+        <p:txBody>
+          <a:bodyPr/>
+          <a:lstStyle/>
+          <a:p>
+            <a:fld id="{F7021451-1387-4CA6-816F-3879F97B5CBC}" type="slidenum">
+              <a:rPr lang="en-US"/>
+              <a:t>22</a:t>
+            </a:fld>
+            <a:endParaRPr lang="en-US"/>
+          </a:p>
+        </p:txBody>
+      </p:sp>
+    </p:spTree>
+    <p:extLst>
+      <p:ext uri="{BB962C8B-B14F-4D97-AF65-F5344CB8AC3E}">
+        <p14:creationId xmlns:p14="http://schemas.microsoft.com/office/powerpoint/2010/main" val="1024086991"/>
+      </p:ext>
+    </p:extLst>
+  </p:cSld>
+  <p:clrMapOvr>
+    <a:masterClrMapping/>
+  </p:clrMapOvr>
+</p:notes>
+</file>
+
+<file path=ppt/notesSlides/notesSlide23.xml><?xml version="1.0" encoding="utf-8"?>
+<p:notes xmlns:a="http://schemas.openxmlformats.org/drawingml/2006/main" xmlns:r="http://schemas.openxmlformats.org/officeDocument/2006/relationships" xmlns:p="http://schemas.openxmlformats.org/presentationml/2006/main">
+  <p:cSld>
+    <p:spTree>
+      <p:nvGrpSpPr>
+        <p:cNvPr id="1" name=""/>
+        <p:cNvGrpSpPr/>
+        <p:nvPr/>
+      </p:nvGrpSpPr>
+      <p:grpSpPr>
+        <a:xfrm>
+          <a:off x="0" y="0"/>
+          <a:ext cx="0" cy="0"/>
+          <a:chOff x="0" y="0"/>
+          <a:chExt cx="0" cy="0"/>
+        </a:xfrm>
+      </p:grpSpPr>
+      <p:sp>
+        <p:nvSpPr>
+          <p:cNvPr id="2" name="Slide Image Placeholder 1"/>
+          <p:cNvSpPr>
+            <a:spLocks noGrp="1" noRot="1" noChangeAspect="1"/>
+          </p:cNvSpPr>
+          <p:nvPr>
+            <p:ph type="sldImg"/>
+          </p:nvPr>
+        </p:nvSpPr>
+        <p:spPr/>
+      </p:sp>
+      <p:sp>
+        <p:nvSpPr>
+          <p:cNvPr id="3" name="Notes Placeholder 2"/>
+          <p:cNvSpPr>
+            <a:spLocks noGrp="1"/>
+          </p:cNvSpPr>
+          <p:nvPr>
+            <p:ph type="body" idx="1"/>
+          </p:nvPr>
+        </p:nvSpPr>
+        <p:spPr/>
+        <p:txBody>
+          <a:bodyPr/>
+          <a:lstStyle/>
+          <a:p>
+            <a:r>
+              <a:rPr lang="en-US" dirty="0"/>
+              <a:t/>
+            </a:r>
+            <a:endParaRPr lang="en-US" dirty="0"/>
+          </a:p>
+        </p:txBody>
+      </p:sp>
+      <p:sp>
+        <p:nvSpPr>
+          <p:cNvPr id="4" name="Slide Number Placeholder 3"/>
+          <p:cNvSpPr>
+            <a:spLocks noGrp="1"/>
+          </p:cNvSpPr>
+          <p:nvPr>
+            <p:ph type="sldNum" sz="quarter" idx="10"/>
+          </p:nvPr>
+        </p:nvSpPr>
+        <p:spPr/>
+        <p:txBody>
+          <a:bodyPr/>
+          <a:lstStyle/>
+          <a:p>
+            <a:fld id="{F7021451-1387-4CA6-816F-3879F97B5CBC}" type="slidenum">
+              <a:rPr lang="en-US"/>
+              <a:t>23</a:t>
+            </a:fld>
+            <a:endParaRPr lang="en-US"/>
+          </a:p>
+        </p:txBody>
+      </p:sp>
+    </p:spTree>
+    <p:extLst>
+      <p:ext uri="{BB962C8B-B14F-4D97-AF65-F5344CB8AC3E}">
+        <p14:creationId xmlns:p14="http://schemas.microsoft.com/office/powerpoint/2010/main" val="1024086991"/>
+      </p:ext>
+    </p:extLst>
+  </p:cSld>
+  <p:clrMapOvr>
+    <a:masterClrMapping/>
+  </p:clrMapOvr>
+</p:notes>
+</file>
+
+<file path=ppt/notesSlides/notesSlide24.xml><?xml version="1.0" encoding="utf-8"?>
+<p:notes xmlns:a="http://schemas.openxmlformats.org/drawingml/2006/main" xmlns:r="http://schemas.openxmlformats.org/officeDocument/2006/relationships" xmlns:p="http://schemas.openxmlformats.org/presentationml/2006/main">
+  <p:cSld>
+    <p:spTree>
+      <p:nvGrpSpPr>
+        <p:cNvPr id="1" name=""/>
+        <p:cNvGrpSpPr/>
+        <p:nvPr/>
+      </p:nvGrpSpPr>
+      <p:grpSpPr>
+        <a:xfrm>
+          <a:off x="0" y="0"/>
+          <a:ext cx="0" cy="0"/>
+          <a:chOff x="0" y="0"/>
+          <a:chExt cx="0" cy="0"/>
+        </a:xfrm>
+      </p:grpSpPr>
+      <p:sp>
+        <p:nvSpPr>
+          <p:cNvPr id="2" name="Slide Image Placeholder 1"/>
+          <p:cNvSpPr>
+            <a:spLocks noGrp="1" noRot="1" noChangeAspect="1"/>
+          </p:cNvSpPr>
+          <p:nvPr>
+            <p:ph type="sldImg"/>
+          </p:nvPr>
+        </p:nvSpPr>
+        <p:spPr/>
+      </p:sp>
+      <p:sp>
+        <p:nvSpPr>
+          <p:cNvPr id="3" name="Notes Placeholder 2"/>
+          <p:cNvSpPr>
+            <a:spLocks noGrp="1"/>
+          </p:cNvSpPr>
+          <p:nvPr>
+            <p:ph type="body" idx="1"/>
+          </p:nvPr>
+        </p:nvSpPr>
+        <p:spPr/>
+        <p:txBody>
+          <a:bodyPr/>
+          <a:lstStyle/>
+          <a:p>
+            <a:r>
+              <a:rPr lang="en-US" dirty="0"/>
+              <a:t/>
+            </a:r>
+            <a:endParaRPr lang="en-US" dirty="0"/>
+          </a:p>
+        </p:txBody>
+      </p:sp>
+      <p:sp>
+        <p:nvSpPr>
+          <p:cNvPr id="4" name="Slide Number Placeholder 3"/>
+          <p:cNvSpPr>
+            <a:spLocks noGrp="1"/>
+          </p:cNvSpPr>
+          <p:nvPr>
+            <p:ph type="sldNum" sz="quarter" idx="10"/>
+          </p:nvPr>
+        </p:nvSpPr>
+        <p:spPr/>
+        <p:txBody>
+          <a:bodyPr/>
+          <a:lstStyle/>
+          <a:p>
+            <a:fld id="{F7021451-1387-4CA6-816F-3879F97B5CBC}" type="slidenum">
+              <a:rPr lang="en-US"/>
+              <a:t>24</a:t>
+            </a:fld>
+            <a:endParaRPr lang="en-US"/>
+          </a:p>
+        </p:txBody>
+      </p:sp>
+    </p:spTree>
+    <p:extLst>
+      <p:ext uri="{BB962C8B-B14F-4D97-AF65-F5344CB8AC3E}">
+        <p14:creationId xmlns:p14="http://schemas.microsoft.com/office/powerpoint/2010/main" val="1024086991"/>
+      </p:ext>
+    </p:extLst>
+  </p:cSld>
+  <p:clrMapOvr>
+    <a:masterClrMapping/>
+  </p:clrMapOvr>
+</p:notes>
+</file>
+
+<file path=ppt/notesSlides/notesSlide25.xml><?xml version="1.0" encoding="utf-8"?>
+<p:notes xmlns:a="http://schemas.openxmlformats.org/drawingml/2006/main" xmlns:r="http://schemas.openxmlformats.org/officeDocument/2006/relationships" xmlns:p="http://schemas.openxmlformats.org/presentationml/2006/main">
+  <p:cSld>
+    <p:spTree>
+      <p:nvGrpSpPr>
+        <p:cNvPr id="1" name=""/>
+        <p:cNvGrpSpPr/>
+        <p:nvPr/>
+      </p:nvGrpSpPr>
+      <p:grpSpPr>
+        <a:xfrm>
+          <a:off x="0" y="0"/>
+          <a:ext cx="0" cy="0"/>
+          <a:chOff x="0" y="0"/>
+          <a:chExt cx="0" cy="0"/>
+        </a:xfrm>
+      </p:grpSpPr>
+      <p:sp>
+        <p:nvSpPr>
+          <p:cNvPr id="2" name="Slide Image Placeholder 1"/>
+          <p:cNvSpPr>
+            <a:spLocks noGrp="1" noRot="1" noChangeAspect="1"/>
+          </p:cNvSpPr>
+          <p:nvPr>
+            <p:ph type="sldImg"/>
+          </p:nvPr>
+        </p:nvSpPr>
+        <p:spPr/>
+      </p:sp>
+      <p:sp>
+        <p:nvSpPr>
+          <p:cNvPr id="3" name="Notes Placeholder 2"/>
+          <p:cNvSpPr>
+            <a:spLocks noGrp="1"/>
+          </p:cNvSpPr>
+          <p:nvPr>
+            <p:ph type="body" idx="1"/>
+          </p:nvPr>
+        </p:nvSpPr>
+        <p:spPr/>
+        <p:txBody>
+          <a:bodyPr/>
+          <a:lstStyle/>
+          <a:p>
+            <a:r>
+              <a:rPr lang="en-US" dirty="0"/>
+              <a:t/>
+            </a:r>
+            <a:endParaRPr lang="en-US" dirty="0"/>
+          </a:p>
+        </p:txBody>
+      </p:sp>
+      <p:sp>
+        <p:nvSpPr>
+          <p:cNvPr id="4" name="Slide Number Placeholder 3"/>
+          <p:cNvSpPr>
+            <a:spLocks noGrp="1"/>
+          </p:cNvSpPr>
+          <p:nvPr>
+            <p:ph type="sldNum" sz="quarter" idx="10"/>
+          </p:nvPr>
+        </p:nvSpPr>
+        <p:spPr/>
+        <p:txBody>
+          <a:bodyPr/>
+          <a:lstStyle/>
+          <a:p>
+            <a:fld id="{F7021451-1387-4CA6-816F-3879F97B5CBC}" type="slidenum">
+              <a:rPr lang="en-US"/>
+              <a:t>25</a:t>
+            </a:fld>
+            <a:endParaRPr lang="en-US"/>
+          </a:p>
+        </p:txBody>
+      </p:sp>
+    </p:spTree>
+    <p:extLst>
+      <p:ext uri="{BB962C8B-B14F-4D97-AF65-F5344CB8AC3E}">
+        <p14:creationId xmlns:p14="http://schemas.microsoft.com/office/powerpoint/2010/main" val="1024086991"/>
+      </p:ext>
+    </p:extLst>
+  </p:cSld>
+  <p:clrMapOvr>
+    <a:masterClrMapping/>
+  </p:clrMapOvr>
+</p:notes>
+</file>
+
+<file path=ppt/notesSlides/notesSlide26.xml><?xml version="1.0" encoding="utf-8"?>
+<p:notes xmlns:a="http://schemas.openxmlformats.org/drawingml/2006/main" xmlns:r="http://schemas.openxmlformats.org/officeDocument/2006/relationships" xmlns:p="http://schemas.openxmlformats.org/presentationml/2006/main">
+  <p:cSld>
+    <p:spTree>
+      <p:nvGrpSpPr>
+        <p:cNvPr id="1" name=""/>
+        <p:cNvGrpSpPr/>
+        <p:nvPr/>
+      </p:nvGrpSpPr>
+      <p:grpSpPr>
+        <a:xfrm>
+          <a:off x="0" y="0"/>
+          <a:ext cx="0" cy="0"/>
+          <a:chOff x="0" y="0"/>
+          <a:chExt cx="0" cy="0"/>
+        </a:xfrm>
+      </p:grpSpPr>
+      <p:sp>
+        <p:nvSpPr>
+          <p:cNvPr id="2" name="Slide Image Placeholder 1"/>
+          <p:cNvSpPr>
+            <a:spLocks noGrp="1" noRot="1" noChangeAspect="1"/>
+          </p:cNvSpPr>
+          <p:nvPr>
+            <p:ph type="sldImg"/>
+          </p:nvPr>
+        </p:nvSpPr>
+        <p:spPr/>
+      </p:sp>
+      <p:sp>
+        <p:nvSpPr>
+          <p:cNvPr id="3" name="Notes Placeholder 2"/>
+          <p:cNvSpPr>
+            <a:spLocks noGrp="1"/>
+          </p:cNvSpPr>
+          <p:nvPr>
+            <p:ph type="body" idx="1"/>
+          </p:nvPr>
+        </p:nvSpPr>
+        <p:spPr/>
+        <p:txBody>
+          <a:bodyPr/>
+          <a:lstStyle/>
+          <a:p>
+            <a:r>
+              <a:rPr lang="en-US" dirty="0"/>
+              <a:t/>
+            </a:r>
+            <a:endParaRPr lang="en-US" dirty="0"/>
+          </a:p>
+        </p:txBody>
+      </p:sp>
+      <p:sp>
+        <p:nvSpPr>
+          <p:cNvPr id="4" name="Slide Number Placeholder 3"/>
+          <p:cNvSpPr>
+            <a:spLocks noGrp="1"/>
+          </p:cNvSpPr>
+          <p:nvPr>
+            <p:ph type="sldNum" sz="quarter" idx="10"/>
+          </p:nvPr>
+        </p:nvSpPr>
+        <p:spPr/>
+        <p:txBody>
+          <a:bodyPr/>
+          <a:lstStyle/>
+          <a:p>
+            <a:fld id="{F7021451-1387-4CA6-816F-3879F97B5CBC}" type="slidenum">
+              <a:rPr lang="en-US"/>
+              <a:t>26</a:t>
+            </a:fld>
+            <a:endParaRPr lang="en-US"/>
+          </a:p>
+        </p:txBody>
+      </p:sp>
+    </p:spTree>
+    <p:extLst>
+      <p:ext uri="{BB962C8B-B14F-4D97-AF65-F5344CB8AC3E}">
+        <p14:creationId xmlns:p14="http://schemas.microsoft.com/office/powerpoint/2010/main" val="1024086991"/>
+      </p:ext>
+    </p:extLst>
+  </p:cSld>
+  <p:clrMapOvr>
+    <a:masterClrMapping/>
+  </p:clrMapOvr>
+</p:notes>
+</file>
+
+<file path=ppt/notesSlides/notesSlide27.xml><?xml version="1.0" encoding="utf-8"?>
+<p:notes xmlns:a="http://schemas.openxmlformats.org/drawingml/2006/main" xmlns:r="http://schemas.openxmlformats.org/officeDocument/2006/relationships" xmlns:p="http://schemas.openxmlformats.org/presentationml/2006/main">
+  <p:cSld>
+    <p:spTree>
+      <p:nvGrpSpPr>
+        <p:cNvPr id="1" name=""/>
+        <p:cNvGrpSpPr/>
+        <p:nvPr/>
+      </p:nvGrpSpPr>
+      <p:grpSpPr>
+        <a:xfrm>
+          <a:off x="0" y="0"/>
+          <a:ext cx="0" cy="0"/>
+          <a:chOff x="0" y="0"/>
+          <a:chExt cx="0" cy="0"/>
+        </a:xfrm>
+      </p:grpSpPr>
+      <p:sp>
+        <p:nvSpPr>
+          <p:cNvPr id="2" name="Slide Image Placeholder 1"/>
+          <p:cNvSpPr>
+            <a:spLocks noGrp="1" noRot="1" noChangeAspect="1"/>
+          </p:cNvSpPr>
+          <p:nvPr>
+            <p:ph type="sldImg"/>
+          </p:nvPr>
+        </p:nvSpPr>
+        <p:spPr/>
+      </p:sp>
+      <p:sp>
+        <p:nvSpPr>
+          <p:cNvPr id="3" name="Notes Placeholder 2"/>
+          <p:cNvSpPr>
+            <a:spLocks noGrp="1"/>
+          </p:cNvSpPr>
+          <p:nvPr>
+            <p:ph type="body" idx="1"/>
+          </p:nvPr>
+        </p:nvSpPr>
+        <p:spPr/>
+        <p:txBody>
+          <a:bodyPr/>
+          <a:lstStyle/>
+          <a:p>
+            <a:r>
+              <a:rPr lang="en-US" dirty="0"/>
+              <a:t/>
+            </a:r>
+            <a:endParaRPr lang="en-US" dirty="0"/>
+          </a:p>
+        </p:txBody>
+      </p:sp>
+      <p:sp>
+        <p:nvSpPr>
+          <p:cNvPr id="4" name="Slide Number Placeholder 3"/>
+          <p:cNvSpPr>
+            <a:spLocks noGrp="1"/>
+          </p:cNvSpPr>
+          <p:nvPr>
+            <p:ph type="sldNum" sz="quarter" idx="10"/>
+          </p:nvPr>
+        </p:nvSpPr>
+        <p:spPr/>
+        <p:txBody>
+          <a:bodyPr/>
+          <a:lstStyle/>
+          <a:p>
+            <a:fld id="{F7021451-1387-4CA6-816F-3879F97B5CBC}" type="slidenum">
+              <a:rPr lang="en-US"/>
+              <a:t>27</a:t>
+            </a:fld>
+            <a:endParaRPr lang="en-US"/>
+          </a:p>
+        </p:txBody>
+      </p:sp>
+    </p:spTree>
+    <p:extLst>
+      <p:ext uri="{BB962C8B-B14F-4D97-AF65-F5344CB8AC3E}">
+        <p14:creationId xmlns:p14="http://schemas.microsoft.com/office/powerpoint/2010/main" val="1024086991"/>
+      </p:ext>
+    </p:extLst>
+  </p:cSld>
+  <p:clrMapOvr>
+    <a:masterClrMapping/>
+  </p:clrMapOvr>
+</p:notes>
+</file>
+
+<file path=ppt/notesSlides/notesSlide28.xml><?xml version="1.0" encoding="utf-8"?>
+<p:notes xmlns:a="http://schemas.openxmlformats.org/drawingml/2006/main" xmlns:r="http://schemas.openxmlformats.org/officeDocument/2006/relationships" xmlns:p="http://schemas.openxmlformats.org/presentationml/2006/main">
+  <p:cSld>
+    <p:spTree>
+      <p:nvGrpSpPr>
+        <p:cNvPr id="1" name=""/>
+        <p:cNvGrpSpPr/>
+        <p:nvPr/>
+      </p:nvGrpSpPr>
+      <p:grpSpPr>
+        <a:xfrm>
+          <a:off x="0" y="0"/>
+          <a:ext cx="0" cy="0"/>
+          <a:chOff x="0" y="0"/>
+          <a:chExt cx="0" cy="0"/>
+        </a:xfrm>
+      </p:grpSpPr>
+      <p:sp>
+        <p:nvSpPr>
+          <p:cNvPr id="2" name="Slide Image Placeholder 1"/>
+          <p:cNvSpPr>
+            <a:spLocks noGrp="1" noRot="1" noChangeAspect="1"/>
+          </p:cNvSpPr>
+          <p:nvPr>
+            <p:ph type="sldImg"/>
+          </p:nvPr>
+        </p:nvSpPr>
+        <p:spPr/>
+      </p:sp>
+      <p:sp>
+        <p:nvSpPr>
+          <p:cNvPr id="3" name="Notes Placeholder 2"/>
+          <p:cNvSpPr>
+            <a:spLocks noGrp="1"/>
+          </p:cNvSpPr>
+          <p:nvPr>
+            <p:ph type="body" idx="1"/>
+          </p:nvPr>
+        </p:nvSpPr>
+        <p:spPr/>
+        <p:txBody>
+          <a:bodyPr/>
+          <a:lstStyle/>
+          <a:p>
+            <a:r>
+              <a:rPr lang="en-US" dirty="0"/>
+              <a:t/>
+            </a:r>
+            <a:endParaRPr lang="en-US" dirty="0"/>
+          </a:p>
+        </p:txBody>
+      </p:sp>
+      <p:sp>
+        <p:nvSpPr>
+          <p:cNvPr id="4" name="Slide Number Placeholder 3"/>
+          <p:cNvSpPr>
+            <a:spLocks noGrp="1"/>
+          </p:cNvSpPr>
+          <p:nvPr>
+            <p:ph type="sldNum" sz="quarter" idx="10"/>
+          </p:nvPr>
+        </p:nvSpPr>
+        <p:spPr/>
+        <p:txBody>
+          <a:bodyPr/>
+          <a:lstStyle/>
+          <a:p>
+            <a:fld id="{F7021451-1387-4CA6-816F-3879F97B5CBC}" type="slidenum">
+              <a:rPr lang="en-US"/>
+              <a:t>28</a:t>
+            </a:fld>
+            <a:endParaRPr lang="en-US"/>
+          </a:p>
+        </p:txBody>
+      </p:sp>
+    </p:spTree>
+    <p:extLst>
+      <p:ext uri="{BB962C8B-B14F-4D97-AF65-F5344CB8AC3E}">
+        <p14:creationId xmlns:p14="http://schemas.microsoft.com/office/powerpoint/2010/main" val="1024086991"/>
+      </p:ext>
+    </p:extLst>
+  </p:cSld>
+  <p:clrMapOvr>
+    <a:masterClrMapping/>
+  </p:clrMapOvr>
+</p:notes>
+</file>
+
+<file path=ppt/notesSlides/notesSlide29.xml><?xml version="1.0" encoding="utf-8"?>
+<p:notes xmlns:a="http://schemas.openxmlformats.org/drawingml/2006/main" xmlns:r="http://schemas.openxmlformats.org/officeDocument/2006/relationships" xmlns:p="http://schemas.openxmlformats.org/presentationml/2006/main">
+  <p:cSld>
+    <p:spTree>
+      <p:nvGrpSpPr>
+        <p:cNvPr id="1" name=""/>
+        <p:cNvGrpSpPr/>
+        <p:nvPr/>
+      </p:nvGrpSpPr>
+      <p:grpSpPr>
+        <a:xfrm>
+          <a:off x="0" y="0"/>
+          <a:ext cx="0" cy="0"/>
+          <a:chOff x="0" y="0"/>
+          <a:chExt cx="0" cy="0"/>
+        </a:xfrm>
+      </p:grpSpPr>
+      <p:sp>
+        <p:nvSpPr>
+          <p:cNvPr id="2" name="Slide Image Placeholder 1"/>
+          <p:cNvSpPr>
+            <a:spLocks noGrp="1" noRot="1" noChangeAspect="1"/>
+          </p:cNvSpPr>
+          <p:nvPr>
+            <p:ph type="sldImg"/>
+          </p:nvPr>
+        </p:nvSpPr>
+        <p:spPr/>
+      </p:sp>
+      <p:sp>
+        <p:nvSpPr>
+          <p:cNvPr id="3" name="Notes Placeholder 2"/>
+          <p:cNvSpPr>
+            <a:spLocks noGrp="1"/>
+          </p:cNvSpPr>
+          <p:nvPr>
+            <p:ph type="body" idx="1"/>
+          </p:nvPr>
+        </p:nvSpPr>
+        <p:spPr/>
+        <p:txBody>
+          <a:bodyPr/>
+          <a:lstStyle/>
+          <a:p>
+            <a:r>
+              <a:rPr lang="en-US" dirty="0"/>
+              <a:t/>
+            </a:r>
+            <a:endParaRPr lang="en-US" dirty="0"/>
+          </a:p>
+        </p:txBody>
+      </p:sp>
+      <p:sp>
+        <p:nvSpPr>
+          <p:cNvPr id="4" name="Slide Number Placeholder 3"/>
+          <p:cNvSpPr>
+            <a:spLocks noGrp="1"/>
+          </p:cNvSpPr>
+          <p:nvPr>
+            <p:ph type="sldNum" sz="quarter" idx="10"/>
+          </p:nvPr>
+        </p:nvSpPr>
+        <p:spPr/>
+        <p:txBody>
+          <a:bodyPr/>
+          <a:lstStyle/>
+          <a:p>
+            <a:fld id="{F7021451-1387-4CA6-816F-3879F97B5CBC}" type="slidenum">
+              <a:rPr lang="en-US"/>
+              <a:t>29</a:t>
             </a:fld>
             <a:endParaRPr lang="en-US"/>
           </a:p>
@@ -3334,7 +4046,7 @@
                 <a:ea typeface="PingFang SC" pitchFamily="34" charset="-122"/>
                 <a:cs typeface="PingFang SC" pitchFamily="34" charset="-120"/>
               </a:rPr>
-              <a:t>宿主 QwenPaw v2.0.0  ·  扩展只进 poc/  ·  内核 0 行改动</a:t>
+              <a:t>宿主 QwenPaw 2.2.2b1  ·  相对 2.0.0：缓存命中率 + Files 查看/下载  ·  POC 旁路不改内核</a:t>
             </a:r>
             <a:endParaRPr lang="en-US" sz="1300" dirty="0"/>
           </a:p>
@@ -3514,7 +4226,7 @@
                 <a:ea typeface="PingFang SC" pitchFamily="34" charset="-122"/>
                 <a:cs typeface="PingFang SC" pitchFamily="34" charset="-120"/>
               </a:rPr>
-              <a:t>21</a:t>
+              <a:t>25</a:t>
             </a:r>
             <a:endParaRPr lang="en-US" sz="2800" dirty="0"/>
           </a:p>
@@ -3612,7 +4324,7 @@
                 <a:ea typeface="PingFang SC" pitchFamily="34" charset="-122"/>
                 <a:cs typeface="PingFang SC" pitchFamily="34" charset="-120"/>
               </a:rPr>
-              <a:t>4</a:t>
+              <a:t>L1-L3</a:t>
             </a:r>
             <a:endParaRPr lang="en-US" sz="2800" dirty="0"/>
           </a:p>
@@ -3651,7 +4363,7 @@
                 <a:ea typeface="PingFang SC" pitchFamily="34" charset="-122"/>
                 <a:cs typeface="PingFang SC" pitchFamily="34" charset="-120"/>
               </a:rPr>
-              <a:t>Skill</a:t>
+              <a:t>渐进加载</a:t>
             </a:r>
             <a:endParaRPr lang="en-US" sz="1200" dirty="0"/>
           </a:p>
@@ -3710,7 +4422,7 @@
                 <a:ea typeface="PingFang SC" pitchFamily="34" charset="-122"/>
                 <a:cs typeface="PingFang SC" pitchFamily="34" charset="-120"/>
               </a:rPr>
-              <a:t>0</a:t>
+              <a:t>Files</a:t>
             </a:r>
             <a:endParaRPr lang="en-US" sz="2800" dirty="0"/>
           </a:p>
@@ -3749,7 +4461,7 @@
                 <a:ea typeface="PingFang SC" pitchFamily="34" charset="-122"/>
                 <a:cs typeface="PingFang SC" pitchFamily="34" charset="-120"/>
               </a:rPr>
-              <a:t>内核改动</a:t>
+              <a:t>可查看下载</a:t>
             </a:r>
             <a:endParaRPr lang="en-US" sz="1200" dirty="0"/>
           </a:p>
@@ -3808,7 +4520,7 @@
                 <a:ea typeface="PingFang SC" pitchFamily="34" charset="-122"/>
                 <a:cs typeface="PingFang SC" pitchFamily="34" charset="-120"/>
               </a:rPr>
-              <a:t>10/10</a:t>
+              <a:t>2.0.0</a:t>
             </a:r>
             <a:endParaRPr lang="en-US" sz="2800" dirty="0"/>
           </a:p>
@@ -3847,7 +4559,7 @@
                 <a:ea typeface="PingFang SC" pitchFamily="34" charset="-122"/>
                 <a:cs typeface="PingFang SC" pitchFamily="34" charset="-120"/>
               </a:rPr>
-              <a:t>Excel 黄金集</a:t>
+              <a:t>旧版是黑盒</a:t>
             </a:r>
             <a:endParaRPr lang="en-US" sz="1200" dirty="0"/>
           </a:p>
@@ -3996,7 +4708,7 @@
                 <a:ea typeface="PingFang SC" pitchFamily="34" charset="-122"/>
                 <a:cs typeface="PingFang SC" pitchFamily="34" charset="-120"/>
               </a:rPr>
-              <a:t>10 / 21</a:t>
+              <a:t>10 / 29</a:t>
             </a:r>
             <a:endParaRPr lang="en-US" sz="1000" dirty="0"/>
           </a:p>
@@ -4802,7 +5514,7 @@
                 <a:ea typeface="PingFang SC" pitchFamily="34" charset="-122"/>
                 <a:cs typeface="PingFang SC" pitchFamily="34" charset="-120"/>
               </a:rPr>
-              <a:t>11 / 21</a:t>
+              <a:t>11 / 29</a:t>
             </a:r>
             <a:endParaRPr lang="en-US" sz="1000" dirty="0"/>
           </a:p>
@@ -4975,7 +5687,7 @@
                 <a:ea typeface="PingFang SC" pitchFamily="34" charset="-122"/>
                 <a:cs typeface="PingFang SC" pitchFamily="34" charset="-120"/>
               </a:rPr>
-              <a:t>12 / 21</a:t>
+              <a:t>12 / 29</a:t>
             </a:r>
             <a:endParaRPr lang="en-US" sz="1000" dirty="0"/>
           </a:p>
@@ -5567,7 +6279,7 @@
                 <a:ea typeface="PingFang SC" pitchFamily="34" charset="-122"/>
                 <a:cs typeface="PingFang SC" pitchFamily="34" charset="-120"/>
               </a:rPr>
-              <a:t>13 / 21</a:t>
+              <a:t>13 / 29</a:t>
             </a:r>
             <a:endParaRPr lang="en-US" sz="1000" dirty="0"/>
           </a:p>
@@ -6305,7 +7017,7 @@
                 <a:ea typeface="PingFang SC" pitchFamily="34" charset="-122"/>
                 <a:cs typeface="PingFang SC" pitchFamily="34" charset="-120"/>
               </a:rPr>
-              <a:t>14 / 21</a:t>
+              <a:t>14 / 29</a:t>
             </a:r>
             <a:endParaRPr lang="en-US" sz="1000" dirty="0"/>
           </a:p>
@@ -7873,7 +8585,7 @@
                 <a:ea typeface="PingFang SC" pitchFamily="34" charset="-122"/>
                 <a:cs typeface="PingFang SC" pitchFamily="34" charset="-120"/>
               </a:rPr>
-              <a:t>15 / 21</a:t>
+              <a:t>15 / 29</a:t>
             </a:r>
             <a:endParaRPr lang="en-US" sz="1000" dirty="0"/>
           </a:p>
@@ -8007,7 +8719,7 @@
                 <a:ea typeface="PingFang SC" pitchFamily="34" charset="-122"/>
                 <a:cs typeface="PingFang SC" pitchFamily="34" charset="-120"/>
               </a:rPr>
-              <a:t>21 个 MCP 工具：中文名对照（演示时用中文说）</a:t>
+              <a:t>25 个 MCP 工具：中文名对照（演示时用中文说）</a:t>
             </a:r>
             <a:endParaRPr lang="en-US" sz="2000" dirty="0"/>
           </a:p>
@@ -8046,7 +8758,7 @@
                 <a:ea typeface="PingFang SC" pitchFamily="34" charset="-122"/>
                 <a:cs typeface="PingFang SC" pitchFamily="34" charset="-120"/>
               </a:rPr>
-              <a:t>16 / 21</a:t>
+              <a:t>16 / 29</a:t>
             </a:r>
             <a:endParaRPr lang="en-US" sz="1000" dirty="0"/>
           </a:p>
@@ -8085,7 +8797,7 @@
                 <a:ea typeface="PingFang SC" pitchFamily="34" charset="-122"/>
                 <a:cs typeface="PingFang SC" pitchFamily="34" charset="-120"/>
               </a:rPr>
-              <a:t>Excel问答  excel-guard（5）+ 代码内护栏</a:t>
+              <a:t>Excel问答  excel-guard（9）</a:t>
             </a:r>
             <a:endParaRPr lang="en-US" sz="1400" dirty="0"/>
           </a:p>
@@ -8933,7 +9645,7 @@
                           <a:ea typeface="PingFang SC" pitchFamily="34" charset="-122"/>
                           <a:cs typeface="PingFang SC" pitchFamily="34" charset="-120"/>
                         </a:rPr>
-                        <a:t>一次性护栏（代码内）</a:t>
+                        <a:t>守卫写回</a:t>
                       </a:r>
                       <a:endParaRPr lang="en-US" sz="1100" dirty="0">
                         <a:latin typeface="PingFang SC" charset="0"/>
@@ -8998,7 +9710,7 @@
                           <a:ea typeface="PingFang SC" pitchFamily="34" charset="-122"/>
                           <a:cs typeface="PingFang SC" pitchFamily="34" charset="-120"/>
                         </a:rPr>
-                        <a:t>preflight_workbook</a:t>
+                        <a:t>edit_workbook</a:t>
                       </a:r>
                       <a:endParaRPr lang="en-US" sz="1100" dirty="0">
                         <a:latin typeface="PingFang SC" charset="0"/>
@@ -9065,7 +9777,7 @@
                           <a:ea typeface="PingFang SC" pitchFamily="34" charset="-122"/>
                           <a:cs typeface="PingFang SC" pitchFamily="34" charset="-120"/>
                         </a:rPr>
-                        <a:t>写后自检（代码内）</a:t>
+                        <a:t>结构化读取</a:t>
                       </a:r>
                       <a:endParaRPr lang="en-US" sz="1100" dirty="0">
                         <a:latin typeface="PingFang SC" charset="0"/>
@@ -9130,7 +9842,271 @@
                           <a:ea typeface="PingFang SC" pitchFamily="34" charset="-122"/>
                           <a:cs typeface="PingFang SC" pitchFamily="34" charset="-120"/>
                         </a:rPr>
-                        <a:t>audit_workbook</a:t>
+                        <a:t>inspect_workbook</a:t>
+                      </a:r>
+                      <a:endParaRPr lang="en-US" sz="1100" dirty="0">
+                        <a:latin typeface="PingFang SC" charset="0"/>
+                        <a:ea typeface="PingFang SC" charset="0"/>
+                        <a:cs typeface="PingFang SC" charset="0"/>
+                      </a:endParaRPr>
+                    </a:p>
+                  </a:txBody>
+                  <a:tcPr marL="91440" marR="91440" marT="45720" marB="45720" anchor="ctr">
+                    <a:lnL w="5080" cap="flat" cmpd="sng" algn="ctr">
+                      <a:solidFill>
+                        <a:srgbClr val="E8EAED"/>
+                      </a:solidFill>
+                      <a:prstDash val="solid"/>
+                      <a:round/>
+                      <a:headEnd type="none" w="med" len="med"/>
+                      <a:tailEnd type="none" w="med" len="med"/>
+                    </a:lnL>
+                    <a:lnR w="5080" cap="flat" cmpd="sng" algn="ctr">
+                      <a:solidFill>
+                        <a:srgbClr val="E8EAED"/>
+                      </a:solidFill>
+                      <a:prstDash val="solid"/>
+                      <a:round/>
+                      <a:headEnd type="none" w="med" len="med"/>
+                      <a:tailEnd type="none" w="med" len="med"/>
+                    </a:lnR>
+                    <a:lnT w="5080" cap="flat" cmpd="sng" algn="ctr">
+                      <a:solidFill>
+                        <a:srgbClr val="E8EAED"/>
+                      </a:solidFill>
+                      <a:prstDash val="solid"/>
+                      <a:round/>
+                      <a:headEnd type="none" w="med" len="med"/>
+                      <a:tailEnd type="none" w="med" len="med"/>
+                    </a:lnT>
+                    <a:lnB w="5080" cap="flat" cmpd="sng" algn="ctr">
+                      <a:solidFill>
+                        <a:srgbClr val="E8EAED"/>
+                      </a:solidFill>
+                      <a:prstDash val="solid"/>
+                      <a:round/>
+                      <a:headEnd type="none" w="med" len="med"/>
+                      <a:tailEnd type="none" w="med" len="med"/>
+                    </a:lnB>
+                  </a:tcPr>
+                </a:tc>
+              </a:tr>
+              <a:tr h="292608">
+                <a:tc>
+                  <a:txBody>
+                    <a:bodyPr/>
+                    <a:lstStyle/>
+                    <a:p>
+                      <a:pPr indent="0" marL="0">
+                        <a:buNone/>
+                      </a:pPr>
+                      <a:r>
+                        <a:rPr lang="en-US" sz="1100" b="1" dirty="0">
+                          <a:solidFill>
+                            <a:srgbClr val="1F2937"/>
+                          </a:solidFill>
+                          <a:latin typeface="PingFang SC" pitchFamily="34" charset="0"/>
+                          <a:ea typeface="PingFang SC" pitchFamily="34" charset="-122"/>
+                          <a:cs typeface="PingFang SC" pitchFamily="34" charset="-120"/>
+                        </a:rPr>
+                        <a:t>OpenXML 校验</a:t>
+                      </a:r>
+                      <a:endParaRPr lang="en-US" sz="1100" dirty="0">
+                        <a:latin typeface="PingFang SC" charset="0"/>
+                        <a:ea typeface="PingFang SC" charset="0"/>
+                        <a:cs typeface="PingFang SC" charset="0"/>
+                      </a:endParaRPr>
+                    </a:p>
+                  </a:txBody>
+                  <a:tcPr marL="91440" marR="91440" marT="45720" marB="45720" anchor="ctr">
+                    <a:lnL w="5080" cap="flat" cmpd="sng" algn="ctr">
+                      <a:solidFill>
+                        <a:srgbClr val="E8EAED"/>
+                      </a:solidFill>
+                      <a:prstDash val="solid"/>
+                      <a:round/>
+                      <a:headEnd type="none" w="med" len="med"/>
+                      <a:tailEnd type="none" w="med" len="med"/>
+                    </a:lnL>
+                    <a:lnR w="5080" cap="flat" cmpd="sng" algn="ctr">
+                      <a:solidFill>
+                        <a:srgbClr val="E8EAED"/>
+                      </a:solidFill>
+                      <a:prstDash val="solid"/>
+                      <a:round/>
+                      <a:headEnd type="none" w="med" len="med"/>
+                      <a:tailEnd type="none" w="med" len="med"/>
+                    </a:lnR>
+                    <a:lnT w="5080" cap="flat" cmpd="sng" algn="ctr">
+                      <a:solidFill>
+                        <a:srgbClr val="E8EAED"/>
+                      </a:solidFill>
+                      <a:prstDash val="solid"/>
+                      <a:round/>
+                      <a:headEnd type="none" w="med" len="med"/>
+                      <a:tailEnd type="none" w="med" len="med"/>
+                    </a:lnT>
+                    <a:lnB w="5080" cap="flat" cmpd="sng" algn="ctr">
+                      <a:solidFill>
+                        <a:srgbClr val="E8EAED"/>
+                      </a:solidFill>
+                      <a:prstDash val="solid"/>
+                      <a:round/>
+                      <a:headEnd type="none" w="med" len="med"/>
+                      <a:tailEnd type="none" w="med" len="med"/>
+                    </a:lnB>
+                  </a:tcPr>
+                </a:tc>
+                <a:tc>
+                  <a:txBody>
+                    <a:bodyPr/>
+                    <a:lstStyle/>
+                    <a:p>
+                      <a:pPr indent="0" marL="0">
+                        <a:buNone/>
+                      </a:pPr>
+                      <a:r>
+                        <a:rPr lang="en-US" sz="1100" dirty="0">
+                          <a:solidFill>
+                            <a:srgbClr val="1F2937"/>
+                          </a:solidFill>
+                          <a:latin typeface="PingFang SC" pitchFamily="34" charset="0"/>
+                          <a:ea typeface="PingFang SC" pitchFamily="34" charset="-122"/>
+                          <a:cs typeface="PingFang SC" pitchFamily="34" charset="-120"/>
+                        </a:rPr>
+                        <a:t>validate_workbook</a:t>
+                      </a:r>
+                      <a:endParaRPr lang="en-US" sz="1100" dirty="0">
+                        <a:latin typeface="PingFang SC" charset="0"/>
+                        <a:ea typeface="PingFang SC" charset="0"/>
+                        <a:cs typeface="PingFang SC" charset="0"/>
+                      </a:endParaRPr>
+                    </a:p>
+                  </a:txBody>
+                  <a:tcPr marL="91440" marR="91440" marT="45720" marB="45720" anchor="ctr">
+                    <a:lnL w="5080" cap="flat" cmpd="sng" algn="ctr">
+                      <a:solidFill>
+                        <a:srgbClr val="E8EAED"/>
+                      </a:solidFill>
+                      <a:prstDash val="solid"/>
+                      <a:round/>
+                      <a:headEnd type="none" w="med" len="med"/>
+                      <a:tailEnd type="none" w="med" len="med"/>
+                    </a:lnL>
+                    <a:lnR w="5080" cap="flat" cmpd="sng" algn="ctr">
+                      <a:solidFill>
+                        <a:srgbClr val="E8EAED"/>
+                      </a:solidFill>
+                      <a:prstDash val="solid"/>
+                      <a:round/>
+                      <a:headEnd type="none" w="med" len="med"/>
+                      <a:tailEnd type="none" w="med" len="med"/>
+                    </a:lnR>
+                    <a:lnT w="5080" cap="flat" cmpd="sng" algn="ctr">
+                      <a:solidFill>
+                        <a:srgbClr val="E8EAED"/>
+                      </a:solidFill>
+                      <a:prstDash val="solid"/>
+                      <a:round/>
+                      <a:headEnd type="none" w="med" len="med"/>
+                      <a:tailEnd type="none" w="med" len="med"/>
+                    </a:lnT>
+                    <a:lnB w="5080" cap="flat" cmpd="sng" algn="ctr">
+                      <a:solidFill>
+                        <a:srgbClr val="E8EAED"/>
+                      </a:solidFill>
+                      <a:prstDash val="solid"/>
+                      <a:round/>
+                      <a:headEnd type="none" w="med" len="med"/>
+                      <a:tailEnd type="none" w="med" len="med"/>
+                    </a:lnB>
+                  </a:tcPr>
+                </a:tc>
+              </a:tr>
+              <a:tr h="292608">
+                <a:tc>
+                  <a:txBody>
+                    <a:bodyPr/>
+                    <a:lstStyle/>
+                    <a:p>
+                      <a:pPr indent="0" marL="0">
+                        <a:buNone/>
+                      </a:pPr>
+                      <a:r>
+                        <a:rPr lang="en-US" sz="1100" b="1" dirty="0">
+                          <a:solidFill>
+                            <a:srgbClr val="1F2937"/>
+                          </a:solidFill>
+                          <a:latin typeface="PingFang SC" pitchFamily="34" charset="0"/>
+                          <a:ea typeface="PingFang SC" pitchFamily="34" charset="-122"/>
+                          <a:cs typeface="PingFang SC" pitchFamily="34" charset="-120"/>
+                        </a:rPr>
+                        <a:t>渲染成图</a:t>
+                      </a:r>
+                      <a:endParaRPr lang="en-US" sz="1100" dirty="0">
+                        <a:latin typeface="PingFang SC" charset="0"/>
+                        <a:ea typeface="PingFang SC" charset="0"/>
+                        <a:cs typeface="PingFang SC" charset="0"/>
+                      </a:endParaRPr>
+                    </a:p>
+                  </a:txBody>
+                  <a:tcPr marL="91440" marR="91440" marT="45720" marB="45720" anchor="ctr">
+                    <a:lnL w="5080" cap="flat" cmpd="sng" algn="ctr">
+                      <a:solidFill>
+                        <a:srgbClr val="E8EAED"/>
+                      </a:solidFill>
+                      <a:prstDash val="solid"/>
+                      <a:round/>
+                      <a:headEnd type="none" w="med" len="med"/>
+                      <a:tailEnd type="none" w="med" len="med"/>
+                    </a:lnL>
+                    <a:lnR w="5080" cap="flat" cmpd="sng" algn="ctr">
+                      <a:solidFill>
+                        <a:srgbClr val="E8EAED"/>
+                      </a:solidFill>
+                      <a:prstDash val="solid"/>
+                      <a:round/>
+                      <a:headEnd type="none" w="med" len="med"/>
+                      <a:tailEnd type="none" w="med" len="med"/>
+                    </a:lnR>
+                    <a:lnT w="5080" cap="flat" cmpd="sng" algn="ctr">
+                      <a:solidFill>
+                        <a:srgbClr val="E8EAED"/>
+                      </a:solidFill>
+                      <a:prstDash val="solid"/>
+                      <a:round/>
+                      <a:headEnd type="none" w="med" len="med"/>
+                      <a:tailEnd type="none" w="med" len="med"/>
+                    </a:lnT>
+                    <a:lnB w="5080" cap="flat" cmpd="sng" algn="ctr">
+                      <a:solidFill>
+                        <a:srgbClr val="E8EAED"/>
+                      </a:solidFill>
+                      <a:prstDash val="solid"/>
+                      <a:round/>
+                      <a:headEnd type="none" w="med" len="med"/>
+                      <a:tailEnd type="none" w="med" len="med"/>
+                    </a:lnB>
+                  </a:tcPr>
+                </a:tc>
+                <a:tc>
+                  <a:txBody>
+                    <a:bodyPr/>
+                    <a:lstStyle/>
+                    <a:p>
+                      <a:pPr indent="0" marL="0">
+                        <a:buNone/>
+                      </a:pPr>
+                      <a:r>
+                        <a:rPr lang="en-US" sz="1100" dirty="0">
+                          <a:solidFill>
+                            <a:srgbClr val="1F2937"/>
+                          </a:solidFill>
+                          <a:latin typeface="PingFang SC" pitchFamily="34" charset="0"/>
+                          <a:ea typeface="PingFang SC" pitchFamily="34" charset="-122"/>
+                          <a:cs typeface="PingFang SC" pitchFamily="34" charset="-120"/>
+                        </a:rPr>
+                        <a:t>render_workbook</a:t>
                       </a:r>
                       <a:endParaRPr lang="en-US" sz="1100" dirty="0">
                         <a:latin typeface="PingFang SC" charset="0"/>
@@ -10215,7 +11191,7 @@
                 <a:ea typeface="PingFang SC" pitchFamily="34" charset="-122"/>
                 <a:cs typeface="PingFang SC" pitchFamily="34" charset="-120"/>
               </a:rPr>
-              <a:t>下页继续：运营 3 工具、报告 7 工具。stdio 合计 5+6+3+7=21；preflight / audit 不是 MCP 工具。</a:t>
+              <a:t>下页继续：运营 3 工具、报告 7 工具。stdio 合计 9+6+3+7=25。preflight / audit 是 python 内护栏，不是 MCP。</a:t>
             </a:r>
             <a:endParaRPr lang="en-US" sz="1000" dirty="0"/>
           </a:p>
@@ -10325,7 +11301,7 @@
                 <a:ea typeface="PingFang SC" pitchFamily="34" charset="-122"/>
                 <a:cs typeface="PingFang SC" pitchFamily="34" charset="-120"/>
               </a:rPr>
-              <a:t>17 / 21</a:t>
+              <a:t>17 / 29</a:t>
             </a:r>
             <a:endParaRPr lang="en-US" sz="1000" dirty="0"/>
           </a:p>
@@ -12411,7 +13387,7 @@
                 <a:ea typeface="PingFang SC" pitchFamily="34" charset="-122"/>
                 <a:cs typeface="PingFang SC" pitchFamily="34" charset="-120"/>
               </a:rPr>
-              <a:t>18 / 21</a:t>
+              <a:t>18 / 29</a:t>
             </a:r>
             <a:endParaRPr lang="en-US" sz="1000" dirty="0"/>
           </a:p>
@@ -13209,7 +14185,7 @@
                 <a:ea typeface="PingFang SC" pitchFamily="34" charset="-122"/>
                 <a:cs typeface="PingFang SC" pitchFamily="34" charset="-120"/>
               </a:rPr>
-              <a:t>19 / 21</a:t>
+              <a:t>19 / 29</a:t>
             </a:r>
             <a:endParaRPr lang="en-US" sz="1000" dirty="0"/>
           </a:p>
@@ -13542,7 +14518,7 @@
                 <a:ea typeface="PingFang SC" pitchFamily="34" charset="-122"/>
                 <a:cs typeface="PingFang SC" pitchFamily="34" charset="-120"/>
               </a:rPr>
-              <a:t>21</a:t>
+              <a:t>25</a:t>
             </a:r>
             <a:endParaRPr lang="en-US" sz="2600" dirty="0"/>
           </a:p>
@@ -13620,7 +14596,7 @@
                 <a:ea typeface="PingFang SC" pitchFamily="34" charset="-122"/>
                 <a:cs typeface="PingFang SC" pitchFamily="34" charset="-120"/>
               </a:rPr>
-              <a:t>5 + 7 + 3 + 6</a:t>
+              <a:t>9 + 6 + 3 + 7</a:t>
             </a:r>
             <a:endParaRPr lang="en-US" sz="1100" dirty="0"/>
           </a:p>
@@ -15128,7 +16104,7 @@
                 <a:ea typeface="PingFang SC" pitchFamily="34" charset="-122"/>
                 <a:cs typeface="PingFang SC" pitchFamily="34" charset="-120"/>
               </a:rPr>
-              <a:t>2 / 21</a:t>
+              <a:t>2 / 29</a:t>
             </a:r>
             <a:endParaRPr lang="en-US" sz="1000" dirty="0"/>
           </a:p>
@@ -15599,7 +16575,7 @@
                 <a:ea typeface="PingFang SC" pitchFamily="34" charset="-122"/>
                 <a:cs typeface="PingFang SC" pitchFamily="34" charset="-120"/>
               </a:rPr>
-              <a:t>5 工具护栏 → pandas 精算 → 写后自检</a:t>
+              <a:t>9 工具护栏 → pandas 精算 → 写后自检</a:t>
             </a:r>
             <a:endParaRPr lang="en-US" sz="1200" dirty="0"/>
           </a:p>
@@ -16031,7 +17007,7 @@
                 <a:ea typeface="PingFang SC" pitchFamily="34" charset="-122"/>
                 <a:cs typeface="PingFang SC" pitchFamily="34" charset="-120"/>
               </a:rPr>
-              <a:t>报告可视化</a:t>
+              <a:t>L1 / L2 / L3</a:t>
             </a:r>
             <a:endParaRPr lang="en-US" sz="1600" dirty="0"/>
           </a:p>
@@ -16070,7 +17046,7 @@
                 <a:ea typeface="PingFang SC" pitchFamily="34" charset="-122"/>
                 <a:cs typeface="PingFang SC" pitchFamily="34" charset="-120"/>
               </a:rPr>
-              <a:t>交叉表 + 五类图 + docx 组装</a:t>
+              <a:t>skill列表摘要 → skill → mcp列表namespace前缀 → 详细mcp → 文件摘要 → 文件详情</a:t>
             </a:r>
             <a:endParaRPr lang="en-US" sz="1200" dirty="0"/>
           </a:p>
@@ -16188,7 +17164,7 @@
                 <a:ea typeface="PingFang SC" pitchFamily="34" charset="-122"/>
                 <a:cs typeface="PingFang SC" pitchFamily="34" charset="-120"/>
               </a:rPr>
-              <a:t>21 个工具中文名</a:t>
+              <a:t>相对 2.0.0</a:t>
             </a:r>
             <a:endParaRPr lang="en-US" sz="1600" dirty="0"/>
           </a:p>
@@ -16227,7 +17203,7 @@
                 <a:ea typeface="PingFang SC" pitchFamily="34" charset="-122"/>
                 <a:cs typeface="PingFang SC" pitchFamily="34" charset="-120"/>
               </a:rPr>
-              <a:t>Excel 5 · 知识库 6 · 运营 3 · 报告 7</a:t>
+              <a:t>缓存命中率、前缀一致性省 token、Files 可下载；旧版是黑盒</a:t>
             </a:r>
             <a:endParaRPr lang="en-US" sz="1200" dirty="0"/>
           </a:p>
@@ -16345,7 +17321,7 @@
                 <a:ea typeface="PingFang SC" pitchFamily="34" charset="-122"/>
                 <a:cs typeface="PingFang SC" pitchFamily="34" charset="-120"/>
               </a:rPr>
-              <a:t>能问什么</a:t>
+              <a:t>四助手任务分布</a:t>
             </a:r>
             <a:endParaRPr lang="en-US" sz="1600" dirty="0"/>
           </a:p>
@@ -16384,7 +17360,7 @@
                 <a:ea typeface="PingFang SC" pitchFamily="34" charset="-122"/>
                 <a:cs typeface="PingFang SC" pitchFamily="34" charset="-120"/>
               </a:rPr>
-              <a:t>token 走内核账本；失败率 JSONL 无样本</a:t>
+              <a:t>每个助手一张图；优化方向与落地合同一致</a:t>
             </a:r>
             <a:endParaRPr lang="en-US" sz="1200" dirty="0"/>
           </a:p>
@@ -16494,7 +17470,7 @@
                 <a:ea typeface="PingFang SC" pitchFamily="34" charset="-122"/>
                 <a:cs typeface="PingFang SC" pitchFamily="34" charset="-120"/>
               </a:rPr>
-              <a:t>20 / 21</a:t>
+              <a:t>20 / 29</a:t>
             </a:r>
             <a:endParaRPr lang="en-US" sz="1000" dirty="0"/>
           </a:p>
@@ -17022,6 +17998,2763 @@
 <file path=ppt/slides/slide21.xml><?xml version="1.0" encoding="utf-8"?>
 <p:sld xmlns:a="http://schemas.openxmlformats.org/drawingml/2006/main" xmlns:r="http://schemas.openxmlformats.org/officeDocument/2006/relationships" xmlns:p="http://schemas.openxmlformats.org/presentationml/2006/main">
   <p:cSld name="Slide 21">
+    <p:bg>
+      <p:bgPr>
+        <a:solidFill>
+          <a:srgbClr val="FFFFFF"/>
+        </a:solidFill>
+      </p:bgPr>
+    </p:bg>
+    <p:spTree>
+      <p:nvGrpSpPr>
+        <p:cNvPr id="1" name=""/>
+        <p:cNvGrpSpPr/>
+        <p:nvPr/>
+      </p:nvGrpSpPr>
+      <p:grpSpPr>
+        <a:xfrm>
+          <a:off x="0" y="0"/>
+          <a:ext cx="0" cy="0"/>
+          <a:chOff x="0" y="0"/>
+          <a:chExt cx="0" cy="0"/>
+        </a:xfrm>
+      </p:grpSpPr>
+      <p:sp>
+        <p:nvSpPr>
+          <p:cNvPr id="2" name="Text 0"/>
+          <p:cNvSpPr/>
+          <p:nvPr/>
+        </p:nvSpPr>
+        <p:spPr>
+          <a:xfrm>
+            <a:off x="548640" y="256032"/>
+            <a:ext cx="10424160" cy="457200"/>
+          </a:xfrm>
+          <a:prstGeom prst="rect">
+            <a:avLst/>
+          </a:prstGeom>
+          <a:noFill/>
+          <a:ln/>
+        </p:spPr>
+        <p:txBody>
+          <a:bodyPr wrap="square" lIns="0" tIns="0" rIns="0" bIns="0" rtlCol="0" anchor="ctr"/>
+          <a:lstStyle/>
+          <a:p>
+            <a:pPr indent="0" marL="0">
+              <a:buNone/>
+            </a:pPr>
+            <a:r>
+              <a:rPr lang="en-US" sz="2000" b="1" dirty="0">
+                <a:solidFill>
+                  <a:srgbClr val="1F2937"/>
+                </a:solidFill>
+                <a:latin typeface="PingFang SC" pitchFamily="34" charset="0"/>
+                <a:ea typeface="PingFang SC" pitchFamily="34" charset="-122"/>
+                <a:cs typeface="PingFang SC" pitchFamily="34" charset="-120"/>
+              </a:rPr>
+              <a:t>L1 / L2 / L3：上下文渐进式工具加载</a:t>
+            </a:r>
+            <a:endParaRPr lang="en-US" sz="2000" dirty="0"/>
+          </a:p>
+        </p:txBody>
+      </p:sp>
+      <p:sp>
+        <p:nvSpPr>
+          <p:cNvPr id="3" name="Text 1"/>
+          <p:cNvSpPr/>
+          <p:nvPr/>
+        </p:nvSpPr>
+        <p:spPr>
+          <a:xfrm>
+            <a:off x="10972800" y="6492240"/>
+            <a:ext cx="822960" cy="228600"/>
+          </a:xfrm>
+          <a:prstGeom prst="rect">
+            <a:avLst/>
+          </a:prstGeom>
+          <a:noFill/>
+          <a:ln/>
+        </p:spPr>
+        <p:txBody>
+          <a:bodyPr wrap="square" lIns="0" tIns="0" rIns="0" bIns="0" rtlCol="0" anchor="ctr"/>
+          <a:lstStyle/>
+          <a:p>
+            <a:pPr algn="r" indent="0" marL="0">
+              <a:buNone/>
+            </a:pPr>
+            <a:r>
+              <a:rPr lang="en-US" sz="1000" dirty="0">
+                <a:solidFill>
+                  <a:srgbClr val="9CA3AF"/>
+                </a:solidFill>
+                <a:latin typeface="PingFang SC" pitchFamily="34" charset="0"/>
+                <a:ea typeface="PingFang SC" pitchFamily="34" charset="-122"/>
+                <a:cs typeface="PingFang SC" pitchFamily="34" charset="-120"/>
+              </a:rPr>
+              <a:t>21 / 29</a:t>
+            </a:r>
+            <a:endParaRPr lang="en-US" sz="1000" dirty="0"/>
+          </a:p>
+        </p:txBody>
+      </p:sp>
+      <p:sp>
+        <p:nvSpPr>
+          <p:cNvPr id="4" name="Text 2"/>
+          <p:cNvSpPr/>
+          <p:nvPr/>
+        </p:nvSpPr>
+        <p:spPr>
+          <a:xfrm>
+            <a:off x="457200" y="841248"/>
+            <a:ext cx="11247120" cy="384048"/>
+          </a:xfrm>
+          <a:prstGeom prst="rect">
+            <a:avLst/>
+          </a:prstGeom>
+          <a:noFill/>
+          <a:ln/>
+        </p:spPr>
+        <p:txBody>
+          <a:bodyPr wrap="square" lIns="0" tIns="0" rIns="0" bIns="0" rtlCol="0" anchor="ctr"/>
+          <a:lstStyle/>
+          <a:p>
+            <a:pPr algn="ctr" indent="0" marL="0">
+              <a:buNone/>
+            </a:pPr>
+            <a:r>
+              <a:rPr lang="en-US" sz="1400" b="1" dirty="0">
+                <a:solidFill>
+                  <a:srgbClr val="1E2A3A"/>
+                </a:solidFill>
+                <a:latin typeface="PingFang SC" pitchFamily="34" charset="0"/>
+                <a:ea typeface="PingFang SC" pitchFamily="34" charset="-122"/>
+                <a:cs typeface="PingFang SC" pitchFamily="34" charset="-120"/>
+              </a:rPr>
+              <a:t>skill列表摘要 → skill → mcp列表namespace前缀 → 详细mcp → 文件摘要 → 文件详情</a:t>
+            </a:r>
+            <a:endParaRPr lang="en-US" sz="1400" dirty="0"/>
+          </a:p>
+        </p:txBody>
+      </p:sp>
+      <p:sp>
+        <p:nvSpPr>
+          <p:cNvPr id="5" name="Shape 3"/>
+          <p:cNvSpPr/>
+          <p:nvPr/>
+        </p:nvSpPr>
+        <p:spPr>
+          <a:xfrm>
+            <a:off x="457200" y="1371600"/>
+            <a:ext cx="3657600" cy="3246120"/>
+          </a:xfrm>
+          <a:prstGeom prst="rect">
+            <a:avLst/>
+          </a:prstGeom>
+          <a:solidFill>
+            <a:srgbClr val="F7F8FA"/>
+          </a:solidFill>
+          <a:ln/>
+        </p:spPr>
+      </p:sp>
+      <p:sp>
+        <p:nvSpPr>
+          <p:cNvPr id="6" name="Text 4"/>
+          <p:cNvSpPr/>
+          <p:nvPr/>
+        </p:nvSpPr>
+        <p:spPr>
+          <a:xfrm>
+            <a:off x="457200" y="1508760"/>
+            <a:ext cx="3657600" cy="457200"/>
+          </a:xfrm>
+          <a:prstGeom prst="rect">
+            <a:avLst/>
+          </a:prstGeom>
+          <a:noFill/>
+          <a:ln/>
+        </p:spPr>
+        <p:txBody>
+          <a:bodyPr wrap="square" lIns="0" tIns="0" rIns="0" bIns="0" rtlCol="0" anchor="ctr"/>
+          <a:lstStyle/>
+          <a:p>
+            <a:pPr algn="ctr" indent="0" marL="0">
+              <a:buNone/>
+            </a:pPr>
+            <a:r>
+              <a:rPr lang="en-US" sz="2200" b="1" dirty="0">
+                <a:solidFill>
+                  <a:srgbClr val="C5A55A"/>
+                </a:solidFill>
+                <a:latin typeface="PingFang SC" pitchFamily="34" charset="0"/>
+                <a:ea typeface="PingFang SC" pitchFamily="34" charset="-122"/>
+                <a:cs typeface="PingFang SC" pitchFamily="34" charset="-120"/>
+              </a:rPr>
+              <a:t>L1</a:t>
+            </a:r>
+            <a:endParaRPr lang="en-US" sz="2200" dirty="0"/>
+          </a:p>
+        </p:txBody>
+      </p:sp>
+      <p:sp>
+        <p:nvSpPr>
+          <p:cNvPr id="7" name="Text 5"/>
+          <p:cNvSpPr/>
+          <p:nvPr/>
+        </p:nvSpPr>
+        <p:spPr>
+          <a:xfrm>
+            <a:off x="640080" y="2011680"/>
+            <a:ext cx="3291840" cy="502920"/>
+          </a:xfrm>
+          <a:prstGeom prst="rect">
+            <a:avLst/>
+          </a:prstGeom>
+          <a:noFill/>
+          <a:ln/>
+        </p:spPr>
+        <p:txBody>
+          <a:bodyPr wrap="square" lIns="0" tIns="0" rIns="0" bIns="0" rtlCol="0" anchor="ctr"/>
+          <a:lstStyle/>
+          <a:p>
+            <a:pPr algn="ctr" indent="0" marL="0">
+              <a:buNone/>
+            </a:pPr>
+            <a:r>
+              <a:rPr lang="en-US" sz="1600" b="1" dirty="0">
+                <a:solidFill>
+                  <a:srgbClr val="1F2937"/>
+                </a:solidFill>
+                <a:latin typeface="PingFang SC" pitchFamily="34" charset="0"/>
+                <a:ea typeface="PingFang SC" pitchFamily="34" charset="-122"/>
+                <a:cs typeface="PingFang SC" pitchFamily="34" charset="-120"/>
+              </a:rPr>
+              <a:t>skill列表摘要</a:t>
+            </a:r>
+            <a:endParaRPr lang="en-US" sz="1600" dirty="0"/>
+          </a:p>
+        </p:txBody>
+      </p:sp>
+      <p:sp>
+        <p:nvSpPr>
+          <p:cNvPr id="8" name="Text 6"/>
+          <p:cNvSpPr/>
+          <p:nvPr/>
+        </p:nvSpPr>
+        <p:spPr>
+          <a:xfrm>
+            <a:off x="685800" y="2651760"/>
+            <a:ext cx="3200400" cy="1737360"/>
+          </a:xfrm>
+          <a:prstGeom prst="rect">
+            <a:avLst/>
+          </a:prstGeom>
+          <a:noFill/>
+          <a:ln/>
+        </p:spPr>
+        <p:txBody>
+          <a:bodyPr wrap="square" lIns="0" tIns="0" rIns="0" bIns="0" rtlCol="0" anchor="ctr"/>
+          <a:lstStyle/>
+          <a:p>
+            <a:pPr indent="0" marL="0">
+              <a:buNone/>
+            </a:pPr>
+            <a:r>
+              <a:rPr lang="en-US" sz="1300" dirty="0">
+                <a:solidFill>
+                  <a:srgbClr val="6B7280"/>
+                </a:solidFill>
+                <a:latin typeface="PingFang SC" pitchFamily="34" charset="0"/>
+                <a:ea typeface="PingFang SC" pitchFamily="34" charset="-122"/>
+                <a:cs typeface="PingFang SC" pitchFamily="34" charset="-120"/>
+              </a:rPr>
+              <a:t>YAML description 短目录。始终在上下文最前面，前缀不变，利于缓存命中率。</a:t>
+            </a:r>
+            <a:endParaRPr lang="en-US" sz="1300" dirty="0"/>
+          </a:p>
+        </p:txBody>
+      </p:sp>
+      <p:sp>
+        <p:nvSpPr>
+          <p:cNvPr id="9" name="Shape 7"/>
+          <p:cNvSpPr/>
+          <p:nvPr/>
+        </p:nvSpPr>
+        <p:spPr>
+          <a:xfrm>
+            <a:off x="4297680" y="1371600"/>
+            <a:ext cx="3657600" cy="3246120"/>
+          </a:xfrm>
+          <a:prstGeom prst="rect">
+            <a:avLst/>
+          </a:prstGeom>
+          <a:solidFill>
+            <a:srgbClr val="F7F8FA"/>
+          </a:solidFill>
+          <a:ln/>
+        </p:spPr>
+      </p:sp>
+      <p:sp>
+        <p:nvSpPr>
+          <p:cNvPr id="10" name="Text 8"/>
+          <p:cNvSpPr/>
+          <p:nvPr/>
+        </p:nvSpPr>
+        <p:spPr>
+          <a:xfrm>
+            <a:off x="4297680" y="1508760"/>
+            <a:ext cx="3657600" cy="457200"/>
+          </a:xfrm>
+          <a:prstGeom prst="rect">
+            <a:avLst/>
+          </a:prstGeom>
+          <a:noFill/>
+          <a:ln/>
+        </p:spPr>
+        <p:txBody>
+          <a:bodyPr wrap="square" lIns="0" tIns="0" rIns="0" bIns="0" rtlCol="0" anchor="ctr"/>
+          <a:lstStyle/>
+          <a:p>
+            <a:pPr algn="ctr" indent="0" marL="0">
+              <a:buNone/>
+            </a:pPr>
+            <a:r>
+              <a:rPr lang="en-US" sz="2200" b="1" dirty="0">
+                <a:solidFill>
+                  <a:srgbClr val="C5A55A"/>
+                </a:solidFill>
+                <a:latin typeface="PingFang SC" pitchFamily="34" charset="0"/>
+                <a:ea typeface="PingFang SC" pitchFamily="34" charset="-122"/>
+                <a:cs typeface="PingFang SC" pitchFamily="34" charset="-120"/>
+              </a:rPr>
+              <a:t>L2</a:t>
+            </a:r>
+            <a:endParaRPr lang="en-US" sz="2200" dirty="0"/>
+          </a:p>
+        </p:txBody>
+      </p:sp>
+      <p:sp>
+        <p:nvSpPr>
+          <p:cNvPr id="11" name="Text 9"/>
+          <p:cNvSpPr/>
+          <p:nvPr/>
+        </p:nvSpPr>
+        <p:spPr>
+          <a:xfrm>
+            <a:off x="4480560" y="2011680"/>
+            <a:ext cx="3291840" cy="502920"/>
+          </a:xfrm>
+          <a:prstGeom prst="rect">
+            <a:avLst/>
+          </a:prstGeom>
+          <a:noFill/>
+          <a:ln/>
+        </p:spPr>
+        <p:txBody>
+          <a:bodyPr wrap="square" lIns="0" tIns="0" rIns="0" bIns="0" rtlCol="0" anchor="ctr"/>
+          <a:lstStyle/>
+          <a:p>
+            <a:pPr algn="ctr" indent="0" marL="0">
+              <a:buNone/>
+            </a:pPr>
+            <a:r>
+              <a:rPr lang="en-US" sz="1600" b="1" dirty="0">
+                <a:solidFill>
+                  <a:srgbClr val="1F2937"/>
+                </a:solidFill>
+                <a:latin typeface="PingFang SC" pitchFamily="34" charset="0"/>
+                <a:ea typeface="PingFang SC" pitchFamily="34" charset="-122"/>
+                <a:cs typeface="PingFang SC" pitchFamily="34" charset="-120"/>
+              </a:rPr>
+              <a:t>skill + mcp列表</a:t>
+            </a:r>
+            <a:endParaRPr lang="en-US" sz="1600" dirty="0"/>
+          </a:p>
+        </p:txBody>
+      </p:sp>
+      <p:sp>
+        <p:nvSpPr>
+          <p:cNvPr id="12" name="Text 10"/>
+          <p:cNvSpPr/>
+          <p:nvPr/>
+        </p:nvSpPr>
+        <p:spPr>
+          <a:xfrm>
+            <a:off x="4526280" y="2651760"/>
+            <a:ext cx="3200400" cy="1737360"/>
+          </a:xfrm>
+          <a:prstGeom prst="rect">
+            <a:avLst/>
+          </a:prstGeom>
+          <a:noFill/>
+          <a:ln/>
+        </p:spPr>
+        <p:txBody>
+          <a:bodyPr wrap="square" lIns="0" tIns="0" rIns="0" bIns="0" rtlCol="0" anchor="ctr"/>
+          <a:lstStyle/>
+          <a:p>
+            <a:pPr indent="0" marL="0">
+              <a:buNone/>
+            </a:pPr>
+            <a:r>
+              <a:rPr lang="en-US" sz="1300" dirty="0">
+                <a:solidFill>
+                  <a:srgbClr val="6B7280"/>
+                </a:solidFill>
+                <a:latin typeface="PingFang SC" pitchFamily="34" charset="0"/>
+                <a:ea typeface="PingFang SC" pitchFamily="34" charset="-122"/>
+                <a:cs typeface="PingFang SC" pitchFamily="34" charset="-120"/>
+              </a:rPr>
+              <a:t>选中助手后才加载 skill 正文，再给带 namespace前缀 的 mcp列表（excel_guard__ / kb_qa__ / ops_data__ / report_visualizer__）。</a:t>
+            </a:r>
+            <a:endParaRPr lang="en-US" sz="1300" dirty="0"/>
+          </a:p>
+        </p:txBody>
+      </p:sp>
+      <p:sp>
+        <p:nvSpPr>
+          <p:cNvPr id="13" name="Shape 11"/>
+          <p:cNvSpPr/>
+          <p:nvPr/>
+        </p:nvSpPr>
+        <p:spPr>
+          <a:xfrm>
+            <a:off x="8138160" y="1371600"/>
+            <a:ext cx="3657600" cy="3246120"/>
+          </a:xfrm>
+          <a:prstGeom prst="rect">
+            <a:avLst/>
+          </a:prstGeom>
+          <a:solidFill>
+            <a:srgbClr val="F7F8FA"/>
+          </a:solidFill>
+          <a:ln/>
+        </p:spPr>
+      </p:sp>
+      <p:sp>
+        <p:nvSpPr>
+          <p:cNvPr id="14" name="Text 12"/>
+          <p:cNvSpPr/>
+          <p:nvPr/>
+        </p:nvSpPr>
+        <p:spPr>
+          <a:xfrm>
+            <a:off x="8138160" y="1508760"/>
+            <a:ext cx="3657600" cy="457200"/>
+          </a:xfrm>
+          <a:prstGeom prst="rect">
+            <a:avLst/>
+          </a:prstGeom>
+          <a:noFill/>
+          <a:ln/>
+        </p:spPr>
+        <p:txBody>
+          <a:bodyPr wrap="square" lIns="0" tIns="0" rIns="0" bIns="0" rtlCol="0" anchor="ctr"/>
+          <a:lstStyle/>
+          <a:p>
+            <a:pPr algn="ctr" indent="0" marL="0">
+              <a:buNone/>
+            </a:pPr>
+            <a:r>
+              <a:rPr lang="en-US" sz="2200" b="1" dirty="0">
+                <a:solidFill>
+                  <a:srgbClr val="C5A55A"/>
+                </a:solidFill>
+                <a:latin typeface="PingFang SC" pitchFamily="34" charset="0"/>
+                <a:ea typeface="PingFang SC" pitchFamily="34" charset="-122"/>
+                <a:cs typeface="PingFang SC" pitchFamily="34" charset="-120"/>
+              </a:rPr>
+              <a:t>L3</a:t>
+            </a:r>
+            <a:endParaRPr lang="en-US" sz="2200" dirty="0"/>
+          </a:p>
+        </p:txBody>
+      </p:sp>
+      <p:sp>
+        <p:nvSpPr>
+          <p:cNvPr id="15" name="Text 13"/>
+          <p:cNvSpPr/>
+          <p:nvPr/>
+        </p:nvSpPr>
+        <p:spPr>
+          <a:xfrm>
+            <a:off x="8321040" y="2011680"/>
+            <a:ext cx="3291840" cy="502920"/>
+          </a:xfrm>
+          <a:prstGeom prst="rect">
+            <a:avLst/>
+          </a:prstGeom>
+          <a:noFill/>
+          <a:ln/>
+        </p:spPr>
+        <p:txBody>
+          <a:bodyPr wrap="square" lIns="0" tIns="0" rIns="0" bIns="0" rtlCol="0" anchor="ctr"/>
+          <a:lstStyle/>
+          <a:p>
+            <a:pPr algn="ctr" indent="0" marL="0">
+              <a:buNone/>
+            </a:pPr>
+            <a:r>
+              <a:rPr lang="en-US" sz="1600" b="1" dirty="0">
+                <a:solidFill>
+                  <a:srgbClr val="1F2937"/>
+                </a:solidFill>
+                <a:latin typeface="PingFang SC" pitchFamily="34" charset="0"/>
+                <a:ea typeface="PingFang SC" pitchFamily="34" charset="-122"/>
+                <a:cs typeface="PingFang SC" pitchFamily="34" charset="-120"/>
+              </a:rPr>
+              <a:t>详细mcp → 文件</a:t>
+            </a:r>
+            <a:endParaRPr lang="en-US" sz="1600" dirty="0"/>
+          </a:p>
+        </p:txBody>
+      </p:sp>
+      <p:sp>
+        <p:nvSpPr>
+          <p:cNvPr id="16" name="Text 14"/>
+          <p:cNvSpPr/>
+          <p:nvPr/>
+        </p:nvSpPr>
+        <p:spPr>
+          <a:xfrm>
+            <a:off x="8366760" y="2651760"/>
+            <a:ext cx="3200400" cy="1737360"/>
+          </a:xfrm>
+          <a:prstGeom prst="rect">
+            <a:avLst/>
+          </a:prstGeom>
+          <a:noFill/>
+          <a:ln/>
+        </p:spPr>
+        <p:txBody>
+          <a:bodyPr wrap="square" lIns="0" tIns="0" rIns="0" bIns="0" rtlCol="0" anchor="ctr"/>
+          <a:lstStyle/>
+          <a:p>
+            <a:pPr indent="0" marL="0">
+              <a:buNone/>
+            </a:pPr>
+            <a:r>
+              <a:rPr lang="en-US" sz="1300" dirty="0">
+                <a:solidFill>
+                  <a:srgbClr val="6B7280"/>
+                </a:solidFill>
+                <a:latin typeface="PingFang SC" pitchFamily="34" charset="0"/>
+                <a:ea typeface="PingFang SC" pitchFamily="34" charset="-122"/>
+                <a:cs typeface="PingFang SC" pitchFamily="34" charset="-120"/>
+              </a:rPr>
+              <a:t>调用时才展开详细mcp 入参。文件摘要（describe / list / parse）之后才文件详情（markdown / 看图 / 事件 / docx）。</a:t>
+            </a:r>
+            <a:endParaRPr lang="en-US" sz="1300" dirty="0"/>
+          </a:p>
+        </p:txBody>
+      </p:sp>
+      <p:sp>
+        <p:nvSpPr>
+          <p:cNvPr id="17" name="Text 15"/>
+          <p:cNvSpPr/>
+          <p:nvPr/>
+        </p:nvSpPr>
+        <p:spPr>
+          <a:xfrm>
+            <a:off x="457200" y="4800600"/>
+            <a:ext cx="11247120" cy="1371600"/>
+          </a:xfrm>
+          <a:prstGeom prst="rect">
+            <a:avLst/>
+          </a:prstGeom>
+          <a:noFill/>
+          <a:ln/>
+        </p:spPr>
+        <p:txBody>
+          <a:bodyPr wrap="square" lIns="0" tIns="0" rIns="0" bIns="0" rtlCol="0" anchor="ctr"/>
+          <a:lstStyle/>
+          <a:p>
+            <a:pPr indent="0" marL="0">
+              <a:buNone/>
+            </a:pPr>
+            <a:r>
+              <a:rPr lang="en-US" sz="1400" dirty="0">
+                <a:solidFill>
+                  <a:srgbClr val="1F2937"/>
+                </a:solidFill>
+                <a:latin typeface="PingFang SC" pitchFamily="34" charset="0"/>
+                <a:ea typeface="PingFang SC" pitchFamily="34" charset="-122"/>
+                <a:cs typeface="PingFang SC" pitchFamily="34" charset="-120"/>
+              </a:rPr>
+              <a:t>同一套顺序同时降低任务完成时间、提高准确率与完成效率：模型先看见目录，再按需打开工具和文件，不把整表/整库灌进第一轮上下文。</a:t>
+            </a:r>
+            <a:endParaRPr lang="en-US" sz="1400" dirty="0"/>
+          </a:p>
+        </p:txBody>
+      </p:sp>
+      <p:sp>
+        <p:nvSpPr>
+          <p:cNvPr id="18" name="Text 16"/>
+          <p:cNvSpPr/>
+          <p:nvPr/>
+        </p:nvSpPr>
+        <p:spPr>
+          <a:xfrm>
+            <a:off x="548640" y="6473952"/>
+            <a:ext cx="10241280" cy="256032"/>
+          </a:xfrm>
+          <a:prstGeom prst="rect">
+            <a:avLst/>
+          </a:prstGeom>
+          <a:noFill/>
+          <a:ln/>
+        </p:spPr>
+        <p:txBody>
+          <a:bodyPr wrap="square" lIns="0" tIns="0" rIns="0" bIns="0" rtlCol="0" anchor="ctr"/>
+          <a:lstStyle/>
+          <a:p>
+            <a:pPr indent="0" marL="0">
+              <a:buNone/>
+            </a:pPr>
+            <a:r>
+              <a:rPr lang="en-US" sz="1000" i="1" dirty="0">
+                <a:solidFill>
+                  <a:srgbClr val="9CA3AF"/>
+                </a:solidFill>
+                <a:latin typeface="PingFang SC" pitchFamily="34" charset="0"/>
+                <a:ea typeface="PingFang SC" pitchFamily="34" charset="-122"/>
+                <a:cs typeface="PingFang SC" pitchFamily="34" charset="-120"/>
+              </a:rPr>
+              <a:t>合同写在四个 SKILL.md「渐进加载合同」；MCP 配置声明 namespace。POC 不改 QwenPaw 内核。</a:t>
+            </a:r>
+            <a:endParaRPr lang="en-US" sz="1000" dirty="0"/>
+          </a:p>
+        </p:txBody>
+      </p:sp>
+    </p:spTree>
+  </p:cSld>
+  <p:clrMapOvr>
+    <a:masterClrMapping/>
+  </p:clrMapOvr>
+</p:sld>
+</file>
+
+<file path=ppt/slides/slide22.xml><?xml version="1.0" encoding="utf-8"?>
+<p:sld xmlns:a="http://schemas.openxmlformats.org/drawingml/2006/main" xmlns:r="http://schemas.openxmlformats.org/officeDocument/2006/relationships" xmlns:p="http://schemas.openxmlformats.org/presentationml/2006/main">
+  <p:cSld name="Slide 22">
+    <p:bg>
+      <p:bgPr>
+        <a:solidFill>
+          <a:srgbClr val="FFFFFF"/>
+        </a:solidFill>
+      </p:bgPr>
+    </p:bg>
+    <p:spTree>
+      <p:nvGrpSpPr>
+        <p:cNvPr id="1" name=""/>
+        <p:cNvGrpSpPr/>
+        <p:nvPr/>
+      </p:nvGrpSpPr>
+      <p:grpSpPr>
+        <a:xfrm>
+          <a:off x="0" y="0"/>
+          <a:ext cx="0" cy="0"/>
+          <a:chOff x="0" y="0"/>
+          <a:chExt cx="0" cy="0"/>
+        </a:xfrm>
+      </p:grpSpPr>
+      <p:sp>
+        <p:nvSpPr>
+          <p:cNvPr id="2" name="Text 0"/>
+          <p:cNvSpPr/>
+          <p:nvPr/>
+        </p:nvSpPr>
+        <p:spPr>
+          <a:xfrm>
+            <a:off x="548640" y="256032"/>
+            <a:ext cx="10424160" cy="457200"/>
+          </a:xfrm>
+          <a:prstGeom prst="rect">
+            <a:avLst/>
+          </a:prstGeom>
+          <a:noFill/>
+          <a:ln/>
+        </p:spPr>
+        <p:txBody>
+          <a:bodyPr wrap="square" lIns="0" tIns="0" rIns="0" bIns="0" rtlCol="0" anchor="ctr"/>
+          <a:lstStyle/>
+          <a:p>
+            <a:pPr indent="0" marL="0">
+              <a:buNone/>
+            </a:pPr>
+            <a:r>
+              <a:rPr lang="en-US" sz="2000" b="1" dirty="0">
+                <a:solidFill>
+                  <a:srgbClr val="1F2937"/>
+                </a:solidFill>
+                <a:latin typeface="PingFang SC" pitchFamily="34" charset="0"/>
+                <a:ea typeface="PingFang SC" pitchFamily="34" charset="-122"/>
+                <a:cs typeface="PingFang SC" pitchFamily="34" charset="-120"/>
+              </a:rPr>
+              <a:t>前缀一致性提高缓存命中率，从而省 token、提高 ROI</a:t>
+            </a:r>
+            <a:endParaRPr lang="en-US" sz="2000" dirty="0"/>
+          </a:p>
+        </p:txBody>
+      </p:sp>
+      <p:sp>
+        <p:nvSpPr>
+          <p:cNvPr id="3" name="Text 1"/>
+          <p:cNvSpPr/>
+          <p:nvPr/>
+        </p:nvSpPr>
+        <p:spPr>
+          <a:xfrm>
+            <a:off x="10972800" y="6492240"/>
+            <a:ext cx="822960" cy="228600"/>
+          </a:xfrm>
+          <a:prstGeom prst="rect">
+            <a:avLst/>
+          </a:prstGeom>
+          <a:noFill/>
+          <a:ln/>
+        </p:spPr>
+        <p:txBody>
+          <a:bodyPr wrap="square" lIns="0" tIns="0" rIns="0" bIns="0" rtlCol="0" anchor="ctr"/>
+          <a:lstStyle/>
+          <a:p>
+            <a:pPr algn="r" indent="0" marL="0">
+              <a:buNone/>
+            </a:pPr>
+            <a:r>
+              <a:rPr lang="en-US" sz="1000" dirty="0">
+                <a:solidFill>
+                  <a:srgbClr val="9CA3AF"/>
+                </a:solidFill>
+                <a:latin typeface="PingFang SC" pitchFamily="34" charset="0"/>
+                <a:ea typeface="PingFang SC" pitchFamily="34" charset="-122"/>
+                <a:cs typeface="PingFang SC" pitchFamily="34" charset="-120"/>
+              </a:rPr>
+              <a:t>22 / 29</a:t>
+            </a:r>
+            <a:endParaRPr lang="en-US" sz="1000" dirty="0"/>
+          </a:p>
+        </p:txBody>
+      </p:sp>
+      <p:sp>
+        <p:nvSpPr>
+          <p:cNvPr id="4" name="Shape 2"/>
+          <p:cNvSpPr/>
+          <p:nvPr/>
+        </p:nvSpPr>
+        <p:spPr>
+          <a:xfrm>
+            <a:off x="502920" y="960120"/>
+            <a:ext cx="5623560" cy="2286000"/>
+          </a:xfrm>
+          <a:prstGeom prst="rect">
+            <a:avLst/>
+          </a:prstGeom>
+          <a:solidFill>
+            <a:srgbClr val="F7F8FA"/>
+          </a:solidFill>
+          <a:ln/>
+        </p:spPr>
+      </p:sp>
+      <p:sp>
+        <p:nvSpPr>
+          <p:cNvPr id="5" name="Text 3"/>
+          <p:cNvSpPr/>
+          <p:nvPr/>
+        </p:nvSpPr>
+        <p:spPr>
+          <a:xfrm>
+            <a:off x="777240" y="1188720"/>
+            <a:ext cx="5074920" cy="411480"/>
+          </a:xfrm>
+          <a:prstGeom prst="rect">
+            <a:avLst/>
+          </a:prstGeom>
+          <a:noFill/>
+          <a:ln/>
+        </p:spPr>
+        <p:txBody>
+          <a:bodyPr wrap="square" lIns="0" tIns="0" rIns="0" bIns="0" rtlCol="0" anchor="ctr"/>
+          <a:lstStyle/>
+          <a:p>
+            <a:pPr indent="0" marL="0">
+              <a:buNone/>
+            </a:pPr>
+            <a:r>
+              <a:rPr lang="en-US" sz="1800" b="1" dirty="0">
+                <a:solidFill>
+                  <a:srgbClr val="1E2A3A"/>
+                </a:solidFill>
+                <a:latin typeface="PingFang SC" pitchFamily="34" charset="0"/>
+                <a:ea typeface="PingFang SC" pitchFamily="34" charset="-122"/>
+                <a:cs typeface="PingFang SC" pitchFamily="34" charset="-120"/>
+              </a:rPr>
+              <a:t>缓存命中率</a:t>
+            </a:r>
+            <a:endParaRPr lang="en-US" sz="1800" dirty="0"/>
+          </a:p>
+        </p:txBody>
+      </p:sp>
+      <p:sp>
+        <p:nvSpPr>
+          <p:cNvPr id="6" name="Text 4"/>
+          <p:cNvSpPr/>
+          <p:nvPr/>
+        </p:nvSpPr>
+        <p:spPr>
+          <a:xfrm>
+            <a:off x="777240" y="1737360"/>
+            <a:ext cx="5074920" cy="1280160"/>
+          </a:xfrm>
+          <a:prstGeom prst="rect">
+            <a:avLst/>
+          </a:prstGeom>
+          <a:noFill/>
+          <a:ln/>
+        </p:spPr>
+        <p:txBody>
+          <a:bodyPr wrap="square" lIns="0" tIns="0" rIns="0" bIns="0" rtlCol="0" anchor="ctr"/>
+          <a:lstStyle/>
+          <a:p>
+            <a:pPr indent="0" marL="0">
+              <a:buNone/>
+            </a:pPr>
+            <a:r>
+              <a:rPr lang="en-US" sz="1400" dirty="0">
+                <a:solidFill>
+                  <a:srgbClr val="6B7280"/>
+                </a:solidFill>
+                <a:latin typeface="PingFang SC" pitchFamily="34" charset="0"/>
+                <a:ea typeface="PingFang SC" pitchFamily="34" charset="-122"/>
+                <a:cs typeface="PingFang SC" pitchFamily="34" charset="-120"/>
+              </a:rPr>
+              <a:t>L1 skill列表摘要每轮相同。宿主 2.2.2b1 用 cache_read_tokens / cache_hit_rate 记账。前缀稳定 → 更多 prompt 走缓存。</a:t>
+            </a:r>
+            <a:endParaRPr lang="en-US" sz="1400" dirty="0"/>
+          </a:p>
+        </p:txBody>
+      </p:sp>
+      <p:sp>
+        <p:nvSpPr>
+          <p:cNvPr id="7" name="Shape 5"/>
+          <p:cNvSpPr/>
+          <p:nvPr/>
+        </p:nvSpPr>
+        <p:spPr>
+          <a:xfrm>
+            <a:off x="6309360" y="960120"/>
+            <a:ext cx="5623560" cy="2286000"/>
+          </a:xfrm>
+          <a:prstGeom prst="rect">
+            <a:avLst/>
+          </a:prstGeom>
+          <a:solidFill>
+            <a:srgbClr val="F7F8FA"/>
+          </a:solidFill>
+          <a:ln/>
+        </p:spPr>
+      </p:sp>
+      <p:sp>
+        <p:nvSpPr>
+          <p:cNvPr id="8" name="Text 6"/>
+          <p:cNvSpPr/>
+          <p:nvPr/>
+        </p:nvSpPr>
+        <p:spPr>
+          <a:xfrm>
+            <a:off x="6583680" y="1188720"/>
+            <a:ext cx="5074920" cy="411480"/>
+          </a:xfrm>
+          <a:prstGeom prst="rect">
+            <a:avLst/>
+          </a:prstGeom>
+          <a:noFill/>
+          <a:ln/>
+        </p:spPr>
+        <p:txBody>
+          <a:bodyPr wrap="square" lIns="0" tIns="0" rIns="0" bIns="0" rtlCol="0" anchor="ctr"/>
+          <a:lstStyle/>
+          <a:p>
+            <a:pPr indent="0" marL="0">
+              <a:buNone/>
+            </a:pPr>
+            <a:r>
+              <a:rPr lang="en-US" sz="1800" b="1" dirty="0">
+                <a:solidFill>
+                  <a:srgbClr val="1E2A3A"/>
+                </a:solidFill>
+                <a:latin typeface="PingFang SC" pitchFamily="34" charset="0"/>
+                <a:ea typeface="PingFang SC" pitchFamily="34" charset="-122"/>
+                <a:cs typeface="PingFang SC" pitchFamily="34" charset="-120"/>
+              </a:rPr>
+              <a:t>前缀一致性</a:t>
+            </a:r>
+            <a:endParaRPr lang="en-US" sz="1800" dirty="0"/>
+          </a:p>
+        </p:txBody>
+      </p:sp>
+      <p:sp>
+        <p:nvSpPr>
+          <p:cNvPr id="9" name="Text 7"/>
+          <p:cNvSpPr/>
+          <p:nvPr/>
+        </p:nvSpPr>
+        <p:spPr>
+          <a:xfrm>
+            <a:off x="6583680" y="1737360"/>
+            <a:ext cx="5074920" cy="1280160"/>
+          </a:xfrm>
+          <a:prstGeom prst="rect">
+            <a:avLst/>
+          </a:prstGeom>
+          <a:noFill/>
+          <a:ln/>
+        </p:spPr>
+        <p:txBody>
+          <a:bodyPr wrap="square" lIns="0" tIns="0" rIns="0" bIns="0" rtlCol="0" anchor="ctr"/>
+          <a:lstStyle/>
+          <a:p>
+            <a:pPr indent="0" marL="0">
+              <a:buNone/>
+            </a:pPr>
+            <a:r>
+              <a:rPr lang="en-US" sz="1400" dirty="0">
+                <a:solidFill>
+                  <a:srgbClr val="6B7280"/>
+                </a:solidFill>
+                <a:latin typeface="PingFang SC" pitchFamily="34" charset="0"/>
+                <a:ea typeface="PingFang SC" pitchFamily="34" charset="-122"/>
+                <a:cs typeface="PingFang SC" pitchFamily="34" charset="-120"/>
+              </a:rPr>
+              <a:t>后置 skill 正文、mcp列表、详细mcp、文件摘要、文件详情。变的是后缀，不变的是前缀，KV cache 可复用。</a:t>
+            </a:r>
+            <a:endParaRPr lang="en-US" sz="1400" dirty="0"/>
+          </a:p>
+        </p:txBody>
+      </p:sp>
+      <p:sp>
+        <p:nvSpPr>
+          <p:cNvPr id="10" name="Shape 8"/>
+          <p:cNvSpPr/>
+          <p:nvPr/>
+        </p:nvSpPr>
+        <p:spPr>
+          <a:xfrm>
+            <a:off x="502920" y="3429000"/>
+            <a:ext cx="5623560" cy="2286000"/>
+          </a:xfrm>
+          <a:prstGeom prst="rect">
+            <a:avLst/>
+          </a:prstGeom>
+          <a:solidFill>
+            <a:srgbClr val="F7F8FA"/>
+          </a:solidFill>
+          <a:ln/>
+        </p:spPr>
+      </p:sp>
+      <p:sp>
+        <p:nvSpPr>
+          <p:cNvPr id="11" name="Text 9"/>
+          <p:cNvSpPr/>
+          <p:nvPr/>
+        </p:nvSpPr>
+        <p:spPr>
+          <a:xfrm>
+            <a:off x="777240" y="3657600"/>
+            <a:ext cx="5074920" cy="411480"/>
+          </a:xfrm>
+          <a:prstGeom prst="rect">
+            <a:avLst/>
+          </a:prstGeom>
+          <a:noFill/>
+          <a:ln/>
+        </p:spPr>
+        <p:txBody>
+          <a:bodyPr wrap="square" lIns="0" tIns="0" rIns="0" bIns="0" rtlCol="0" anchor="ctr"/>
+          <a:lstStyle/>
+          <a:p>
+            <a:pPr indent="0" marL="0">
+              <a:buNone/>
+            </a:pPr>
+            <a:r>
+              <a:rPr lang="en-US" sz="1800" b="1" dirty="0">
+                <a:solidFill>
+                  <a:srgbClr val="1E2A3A"/>
+                </a:solidFill>
+                <a:latin typeface="PingFang SC" pitchFamily="34" charset="0"/>
+                <a:ea typeface="PingFang SC" pitchFamily="34" charset="-122"/>
+                <a:cs typeface="PingFang SC" pitchFamily="34" charset="-120"/>
+              </a:rPr>
+              <a:t>token 经济型 ROI</a:t>
+            </a:r>
+            <a:endParaRPr lang="en-US" sz="1800" dirty="0"/>
+          </a:p>
+        </p:txBody>
+      </p:sp>
+      <p:sp>
+        <p:nvSpPr>
+          <p:cNvPr id="12" name="Text 10"/>
+          <p:cNvSpPr/>
+          <p:nvPr/>
+        </p:nvSpPr>
+        <p:spPr>
+          <a:xfrm>
+            <a:off x="777240" y="4206240"/>
+            <a:ext cx="5074920" cy="1280160"/>
+          </a:xfrm>
+          <a:prstGeom prst="rect">
+            <a:avLst/>
+          </a:prstGeom>
+          <a:noFill/>
+          <a:ln/>
+        </p:spPr>
+        <p:txBody>
+          <a:bodyPr wrap="square" lIns="0" tIns="0" rIns="0" bIns="0" rtlCol="0" anchor="ctr"/>
+          <a:lstStyle/>
+          <a:p>
+            <a:pPr indent="0" marL="0">
+              <a:buNone/>
+            </a:pPr>
+            <a:r>
+              <a:rPr lang="en-US" sz="1400" dirty="0">
+                <a:solidFill>
+                  <a:srgbClr val="6B7280"/>
+                </a:solidFill>
+                <a:latin typeface="PingFang SC" pitchFamily="34" charset="0"/>
+                <a:ea typeface="PingFang SC" pitchFamily="34" charset="-122"/>
+                <a:cs typeface="PingFang SC" pitchFamily="34" charset="-120"/>
+              </a:rPr>
+              <a:t>少灌 schema 和整文件，完成时间下降、准确率上升（先摘要再详情），单位任务 token 下降，ROI 提高。</a:t>
+            </a:r>
+            <a:endParaRPr lang="en-US" sz="1400" dirty="0"/>
+          </a:p>
+        </p:txBody>
+      </p:sp>
+      <p:sp>
+        <p:nvSpPr>
+          <p:cNvPr id="13" name="Shape 11"/>
+          <p:cNvSpPr/>
+          <p:nvPr/>
+        </p:nvSpPr>
+        <p:spPr>
+          <a:xfrm>
+            <a:off x="6309360" y="3429000"/>
+            <a:ext cx="5623560" cy="2286000"/>
+          </a:xfrm>
+          <a:prstGeom prst="rect">
+            <a:avLst/>
+          </a:prstGeom>
+          <a:solidFill>
+            <a:srgbClr val="F7F8FA"/>
+          </a:solidFill>
+          <a:ln/>
+        </p:spPr>
+      </p:sp>
+      <p:sp>
+        <p:nvSpPr>
+          <p:cNvPr id="14" name="Text 12"/>
+          <p:cNvSpPr/>
+          <p:nvPr/>
+        </p:nvSpPr>
+        <p:spPr>
+          <a:xfrm>
+            <a:off x="6583680" y="3657600"/>
+            <a:ext cx="5074920" cy="411480"/>
+          </a:xfrm>
+          <a:prstGeom prst="rect">
+            <a:avLst/>
+          </a:prstGeom>
+          <a:noFill/>
+          <a:ln/>
+        </p:spPr>
+        <p:txBody>
+          <a:bodyPr wrap="square" lIns="0" tIns="0" rIns="0" bIns="0" rtlCol="0" anchor="ctr"/>
+          <a:lstStyle/>
+          <a:p>
+            <a:pPr indent="0" marL="0">
+              <a:buNone/>
+            </a:pPr>
+            <a:r>
+              <a:rPr lang="en-US" sz="1800" b="1" dirty="0">
+                <a:solidFill>
+                  <a:srgbClr val="1E2A3A"/>
+                </a:solidFill>
+                <a:latin typeface="PingFang SC" pitchFamily="34" charset="0"/>
+                <a:ea typeface="PingFang SC" pitchFamily="34" charset="-122"/>
+                <a:cs typeface="PingFang SC" pitchFamily="34" charset="-120"/>
+              </a:rPr>
+              <a:t>完成时间 / 准确率</a:t>
+            </a:r>
+            <a:endParaRPr lang="en-US" sz="1800" dirty="0"/>
+          </a:p>
+        </p:txBody>
+      </p:sp>
+      <p:sp>
+        <p:nvSpPr>
+          <p:cNvPr id="15" name="Text 13"/>
+          <p:cNvSpPr/>
+          <p:nvPr/>
+        </p:nvSpPr>
+        <p:spPr>
+          <a:xfrm>
+            <a:off x="6583680" y="4206240"/>
+            <a:ext cx="5074920" cy="1280160"/>
+          </a:xfrm>
+          <a:prstGeom prst="rect">
+            <a:avLst/>
+          </a:prstGeom>
+          <a:noFill/>
+          <a:ln/>
+        </p:spPr>
+        <p:txBody>
+          <a:bodyPr wrap="square" lIns="0" tIns="0" rIns="0" bIns="0" rtlCol="0" anchor="ctr"/>
+          <a:lstStyle/>
+          <a:p>
+            <a:pPr indent="0" marL="0">
+              <a:buNone/>
+            </a:pPr>
+            <a:r>
+              <a:rPr lang="en-US" sz="1400" dirty="0">
+                <a:solidFill>
+                  <a:srgbClr val="6B7280"/>
+                </a:solidFill>
+                <a:latin typeface="PingFang SC" pitchFamily="34" charset="0"/>
+                <a:ea typeface="PingFang SC" pitchFamily="34" charset="-122"/>
+                <a:cs typeface="PingFang SC" pitchFamily="34" charset="-120"/>
+              </a:rPr>
+              <a:t>不必每次重读 25 个工具全文。Excel 先描述表结构再读区间；知识库先检索再看图；运营先列 JSONL 再读事件。</a:t>
+            </a:r>
+            <a:endParaRPr lang="en-US" sz="1400" dirty="0"/>
+          </a:p>
+        </p:txBody>
+      </p:sp>
+      <p:sp>
+        <p:nvSpPr>
+          <p:cNvPr id="16" name="Text 14"/>
+          <p:cNvSpPr/>
+          <p:nvPr/>
+        </p:nvSpPr>
+        <p:spPr>
+          <a:xfrm>
+            <a:off x="548640" y="6473952"/>
+            <a:ext cx="10241280" cy="256032"/>
+          </a:xfrm>
+          <a:prstGeom prst="rect">
+            <a:avLst/>
+          </a:prstGeom>
+          <a:noFill/>
+          <a:ln/>
+        </p:spPr>
+        <p:txBody>
+          <a:bodyPr wrap="square" lIns="0" tIns="0" rIns="0" bIns="0" rtlCol="0" anchor="ctr"/>
+          <a:lstStyle/>
+          <a:p>
+            <a:pPr indent="0" marL="0">
+              <a:buNone/>
+            </a:pPr>
+            <a:r>
+              <a:rPr lang="en-US" sz="1000" i="1" dirty="0">
+                <a:solidFill>
+                  <a:srgbClr val="9CA3AF"/>
+                </a:solidFill>
+                <a:latin typeface="PingFang SC" pitchFamily="34" charset="0"/>
+                <a:ea typeface="PingFang SC" pitchFamily="34" charset="-122"/>
+                <a:cs typeface="PingFang SC" pitchFamily="34" charset="-120"/>
+              </a:rPr>
+              <a:t>机制对比，不编造线上命中百分比。字段见 QwenPaw token_usage.cache_read_tokens。</a:t>
+            </a:r>
+            <a:endParaRPr lang="en-US" sz="1000" dirty="0"/>
+          </a:p>
+        </p:txBody>
+      </p:sp>
+    </p:spTree>
+  </p:cSld>
+  <p:clrMapOvr>
+    <a:masterClrMapping/>
+  </p:clrMapOvr>
+</p:sld>
+</file>
+
+<file path=ppt/slides/slide23.xml><?xml version="1.0" encoding="utf-8"?>
+<p:sld xmlns:a="http://schemas.openxmlformats.org/drawingml/2006/main" xmlns:r="http://schemas.openxmlformats.org/officeDocument/2006/relationships" xmlns:p="http://schemas.openxmlformats.org/presentationml/2006/main">
+  <p:cSld name="Slide 23">
+    <p:bg>
+      <p:bgPr>
+        <a:solidFill>
+          <a:srgbClr val="FFFFFF"/>
+        </a:solidFill>
+      </p:bgPr>
+    </p:bg>
+    <p:spTree>
+      <p:nvGrpSpPr>
+        <p:cNvPr id="1" name=""/>
+        <p:cNvGrpSpPr/>
+        <p:nvPr/>
+      </p:nvGrpSpPr>
+      <p:grpSpPr>
+        <a:xfrm>
+          <a:off x="0" y="0"/>
+          <a:ext cx="0" cy="0"/>
+          <a:chOff x="0" y="0"/>
+          <a:chExt cx="0" cy="0"/>
+        </a:xfrm>
+      </p:grpSpPr>
+      <p:sp>
+        <p:nvSpPr>
+          <p:cNvPr id="2" name="Text 0"/>
+          <p:cNvSpPr/>
+          <p:nvPr/>
+        </p:nvSpPr>
+        <p:spPr>
+          <a:xfrm>
+            <a:off x="548640" y="256032"/>
+            <a:ext cx="10424160" cy="457200"/>
+          </a:xfrm>
+          <a:prstGeom prst="rect">
+            <a:avLst/>
+          </a:prstGeom>
+          <a:noFill/>
+          <a:ln/>
+        </p:spPr>
+        <p:txBody>
+          <a:bodyPr wrap="square" lIns="0" tIns="0" rIns="0" bIns="0" rtlCol="0" anchor="ctr"/>
+          <a:lstStyle/>
+          <a:p>
+            <a:pPr indent="0" marL="0">
+              <a:buNone/>
+            </a:pPr>
+            <a:r>
+              <a:rPr lang="en-US" sz="2000" b="1" dirty="0">
+                <a:solidFill>
+                  <a:srgbClr val="1F2937"/>
+                </a:solidFill>
+                <a:latin typeface="PingFang SC" pitchFamily="34" charset="0"/>
+                <a:ea typeface="PingFang SC" pitchFamily="34" charset="-122"/>
+                <a:cs typeface="PingFang SC" pitchFamily="34" charset="-120"/>
+              </a:rPr>
+              <a:t>新版本比 2.0.0 好：有缓存命中率，还有文件管理系统</a:t>
+            </a:r>
+            <a:endParaRPr lang="en-US" sz="2000" dirty="0"/>
+          </a:p>
+        </p:txBody>
+      </p:sp>
+      <p:sp>
+        <p:nvSpPr>
+          <p:cNvPr id="3" name="Text 1"/>
+          <p:cNvSpPr/>
+          <p:nvPr/>
+        </p:nvSpPr>
+        <p:spPr>
+          <a:xfrm>
+            <a:off x="10972800" y="6492240"/>
+            <a:ext cx="822960" cy="228600"/>
+          </a:xfrm>
+          <a:prstGeom prst="rect">
+            <a:avLst/>
+          </a:prstGeom>
+          <a:noFill/>
+          <a:ln/>
+        </p:spPr>
+        <p:txBody>
+          <a:bodyPr wrap="square" lIns="0" tIns="0" rIns="0" bIns="0" rtlCol="0" anchor="ctr"/>
+          <a:lstStyle/>
+          <a:p>
+            <a:pPr algn="r" indent="0" marL="0">
+              <a:buNone/>
+            </a:pPr>
+            <a:r>
+              <a:rPr lang="en-US" sz="1000" dirty="0">
+                <a:solidFill>
+                  <a:srgbClr val="9CA3AF"/>
+                </a:solidFill>
+                <a:latin typeface="PingFang SC" pitchFamily="34" charset="0"/>
+                <a:ea typeface="PingFang SC" pitchFamily="34" charset="-122"/>
+                <a:cs typeface="PingFang SC" pitchFamily="34" charset="-120"/>
+              </a:rPr>
+              <a:t>23 / 29</a:t>
+            </a:r>
+            <a:endParaRPr lang="en-US" sz="1000" dirty="0"/>
+          </a:p>
+        </p:txBody>
+      </p:sp>
+      <p:sp>
+        <p:nvSpPr>
+          <p:cNvPr id="4" name="Shape 2"/>
+          <p:cNvSpPr/>
+          <p:nvPr/>
+        </p:nvSpPr>
+        <p:spPr>
+          <a:xfrm>
+            <a:off x="502920" y="960120"/>
+            <a:ext cx="5486400" cy="5029200"/>
+          </a:xfrm>
+          <a:prstGeom prst="rect">
+            <a:avLst/>
+          </a:prstGeom>
+          <a:solidFill>
+            <a:srgbClr val="F7F8FA"/>
+          </a:solidFill>
+          <a:ln/>
+        </p:spPr>
+      </p:sp>
+      <p:sp>
+        <p:nvSpPr>
+          <p:cNvPr id="5" name="Text 3"/>
+          <p:cNvSpPr/>
+          <p:nvPr/>
+        </p:nvSpPr>
+        <p:spPr>
+          <a:xfrm>
+            <a:off x="731520" y="1143000"/>
+            <a:ext cx="5029200" cy="411480"/>
+          </a:xfrm>
+          <a:prstGeom prst="rect">
+            <a:avLst/>
+          </a:prstGeom>
+          <a:noFill/>
+          <a:ln/>
+        </p:spPr>
+        <p:txBody>
+          <a:bodyPr wrap="square" lIns="0" tIns="0" rIns="0" bIns="0" rtlCol="0" anchor="ctr"/>
+          <a:lstStyle/>
+          <a:p>
+            <a:pPr indent="0" marL="0">
+              <a:buNone/>
+            </a:pPr>
+            <a:r>
+              <a:rPr lang="en-US" sz="2000" b="1" dirty="0">
+                <a:solidFill>
+                  <a:srgbClr val="C0392B"/>
+                </a:solidFill>
+                <a:latin typeface="PingFang SC" pitchFamily="34" charset="0"/>
+                <a:ea typeface="PingFang SC" pitchFamily="34" charset="-122"/>
+                <a:cs typeface="PingFang SC" pitchFamily="34" charset="-120"/>
+              </a:rPr>
+              <a:t>QwenPaw 2.0.0</a:t>
+            </a:r>
+            <a:endParaRPr lang="en-US" sz="2000" dirty="0"/>
+          </a:p>
+        </p:txBody>
+      </p:sp>
+      <p:sp>
+        <p:nvSpPr>
+          <p:cNvPr id="6" name="Text 4"/>
+          <p:cNvSpPr/>
+          <p:nvPr/>
+        </p:nvSpPr>
+        <p:spPr>
+          <a:xfrm>
+            <a:off x="731520" y="1737360"/>
+            <a:ext cx="5029200" cy="3840480"/>
+          </a:xfrm>
+          <a:prstGeom prst="rect">
+            <a:avLst/>
+          </a:prstGeom>
+          <a:noFill/>
+          <a:ln/>
+        </p:spPr>
+        <p:txBody>
+          <a:bodyPr wrap="square" lIns="0" tIns="0" rIns="0" bIns="0" rtlCol="0" anchor="ctr"/>
+          <a:lstStyle/>
+          <a:p>
+            <a:pPr indent="0" marL="0">
+              <a:buNone/>
+            </a:pPr>
+            <a:r>
+              <a:rPr lang="en-US" sz="1600" dirty="0">
+                <a:solidFill>
+                  <a:srgbClr val="1F2937"/>
+                </a:solidFill>
+                <a:latin typeface="PingFang SC" pitchFamily="34" charset="0"/>
+                <a:ea typeface="PingFang SC" pitchFamily="34" charset="-122"/>
+                <a:cs typeface="PingFang SC" pitchFamily="34" charset="-120"/>
+              </a:rPr>
+              <a:t>操作像黑盒。没有 Files 页，生成的表格/报告/页图你看不见、不能下载。没有 cache_read_tokens，前缀即使用了也无从计量缓存命中率。助手在工作区里读写，评委只能看聊天窗口。</a:t>
+            </a:r>
+            <a:endParaRPr lang="en-US" sz="1600" dirty="0"/>
+          </a:p>
+        </p:txBody>
+      </p:sp>
+      <p:sp>
+        <p:nvSpPr>
+          <p:cNvPr id="7" name="Shape 5"/>
+          <p:cNvSpPr/>
+          <p:nvPr/>
+        </p:nvSpPr>
+        <p:spPr>
+          <a:xfrm>
+            <a:off x="6172200" y="960120"/>
+            <a:ext cx="5486400" cy="5029200"/>
+          </a:xfrm>
+          <a:prstGeom prst="rect">
+            <a:avLst/>
+          </a:prstGeom>
+          <a:solidFill>
+            <a:srgbClr val="F7F8FA"/>
+          </a:solidFill>
+          <a:ln/>
+        </p:spPr>
+      </p:sp>
+      <p:sp>
+        <p:nvSpPr>
+          <p:cNvPr id="8" name="Text 6"/>
+          <p:cNvSpPr/>
+          <p:nvPr/>
+        </p:nvSpPr>
+        <p:spPr>
+          <a:xfrm>
+            <a:off x="6400800" y="1143000"/>
+            <a:ext cx="5029200" cy="411480"/>
+          </a:xfrm>
+          <a:prstGeom prst="rect">
+            <a:avLst/>
+          </a:prstGeom>
+          <a:noFill/>
+          <a:ln/>
+        </p:spPr>
+        <p:txBody>
+          <a:bodyPr wrap="square" lIns="0" tIns="0" rIns="0" bIns="0" rtlCol="0" anchor="ctr"/>
+          <a:lstStyle/>
+          <a:p>
+            <a:pPr indent="0" marL="0">
+              <a:buNone/>
+            </a:pPr>
+            <a:r>
+              <a:rPr lang="en-US" sz="2000" b="1" dirty="0">
+                <a:solidFill>
+                  <a:srgbClr val="27AE60"/>
+                </a:solidFill>
+                <a:latin typeface="PingFang SC" pitchFamily="34" charset="0"/>
+                <a:ea typeface="PingFang SC" pitchFamily="34" charset="-122"/>
+                <a:cs typeface="PingFang SC" pitchFamily="34" charset="-120"/>
+              </a:rPr>
+              <a:t>QwenPaw 2.2.2b1</a:t>
+            </a:r>
+            <a:endParaRPr lang="en-US" sz="2000" dirty="0"/>
+          </a:p>
+        </p:txBody>
+      </p:sp>
+      <p:sp>
+        <p:nvSpPr>
+          <p:cNvPr id="9" name="Text 7"/>
+          <p:cNvSpPr/>
+          <p:nvPr/>
+        </p:nvSpPr>
+        <p:spPr>
+          <a:xfrm>
+            <a:off x="6400800" y="1737360"/>
+            <a:ext cx="5029200" cy="3840480"/>
+          </a:xfrm>
+          <a:prstGeom prst="rect">
+            <a:avLst/>
+          </a:prstGeom>
+          <a:noFill/>
+          <a:ln/>
+        </p:spPr>
+        <p:txBody>
+          <a:bodyPr wrap="square" lIns="0" tIns="0" rIns="0" bIns="0" rtlCol="0" anchor="ctr"/>
+          <a:lstStyle/>
+          <a:p>
+            <a:pPr indent="0" marL="0">
+              <a:buNone/>
+            </a:pPr>
+            <a:r>
+              <a:rPr lang="en-US" sz="1600" dirty="0">
+                <a:solidFill>
+                  <a:srgbClr val="1F2937"/>
+                </a:solidFill>
+                <a:latin typeface="PingFang SC" pitchFamily="34" charset="0"/>
+                <a:ea typeface="PingFang SC" pitchFamily="34" charset="-122"/>
+                <a:cs typeface="PingFang SC" pitchFamily="34" charset="-120"/>
+              </a:rPr>
+              <a:t>Console Files 可查看、操作、生成并下载工作区文件。token 账本含 cache_read_tokens，能算缓存命中率。前缀一致性让 L1 目录复用缓存，省 token、提高 ROI。POC 仍不改内核，只对齐渐进加载合同。</a:t>
+            </a:r>
+            <a:endParaRPr lang="en-US" sz="1600" dirty="0"/>
+          </a:p>
+        </p:txBody>
+      </p:sp>
+      <p:sp>
+        <p:nvSpPr>
+          <p:cNvPr id="10" name="Text 8"/>
+          <p:cNvSpPr/>
+          <p:nvPr/>
+        </p:nvSpPr>
+        <p:spPr>
+          <a:xfrm>
+            <a:off x="548640" y="6473952"/>
+            <a:ext cx="10241280" cy="256032"/>
+          </a:xfrm>
+          <a:prstGeom prst="rect">
+            <a:avLst/>
+          </a:prstGeom>
+          <a:noFill/>
+          <a:ln/>
+        </p:spPr>
+        <p:txBody>
+          <a:bodyPr wrap="square" lIns="0" tIns="0" rIns="0" bIns="0" rtlCol="0" anchor="ctr"/>
+          <a:lstStyle/>
+          <a:p>
+            <a:pPr indent="0" marL="0">
+              <a:buNone/>
+            </a:pPr>
+            <a:r>
+              <a:rPr lang="en-US" sz="1000" i="1" dirty="0">
+                <a:solidFill>
+                  <a:srgbClr val="9CA3AF"/>
+                </a:solidFill>
+                <a:latin typeface="PingFang SC" pitchFamily="34" charset="0"/>
+                <a:ea typeface="PingFang SC" pitchFamily="34" charset="-122"/>
+                <a:cs typeface="PingFang SC" pitchFamily="34" charset="-120"/>
+              </a:rPr>
+              <a:t>Files：console/src/pages/Files + files-workspace 下载按钮。2.0.0 无此页。</a:t>
+            </a:r>
+            <a:endParaRPr lang="en-US" sz="1000" dirty="0"/>
+          </a:p>
+        </p:txBody>
+      </p:sp>
+    </p:spTree>
+  </p:cSld>
+  <p:clrMapOvr>
+    <a:masterClrMapping/>
+  </p:clrMapOvr>
+</p:sld>
+</file>
+
+<file path=ppt/slides/slide24.xml><?xml version="1.0" encoding="utf-8"?>
+<p:sld xmlns:a="http://schemas.openxmlformats.org/drawingml/2006/main" xmlns:r="http://schemas.openxmlformats.org/officeDocument/2006/relationships" xmlns:p="http://schemas.openxmlformats.org/presentationml/2006/main">
+  <p:cSld name="Slide 24">
+    <p:bg>
+      <p:bgPr>
+        <a:solidFill>
+          <a:srgbClr val="FFFFFF"/>
+        </a:solidFill>
+      </p:bgPr>
+    </p:bg>
+    <p:spTree>
+      <p:nvGrpSpPr>
+        <p:cNvPr id="1" name=""/>
+        <p:cNvGrpSpPr/>
+        <p:nvPr/>
+      </p:nvGrpSpPr>
+      <p:grpSpPr>
+        <a:xfrm>
+          <a:off x="0" y="0"/>
+          <a:ext cx="0" cy="0"/>
+          <a:chOff x="0" y="0"/>
+          <a:chExt cx="0" cy="0"/>
+        </a:xfrm>
+      </p:grpSpPr>
+      <p:sp>
+        <p:nvSpPr>
+          <p:cNvPr id="2" name="Text 0"/>
+          <p:cNvSpPr/>
+          <p:nvPr/>
+        </p:nvSpPr>
+        <p:spPr>
+          <a:xfrm>
+            <a:off x="548640" y="256032"/>
+            <a:ext cx="10424160" cy="457200"/>
+          </a:xfrm>
+          <a:prstGeom prst="rect">
+            <a:avLst/>
+          </a:prstGeom>
+          <a:noFill/>
+          <a:ln/>
+        </p:spPr>
+        <p:txBody>
+          <a:bodyPr wrap="square" lIns="0" tIns="0" rIns="0" bIns="0" rtlCol="0" anchor="ctr"/>
+          <a:lstStyle/>
+          <a:p>
+            <a:pPr indent="0" marL="0">
+              <a:buNone/>
+            </a:pPr>
+            <a:r>
+              <a:rPr lang="en-US" sz="2000" b="1" dirty="0">
+                <a:solidFill>
+                  <a:srgbClr val="1F2937"/>
+                </a:solidFill>
+                <a:latin typeface="PingFang SC" pitchFamily="34" charset="0"/>
+                <a:ea typeface="PingFang SC" pitchFamily="34" charset="-122"/>
+                <a:cs typeface="PingFang SC" pitchFamily="34" charset="-120"/>
+              </a:rPr>
+              <a:t>Excel问答任务分布：skill列表摘要 → excel_guard__ → 文件摘要 → 文件详情</a:t>
+            </a:r>
+            <a:endParaRPr lang="en-US" sz="2000" dirty="0"/>
+          </a:p>
+        </p:txBody>
+      </p:sp>
+      <p:sp>
+        <p:nvSpPr>
+          <p:cNvPr id="3" name="Text 1"/>
+          <p:cNvSpPr/>
+          <p:nvPr/>
+        </p:nvSpPr>
+        <p:spPr>
+          <a:xfrm>
+            <a:off x="10972800" y="6492240"/>
+            <a:ext cx="822960" cy="228600"/>
+          </a:xfrm>
+          <a:prstGeom prst="rect">
+            <a:avLst/>
+          </a:prstGeom>
+          <a:noFill/>
+          <a:ln/>
+        </p:spPr>
+        <p:txBody>
+          <a:bodyPr wrap="square" lIns="0" tIns="0" rIns="0" bIns="0" rtlCol="0" anchor="ctr"/>
+          <a:lstStyle/>
+          <a:p>
+            <a:pPr algn="r" indent="0" marL="0">
+              <a:buNone/>
+            </a:pPr>
+            <a:r>
+              <a:rPr lang="en-US" sz="1000" dirty="0">
+                <a:solidFill>
+                  <a:srgbClr val="9CA3AF"/>
+                </a:solidFill>
+                <a:latin typeface="PingFang SC" pitchFamily="34" charset="0"/>
+                <a:ea typeface="PingFang SC" pitchFamily="34" charset="-122"/>
+                <a:cs typeface="PingFang SC" pitchFamily="34" charset="-120"/>
+              </a:rPr>
+              <a:t>24 / 29</a:t>
+            </a:r>
+            <a:endParaRPr lang="en-US" sz="1000" dirty="0"/>
+          </a:p>
+        </p:txBody>
+      </p:sp>
+      <p:pic>
+        <p:nvPicPr>
+          <p:cNvPr id="4" name="Image 0" descr="/Users/linan/Desktop/aicode/shunde/docs/演示材料/architecture/excel-task-map.png">    </p:cNvPr>
+          <p:cNvPicPr>
+            <a:picLocks noChangeAspect="1"/>
+          </p:cNvPicPr>
+          <p:nvPr/>
+        </p:nvPicPr>
+        <p:blipFill>
+          <a:blip r:embed="rId1"/>
+          <a:stretch>
+            <a:fillRect/>
+          </a:stretch>
+        </p:blipFill>
+        <p:spPr>
+          <a:xfrm>
+            <a:off x="1728216" y="804672"/>
+            <a:ext cx="8705088" cy="5440680"/>
+          </a:xfrm>
+          <a:prstGeom prst="rect">
+            <a:avLst/>
+          </a:prstGeom>
+        </p:spPr>
+      </p:pic>
+      <p:sp>
+        <p:nvSpPr>
+          <p:cNvPr id="5" name="Text 2"/>
+          <p:cNvSpPr/>
+          <p:nvPr/>
+        </p:nvSpPr>
+        <p:spPr>
+          <a:xfrm>
+            <a:off x="548640" y="6473952"/>
+            <a:ext cx="10241280" cy="256032"/>
+          </a:xfrm>
+          <a:prstGeom prst="rect">
+            <a:avLst/>
+          </a:prstGeom>
+          <a:noFill/>
+          <a:ln/>
+        </p:spPr>
+        <p:txBody>
+          <a:bodyPr wrap="square" lIns="0" tIns="0" rIns="0" bIns="0" rtlCol="0" anchor="ctr"/>
+          <a:lstStyle/>
+          <a:p>
+            <a:pPr indent="0" marL="0">
+              <a:buNone/>
+            </a:pPr>
+            <a:r>
+              <a:rPr lang="en-US" sz="1000" i="1" dirty="0">
+                <a:solidFill>
+                  <a:srgbClr val="9CA3AF"/>
+                </a:solidFill>
+                <a:latin typeface="PingFang SC" pitchFamily="34" charset="0"/>
+                <a:ea typeface="PingFang SC" pitchFamily="34" charset="-122"/>
+                <a:cs typeface="PingFang SC" pitchFamily="34" charset="-120"/>
+              </a:rPr>
+              <a:t>检测损坏表 / 识别编码 / 描述表结构（摘要）→ 表转 Markdown、inspect（详情）→ pandas</a:t>
+            </a:r>
+            <a:endParaRPr lang="en-US" sz="1000" dirty="0"/>
+          </a:p>
+        </p:txBody>
+      </p:sp>
+    </p:spTree>
+  </p:cSld>
+  <p:clrMapOvr>
+    <a:masterClrMapping/>
+  </p:clrMapOvr>
+</p:sld>
+</file>
+
+<file path=ppt/slides/slide25.xml><?xml version="1.0" encoding="utf-8"?>
+<p:sld xmlns:a="http://schemas.openxmlformats.org/drawingml/2006/main" xmlns:r="http://schemas.openxmlformats.org/officeDocument/2006/relationships" xmlns:p="http://schemas.openxmlformats.org/presentationml/2006/main">
+  <p:cSld name="Slide 25">
+    <p:bg>
+      <p:bgPr>
+        <a:solidFill>
+          <a:srgbClr val="FFFFFF"/>
+        </a:solidFill>
+      </p:bgPr>
+    </p:bg>
+    <p:spTree>
+      <p:nvGrpSpPr>
+        <p:cNvPr id="1" name=""/>
+        <p:cNvGrpSpPr/>
+        <p:nvPr/>
+      </p:nvGrpSpPr>
+      <p:grpSpPr>
+        <a:xfrm>
+          <a:off x="0" y="0"/>
+          <a:ext cx="0" cy="0"/>
+          <a:chOff x="0" y="0"/>
+          <a:chExt cx="0" cy="0"/>
+        </a:xfrm>
+      </p:grpSpPr>
+      <p:sp>
+        <p:nvSpPr>
+          <p:cNvPr id="2" name="Text 0"/>
+          <p:cNvSpPr/>
+          <p:nvPr/>
+        </p:nvSpPr>
+        <p:spPr>
+          <a:xfrm>
+            <a:off x="548640" y="256032"/>
+            <a:ext cx="10424160" cy="457200"/>
+          </a:xfrm>
+          <a:prstGeom prst="rect">
+            <a:avLst/>
+          </a:prstGeom>
+          <a:noFill/>
+          <a:ln/>
+        </p:spPr>
+        <p:txBody>
+          <a:bodyPr wrap="square" lIns="0" tIns="0" rIns="0" bIns="0" rtlCol="0" anchor="ctr"/>
+          <a:lstStyle/>
+          <a:p>
+            <a:pPr indent="0" marL="0">
+              <a:buNone/>
+            </a:pPr>
+            <a:r>
+              <a:rPr lang="en-US" sz="2000" b="1" dirty="0">
+                <a:solidFill>
+                  <a:srgbClr val="1F2937"/>
+                </a:solidFill>
+                <a:latin typeface="PingFang SC" pitchFamily="34" charset="0"/>
+                <a:ea typeface="PingFang SC" pitchFamily="34" charset="-122"/>
+                <a:cs typeface="PingFang SC" pitchFamily="34" charset="-120"/>
+              </a:rPr>
+              <a:t>多模态文件任务分布：skill列表摘要 → kb_qa__ → 文件摘要 → 文件详情</a:t>
+            </a:r>
+            <a:endParaRPr lang="en-US" sz="2000" dirty="0"/>
+          </a:p>
+        </p:txBody>
+      </p:sp>
+      <p:sp>
+        <p:nvSpPr>
+          <p:cNvPr id="3" name="Text 1"/>
+          <p:cNvSpPr/>
+          <p:nvPr/>
+        </p:nvSpPr>
+        <p:spPr>
+          <a:xfrm>
+            <a:off x="10972800" y="6492240"/>
+            <a:ext cx="822960" cy="228600"/>
+          </a:xfrm>
+          <a:prstGeom prst="rect">
+            <a:avLst/>
+          </a:prstGeom>
+          <a:noFill/>
+          <a:ln/>
+        </p:spPr>
+        <p:txBody>
+          <a:bodyPr wrap="square" lIns="0" tIns="0" rIns="0" bIns="0" rtlCol="0" anchor="ctr"/>
+          <a:lstStyle/>
+          <a:p>
+            <a:pPr algn="r" indent="0" marL="0">
+              <a:buNone/>
+            </a:pPr>
+            <a:r>
+              <a:rPr lang="en-US" sz="1000" dirty="0">
+                <a:solidFill>
+                  <a:srgbClr val="9CA3AF"/>
+                </a:solidFill>
+                <a:latin typeface="PingFang SC" pitchFamily="34" charset="0"/>
+                <a:ea typeface="PingFang SC" pitchFamily="34" charset="-122"/>
+                <a:cs typeface="PingFang SC" pitchFamily="34" charset="-120"/>
+              </a:rPr>
+              <a:t>25 / 29</a:t>
+            </a:r>
+            <a:endParaRPr lang="en-US" sz="1000" dirty="0"/>
+          </a:p>
+        </p:txBody>
+      </p:sp>
+      <p:pic>
+        <p:nvPicPr>
+          <p:cNvPr id="4" name="Image 0" descr="/Users/linan/Desktop/aicode/shunde/docs/演示材料/architecture/kb-task-map.png">    </p:cNvPr>
+          <p:cNvPicPr>
+            <a:picLocks noChangeAspect="1"/>
+          </p:cNvPicPr>
+          <p:nvPr/>
+        </p:nvPicPr>
+        <p:blipFill>
+          <a:blip r:embed="rId1"/>
+          <a:stretch>
+            <a:fillRect/>
+          </a:stretch>
+        </p:blipFill>
+        <p:spPr>
+          <a:xfrm>
+            <a:off x="1728216" y="804672"/>
+            <a:ext cx="8705088" cy="5440680"/>
+          </a:xfrm>
+          <a:prstGeom prst="rect">
+            <a:avLst/>
+          </a:prstGeom>
+        </p:spPr>
+      </p:pic>
+      <p:sp>
+        <p:nvSpPr>
+          <p:cNvPr id="5" name="Text 2"/>
+          <p:cNvSpPr/>
+          <p:nvPr/>
+        </p:nvSpPr>
+        <p:spPr>
+          <a:xfrm>
+            <a:off x="548640" y="6473952"/>
+            <a:ext cx="10241280" cy="256032"/>
+          </a:xfrm>
+          <a:prstGeom prst="rect">
+            <a:avLst/>
+          </a:prstGeom>
+          <a:noFill/>
+          <a:ln/>
+        </p:spPr>
+        <p:txBody>
+          <a:bodyPr wrap="square" lIns="0" tIns="0" rIns="0" bIns="0" rtlCol="0" anchor="ctr"/>
+          <a:lstStyle/>
+          <a:p>
+            <a:pPr indent="0" marL="0">
+              <a:buNone/>
+            </a:pPr>
+            <a:r>
+              <a:rPr lang="en-US" sz="1000" i="1" dirty="0">
+                <a:solidFill>
+                  <a:srgbClr val="9CA3AF"/>
+                </a:solidFill>
+                <a:latin typeface="PingFang SC" pitchFamily="34" charset="0"/>
+                <a:ea typeface="PingFang SC" pitchFamily="34" charset="-122"/>
+                <a:cs typeface="PingFang SC" pitchFamily="34" charset="-120"/>
+              </a:rPr>
+              <a:t>解析文档 / 检索知识（摘要）→ 看图作答 analyze_page（详情）</a:t>
+            </a:r>
+            <a:endParaRPr lang="en-US" sz="1000" dirty="0"/>
+          </a:p>
+        </p:txBody>
+      </p:sp>
+    </p:spTree>
+  </p:cSld>
+  <p:clrMapOvr>
+    <a:masterClrMapping/>
+  </p:clrMapOvr>
+</p:sld>
+</file>
+
+<file path=ppt/slides/slide26.xml><?xml version="1.0" encoding="utf-8"?>
+<p:sld xmlns:a="http://schemas.openxmlformats.org/drawingml/2006/main" xmlns:r="http://schemas.openxmlformats.org/officeDocument/2006/relationships" xmlns:p="http://schemas.openxmlformats.org/presentationml/2006/main">
+  <p:cSld name="Slide 26">
+    <p:bg>
+      <p:bgPr>
+        <a:solidFill>
+          <a:srgbClr val="FFFFFF"/>
+        </a:solidFill>
+      </p:bgPr>
+    </p:bg>
+    <p:spTree>
+      <p:nvGrpSpPr>
+        <p:cNvPr id="1" name=""/>
+        <p:cNvGrpSpPr/>
+        <p:nvPr/>
+      </p:nvGrpSpPr>
+      <p:grpSpPr>
+        <a:xfrm>
+          <a:off x="0" y="0"/>
+          <a:ext cx="0" cy="0"/>
+          <a:chOff x="0" y="0"/>
+          <a:chExt cx="0" cy="0"/>
+        </a:xfrm>
+      </p:grpSpPr>
+      <p:sp>
+        <p:nvSpPr>
+          <p:cNvPr id="2" name="Text 0"/>
+          <p:cNvSpPr/>
+          <p:nvPr/>
+        </p:nvSpPr>
+        <p:spPr>
+          <a:xfrm>
+            <a:off x="548640" y="256032"/>
+            <a:ext cx="10424160" cy="457200"/>
+          </a:xfrm>
+          <a:prstGeom prst="rect">
+            <a:avLst/>
+          </a:prstGeom>
+          <a:noFill/>
+          <a:ln/>
+        </p:spPr>
+        <p:txBody>
+          <a:bodyPr wrap="square" lIns="0" tIns="0" rIns="0" bIns="0" rtlCol="0" anchor="ctr"/>
+          <a:lstStyle/>
+          <a:p>
+            <a:pPr indent="0" marL="0">
+              <a:buNone/>
+            </a:pPr>
+            <a:r>
+              <a:rPr lang="en-US" sz="2000" b="1" dirty="0">
+                <a:solidFill>
+                  <a:srgbClr val="1F2937"/>
+                </a:solidFill>
+                <a:latin typeface="PingFang SC" pitchFamily="34" charset="0"/>
+                <a:ea typeface="PingFang SC" pitchFamily="34" charset="-122"/>
+                <a:cs typeface="PingFang SC" pitchFamily="34" charset="-120"/>
+              </a:rPr>
+              <a:t>运营助手任务分布：skill列表摘要 → ops_data__ → 文件摘要 → 文件详情</a:t>
+            </a:r>
+            <a:endParaRPr lang="en-US" sz="2000" dirty="0"/>
+          </a:p>
+        </p:txBody>
+      </p:sp>
+      <p:sp>
+        <p:nvSpPr>
+          <p:cNvPr id="3" name="Text 1"/>
+          <p:cNvSpPr/>
+          <p:nvPr/>
+        </p:nvSpPr>
+        <p:spPr>
+          <a:xfrm>
+            <a:off x="10972800" y="6492240"/>
+            <a:ext cx="822960" cy="228600"/>
+          </a:xfrm>
+          <a:prstGeom prst="rect">
+            <a:avLst/>
+          </a:prstGeom>
+          <a:noFill/>
+          <a:ln/>
+        </p:spPr>
+        <p:txBody>
+          <a:bodyPr wrap="square" lIns="0" tIns="0" rIns="0" bIns="0" rtlCol="0" anchor="ctr"/>
+          <a:lstStyle/>
+          <a:p>
+            <a:pPr algn="r" indent="0" marL="0">
+              <a:buNone/>
+            </a:pPr>
+            <a:r>
+              <a:rPr lang="en-US" sz="1000" dirty="0">
+                <a:solidFill>
+                  <a:srgbClr val="9CA3AF"/>
+                </a:solidFill>
+                <a:latin typeface="PingFang SC" pitchFamily="34" charset="0"/>
+                <a:ea typeface="PingFang SC" pitchFamily="34" charset="-122"/>
+                <a:cs typeface="PingFang SC" pitchFamily="34" charset="-120"/>
+              </a:rPr>
+              <a:t>26 / 29</a:t>
+            </a:r>
+            <a:endParaRPr lang="en-US" sz="1000" dirty="0"/>
+          </a:p>
+        </p:txBody>
+      </p:sp>
+      <p:pic>
+        <p:nvPicPr>
+          <p:cNvPr id="4" name="Image 0" descr="/Users/linan/Desktop/aicode/shunde/docs/演示材料/architecture/ops-task-map.png">    </p:cNvPr>
+          <p:cNvPicPr>
+            <a:picLocks noChangeAspect="1"/>
+          </p:cNvPicPr>
+          <p:nvPr/>
+        </p:nvPicPr>
+        <p:blipFill>
+          <a:blip r:embed="rId1"/>
+          <a:stretch>
+            <a:fillRect/>
+          </a:stretch>
+        </p:blipFill>
+        <p:spPr>
+          <a:xfrm>
+            <a:off x="1728216" y="804672"/>
+            <a:ext cx="8705088" cy="5440680"/>
+          </a:xfrm>
+          <a:prstGeom prst="rect">
+            <a:avLst/>
+          </a:prstGeom>
+        </p:spPr>
+      </p:pic>
+      <p:sp>
+        <p:nvSpPr>
+          <p:cNvPr id="5" name="Text 2"/>
+          <p:cNvSpPr/>
+          <p:nvPr/>
+        </p:nvSpPr>
+        <p:spPr>
+          <a:xfrm>
+            <a:off x="548640" y="6473952"/>
+            <a:ext cx="10241280" cy="256032"/>
+          </a:xfrm>
+          <a:prstGeom prst="rect">
+            <a:avLst/>
+          </a:prstGeom>
+          <a:noFill/>
+          <a:ln/>
+        </p:spPr>
+        <p:txBody>
+          <a:bodyPr wrap="square" lIns="0" tIns="0" rIns="0" bIns="0" rtlCol="0" anchor="ctr"/>
+          <a:lstStyle/>
+          <a:p>
+            <a:pPr indent="0" marL="0">
+              <a:buNone/>
+            </a:pPr>
+            <a:r>
+              <a:rPr lang="en-US" sz="1000" i="1" dirty="0">
+                <a:solidFill>
+                  <a:srgbClr val="9CA3AF"/>
+                </a:solidFill>
+                <a:latin typeface="PingFang SC" pitchFamily="34" charset="0"/>
+                <a:ea typeface="PingFang SC" pitchFamily="34" charset="-122"/>
+                <a:cs typeface="PingFang SC" pitchFamily="34" charset="-120"/>
+              </a:rPr>
+              <a:t>列出埋点文件（摘要）→ 最近事件（详情）；无文件则暂无埋点</a:t>
+            </a:r>
+            <a:endParaRPr lang="en-US" sz="1000" dirty="0"/>
+          </a:p>
+        </p:txBody>
+      </p:sp>
+    </p:spTree>
+  </p:cSld>
+  <p:clrMapOvr>
+    <a:masterClrMapping/>
+  </p:clrMapOvr>
+</p:sld>
+</file>
+
+<file path=ppt/slides/slide27.xml><?xml version="1.0" encoding="utf-8"?>
+<p:sld xmlns:a="http://schemas.openxmlformats.org/drawingml/2006/main" xmlns:r="http://schemas.openxmlformats.org/officeDocument/2006/relationships" xmlns:p="http://schemas.openxmlformats.org/presentationml/2006/main">
+  <p:cSld name="Slide 27">
+    <p:bg>
+      <p:bgPr>
+        <a:solidFill>
+          <a:srgbClr val="FFFFFF"/>
+        </a:solidFill>
+      </p:bgPr>
+    </p:bg>
+    <p:spTree>
+      <p:nvGrpSpPr>
+        <p:cNvPr id="1" name=""/>
+        <p:cNvGrpSpPr/>
+        <p:nvPr/>
+      </p:nvGrpSpPr>
+      <p:grpSpPr>
+        <a:xfrm>
+          <a:off x="0" y="0"/>
+          <a:ext cx="0" cy="0"/>
+          <a:chOff x="0" y="0"/>
+          <a:chExt cx="0" cy="0"/>
+        </a:xfrm>
+      </p:grpSpPr>
+      <p:sp>
+        <p:nvSpPr>
+          <p:cNvPr id="2" name="Text 0"/>
+          <p:cNvSpPr/>
+          <p:nvPr/>
+        </p:nvSpPr>
+        <p:spPr>
+          <a:xfrm>
+            <a:off x="548640" y="256032"/>
+            <a:ext cx="10424160" cy="457200"/>
+          </a:xfrm>
+          <a:prstGeom prst="rect">
+            <a:avLst/>
+          </a:prstGeom>
+          <a:noFill/>
+          <a:ln/>
+        </p:spPr>
+        <p:txBody>
+          <a:bodyPr wrap="square" lIns="0" tIns="0" rIns="0" bIns="0" rtlCol="0" anchor="ctr"/>
+          <a:lstStyle/>
+          <a:p>
+            <a:pPr indent="0" marL="0">
+              <a:buNone/>
+            </a:pPr>
+            <a:r>
+              <a:rPr lang="en-US" sz="2000" b="1" dirty="0">
+                <a:solidFill>
+                  <a:srgbClr val="1F2937"/>
+                </a:solidFill>
+                <a:latin typeface="PingFang SC" pitchFamily="34" charset="0"/>
+                <a:ea typeface="PingFang SC" pitchFamily="34" charset="-122"/>
+                <a:cs typeface="PingFang SC" pitchFamily="34" charset="-120"/>
+              </a:rPr>
+              <a:t>报告可视化任务分布：skill列表摘要 → report_visualizer__ → 文件摘要 → 文件详情</a:t>
+            </a:r>
+            <a:endParaRPr lang="en-US" sz="2000" dirty="0"/>
+          </a:p>
+        </p:txBody>
+      </p:sp>
+      <p:sp>
+        <p:nvSpPr>
+          <p:cNvPr id="3" name="Text 1"/>
+          <p:cNvSpPr/>
+          <p:nvPr/>
+        </p:nvSpPr>
+        <p:spPr>
+          <a:xfrm>
+            <a:off x="10972800" y="6492240"/>
+            <a:ext cx="822960" cy="228600"/>
+          </a:xfrm>
+          <a:prstGeom prst="rect">
+            <a:avLst/>
+          </a:prstGeom>
+          <a:noFill/>
+          <a:ln/>
+        </p:spPr>
+        <p:txBody>
+          <a:bodyPr wrap="square" lIns="0" tIns="0" rIns="0" bIns="0" rtlCol="0" anchor="ctr"/>
+          <a:lstStyle/>
+          <a:p>
+            <a:pPr algn="r" indent="0" marL="0">
+              <a:buNone/>
+            </a:pPr>
+            <a:r>
+              <a:rPr lang="en-US" sz="1000" dirty="0">
+                <a:solidFill>
+                  <a:srgbClr val="9CA3AF"/>
+                </a:solidFill>
+                <a:latin typeface="PingFang SC" pitchFamily="34" charset="0"/>
+                <a:ea typeface="PingFang SC" pitchFamily="34" charset="-122"/>
+                <a:cs typeface="PingFang SC" pitchFamily="34" charset="-120"/>
+              </a:rPr>
+              <a:t>27 / 29</a:t>
+            </a:r>
+            <a:endParaRPr lang="en-US" sz="1000" dirty="0"/>
+          </a:p>
+        </p:txBody>
+      </p:sp>
+      <p:pic>
+        <p:nvPicPr>
+          <p:cNvPr id="4" name="Image 0" descr="/Users/linan/Desktop/aicode/shunde/docs/演示材料/architecture/report-task-map.png">    </p:cNvPr>
+          <p:cNvPicPr>
+            <a:picLocks noChangeAspect="1"/>
+          </p:cNvPicPr>
+          <p:nvPr/>
+        </p:nvPicPr>
+        <p:blipFill>
+          <a:blip r:embed="rId1"/>
+          <a:stretch>
+            <a:fillRect/>
+          </a:stretch>
+        </p:blipFill>
+        <p:spPr>
+          <a:xfrm>
+            <a:off x="1728216" y="804672"/>
+            <a:ext cx="8705088" cy="5440680"/>
+          </a:xfrm>
+          <a:prstGeom prst="rect">
+            <a:avLst/>
+          </a:prstGeom>
+        </p:spPr>
+      </p:pic>
+      <p:sp>
+        <p:nvSpPr>
+          <p:cNvPr id="5" name="Text 2"/>
+          <p:cNvSpPr/>
+          <p:nvPr/>
+        </p:nvSpPr>
+        <p:spPr>
+          <a:xfrm>
+            <a:off x="548640" y="6473952"/>
+            <a:ext cx="10241280" cy="256032"/>
+          </a:xfrm>
+          <a:prstGeom prst="rect">
+            <a:avLst/>
+          </a:prstGeom>
+          <a:noFill/>
+          <a:ln/>
+        </p:spPr>
+        <p:txBody>
+          <a:bodyPr wrap="square" lIns="0" tIns="0" rIns="0" bIns="0" rtlCol="0" anchor="ctr"/>
+          <a:lstStyle/>
+          <a:p>
+            <a:pPr indent="0" marL="0">
+              <a:buNone/>
+            </a:pPr>
+            <a:r>
+              <a:rPr lang="en-US" sz="1000" i="1" dirty="0">
+                <a:solidFill>
+                  <a:srgbClr val="9CA3AF"/>
+                </a:solidFill>
+                <a:latin typeface="PingFang SC" pitchFamily="34" charset="0"/>
+                <a:ea typeface="PingFang SC" pitchFamily="34" charset="-122"/>
+                <a:cs typeface="PingFang SC" pitchFamily="34" charset="-120"/>
+              </a:rPr>
+              <a:t>交叉表（摘要）→ 生成 Word 报告（详情）；Files 页可下载 docx</a:t>
+            </a:r>
+            <a:endParaRPr lang="en-US" sz="1000" dirty="0"/>
+          </a:p>
+        </p:txBody>
+      </p:sp>
+    </p:spTree>
+  </p:cSld>
+  <p:clrMapOvr>
+    <a:masterClrMapping/>
+  </p:clrMapOvr>
+</p:sld>
+</file>
+
+<file path=ppt/slides/slide28.xml><?xml version="1.0" encoding="utf-8"?>
+<p:sld xmlns:a="http://schemas.openxmlformats.org/drawingml/2006/main" xmlns:r="http://schemas.openxmlformats.org/officeDocument/2006/relationships" xmlns:p="http://schemas.openxmlformats.org/presentationml/2006/main">
+  <p:cSld name="Slide 28">
+    <p:bg>
+      <p:bgPr>
+        <a:solidFill>
+          <a:srgbClr val="FFFFFF"/>
+        </a:solidFill>
+      </p:bgPr>
+    </p:bg>
+    <p:spTree>
+      <p:nvGrpSpPr>
+        <p:cNvPr id="1" name=""/>
+        <p:cNvGrpSpPr/>
+        <p:nvPr/>
+      </p:nvGrpSpPr>
+      <p:grpSpPr>
+        <a:xfrm>
+          <a:off x="0" y="0"/>
+          <a:ext cx="0" cy="0"/>
+          <a:chOff x="0" y="0"/>
+          <a:chExt cx="0" cy="0"/>
+        </a:xfrm>
+      </p:grpSpPr>
+      <p:sp>
+        <p:nvSpPr>
+          <p:cNvPr id="2" name="Text 0"/>
+          <p:cNvSpPr/>
+          <p:nvPr/>
+        </p:nvSpPr>
+        <p:spPr>
+          <a:xfrm>
+            <a:off x="548640" y="256032"/>
+            <a:ext cx="10424160" cy="457200"/>
+          </a:xfrm>
+          <a:prstGeom prst="rect">
+            <a:avLst/>
+          </a:prstGeom>
+          <a:noFill/>
+          <a:ln/>
+        </p:spPr>
+        <p:txBody>
+          <a:bodyPr wrap="square" lIns="0" tIns="0" rIns="0" bIns="0" rtlCol="0" anchor="ctr"/>
+          <a:lstStyle/>
+          <a:p>
+            <a:pPr indent="0" marL="0">
+              <a:buNone/>
+            </a:pPr>
+            <a:r>
+              <a:rPr lang="en-US" sz="2000" b="1" dirty="0">
+                <a:solidFill>
+                  <a:srgbClr val="1F2937"/>
+                </a:solidFill>
+                <a:latin typeface="PingFang SC" pitchFamily="34" charset="0"/>
+                <a:ea typeface="PingFang SC" pitchFamily="34" charset="-122"/>
+                <a:cs typeface="PingFang SC" pitchFamily="34" charset="-120"/>
+              </a:rPr>
+              <a:t>四个助手的优化方向（已落到 SKILL.md / MCP namespace）</a:t>
+            </a:r>
+            <a:endParaRPr lang="en-US" sz="2000" dirty="0"/>
+          </a:p>
+        </p:txBody>
+      </p:sp>
+      <p:sp>
+        <p:nvSpPr>
+          <p:cNvPr id="3" name="Text 1"/>
+          <p:cNvSpPr/>
+          <p:nvPr/>
+        </p:nvSpPr>
+        <p:spPr>
+          <a:xfrm>
+            <a:off x="10972800" y="6492240"/>
+            <a:ext cx="822960" cy="228600"/>
+          </a:xfrm>
+          <a:prstGeom prst="rect">
+            <a:avLst/>
+          </a:prstGeom>
+          <a:noFill/>
+          <a:ln/>
+        </p:spPr>
+        <p:txBody>
+          <a:bodyPr wrap="square" lIns="0" tIns="0" rIns="0" bIns="0" rtlCol="0" anchor="ctr"/>
+          <a:lstStyle/>
+          <a:p>
+            <a:pPr algn="r" indent="0" marL="0">
+              <a:buNone/>
+            </a:pPr>
+            <a:r>
+              <a:rPr lang="en-US" sz="1000" dirty="0">
+                <a:solidFill>
+                  <a:srgbClr val="9CA3AF"/>
+                </a:solidFill>
+                <a:latin typeface="PingFang SC" pitchFamily="34" charset="0"/>
+                <a:ea typeface="PingFang SC" pitchFamily="34" charset="-122"/>
+                <a:cs typeface="PingFang SC" pitchFamily="34" charset="-120"/>
+              </a:rPr>
+              <a:t>28 / 29</a:t>
+            </a:r>
+            <a:endParaRPr lang="en-US" sz="1000" dirty="0"/>
+          </a:p>
+        </p:txBody>
+      </p:sp>
+      <p:sp>
+        <p:nvSpPr>
+          <p:cNvPr id="4" name="Shape 2"/>
+          <p:cNvSpPr/>
+          <p:nvPr/>
+        </p:nvSpPr>
+        <p:spPr>
+          <a:xfrm>
+            <a:off x="502920" y="914400"/>
+            <a:ext cx="11155680" cy="1115568"/>
+          </a:xfrm>
+          <a:prstGeom prst="rect">
+            <a:avLst/>
+          </a:prstGeom>
+          <a:solidFill>
+            <a:srgbClr val="F7F8FA"/>
+          </a:solidFill>
+          <a:ln/>
+        </p:spPr>
+      </p:sp>
+      <p:sp>
+        <p:nvSpPr>
+          <p:cNvPr id="5" name="Text 3"/>
+          <p:cNvSpPr/>
+          <p:nvPr/>
+        </p:nvSpPr>
+        <p:spPr>
+          <a:xfrm>
+            <a:off x="731520" y="1005840"/>
+            <a:ext cx="10698480" cy="292608"/>
+          </a:xfrm>
+          <a:prstGeom prst="rect">
+            <a:avLst/>
+          </a:prstGeom>
+          <a:noFill/>
+          <a:ln/>
+        </p:spPr>
+        <p:txBody>
+          <a:bodyPr wrap="square" lIns="0" tIns="0" rIns="0" bIns="0" rtlCol="0" anchor="ctr"/>
+          <a:lstStyle/>
+          <a:p>
+            <a:pPr indent="0" marL="0">
+              <a:buNone/>
+            </a:pPr>
+            <a:r>
+              <a:rPr lang="en-US" sz="1600" b="1" dirty="0">
+                <a:solidFill>
+                  <a:srgbClr val="1E2A3A"/>
+                </a:solidFill>
+                <a:latin typeface="PingFang SC" pitchFamily="34" charset="0"/>
+                <a:ea typeface="PingFang SC" pitchFamily="34" charset="-122"/>
+                <a:cs typeface="PingFang SC" pitchFamily="34" charset="-120"/>
+              </a:rPr>
+              <a:t>Excel问答</a:t>
+            </a:r>
+            <a:endParaRPr lang="en-US" sz="1600" dirty="0"/>
+          </a:p>
+        </p:txBody>
+      </p:sp>
+      <p:sp>
+        <p:nvSpPr>
+          <p:cNvPr id="6" name="Text 4"/>
+          <p:cNvSpPr/>
+          <p:nvPr/>
+        </p:nvSpPr>
+        <p:spPr>
+          <a:xfrm>
+            <a:off x="731520" y="1353312"/>
+            <a:ext cx="10698480" cy="566928"/>
+          </a:xfrm>
+          <a:prstGeom prst="rect">
+            <a:avLst/>
+          </a:prstGeom>
+          <a:noFill/>
+          <a:ln/>
+        </p:spPr>
+        <p:txBody>
+          <a:bodyPr wrap="square" lIns="0" tIns="0" rIns="0" bIns="0" rtlCol="0" anchor="ctr"/>
+          <a:lstStyle/>
+          <a:p>
+            <a:pPr indent="0" marL="0">
+              <a:buNone/>
+            </a:pPr>
+            <a:r>
+              <a:rPr lang="en-US" sz="1300" dirty="0">
+                <a:solidFill>
+                  <a:srgbClr val="6B7280"/>
+                </a:solidFill>
+                <a:latin typeface="PingFang SC" pitchFamily="34" charset="0"/>
+                <a:ea typeface="PingFang SC" pitchFamily="34" charset="-122"/>
+                <a:cs typeface="PingFang SC" pitchFamily="34" charset="-120"/>
+              </a:rPr>
+              <a:t>L1 只留触发词。L2 给 excel_guard__ mcp列表。L3 先 describe 文件摘要，再 markdown/inspect 文件详情，最后 pandas。禁止整表进第一轮。</a:t>
+            </a:r>
+            <a:endParaRPr lang="en-US" sz="1300" dirty="0"/>
+          </a:p>
+        </p:txBody>
+      </p:sp>
+      <p:sp>
+        <p:nvSpPr>
+          <p:cNvPr id="7" name="Shape 5"/>
+          <p:cNvSpPr/>
+          <p:nvPr/>
+        </p:nvSpPr>
+        <p:spPr>
+          <a:xfrm>
+            <a:off x="502920" y="2148840"/>
+            <a:ext cx="11155680" cy="1115568"/>
+          </a:xfrm>
+          <a:prstGeom prst="rect">
+            <a:avLst/>
+          </a:prstGeom>
+          <a:solidFill>
+            <a:srgbClr val="F7F8FA"/>
+          </a:solidFill>
+          <a:ln/>
+        </p:spPr>
+      </p:sp>
+      <p:sp>
+        <p:nvSpPr>
+          <p:cNvPr id="8" name="Text 6"/>
+          <p:cNvSpPr/>
+          <p:nvPr/>
+        </p:nvSpPr>
+        <p:spPr>
+          <a:xfrm>
+            <a:off x="731520" y="2240280"/>
+            <a:ext cx="10698480" cy="292608"/>
+          </a:xfrm>
+          <a:prstGeom prst="rect">
+            <a:avLst/>
+          </a:prstGeom>
+          <a:noFill/>
+          <a:ln/>
+        </p:spPr>
+        <p:txBody>
+          <a:bodyPr wrap="square" lIns="0" tIns="0" rIns="0" bIns="0" rtlCol="0" anchor="ctr"/>
+          <a:lstStyle/>
+          <a:p>
+            <a:pPr indent="0" marL="0">
+              <a:buNone/>
+            </a:pPr>
+            <a:r>
+              <a:rPr lang="en-US" sz="1600" b="1" dirty="0">
+                <a:solidFill>
+                  <a:srgbClr val="1E2A3A"/>
+                </a:solidFill>
+                <a:latin typeface="PingFang SC" pitchFamily="34" charset="0"/>
+                <a:ea typeface="PingFang SC" pitchFamily="34" charset="-122"/>
+                <a:cs typeface="PingFang SC" pitchFamily="34" charset="-120"/>
+              </a:rPr>
+              <a:t>多模态文件</a:t>
+            </a:r>
+            <a:endParaRPr lang="en-US" sz="1600" dirty="0"/>
+          </a:p>
+        </p:txBody>
+      </p:sp>
+      <p:sp>
+        <p:nvSpPr>
+          <p:cNvPr id="9" name="Text 7"/>
+          <p:cNvSpPr/>
+          <p:nvPr/>
+        </p:nvSpPr>
+        <p:spPr>
+          <a:xfrm>
+            <a:off x="731520" y="2587752"/>
+            <a:ext cx="10698480" cy="566928"/>
+          </a:xfrm>
+          <a:prstGeom prst="rect">
+            <a:avLst/>
+          </a:prstGeom>
+          <a:noFill/>
+          <a:ln/>
+        </p:spPr>
+        <p:txBody>
+          <a:bodyPr wrap="square" lIns="0" tIns="0" rIns="0" bIns="0" rtlCol="0" anchor="ctr"/>
+          <a:lstStyle/>
+          <a:p>
+            <a:pPr indent="0" marL="0">
+              <a:buNone/>
+            </a:pPr>
+            <a:r>
+              <a:rPr lang="en-US" sz="1300" dirty="0">
+                <a:solidFill>
+                  <a:srgbClr val="6B7280"/>
+                </a:solidFill>
+                <a:latin typeface="PingFang SC" pitchFamily="34" charset="0"/>
+                <a:ea typeface="PingFang SC" pitchFamily="34" charset="-122"/>
+                <a:cs typeface="PingFang SC" pitchFamily="34" charset="-120"/>
+              </a:rPr>
+              <a:t>L1 短目录。L2 kb_qa__ 六工具列表。L3 先 parse/search 文件摘要，精确数字再 analyze_page 文件详情。表格合计仍交 Excel。</a:t>
+            </a:r>
+            <a:endParaRPr lang="en-US" sz="1300" dirty="0"/>
+          </a:p>
+        </p:txBody>
+      </p:sp>
+      <p:sp>
+        <p:nvSpPr>
+          <p:cNvPr id="10" name="Shape 8"/>
+          <p:cNvSpPr/>
+          <p:nvPr/>
+        </p:nvSpPr>
+        <p:spPr>
+          <a:xfrm>
+            <a:off x="502920" y="3383280"/>
+            <a:ext cx="11155680" cy="1115568"/>
+          </a:xfrm>
+          <a:prstGeom prst="rect">
+            <a:avLst/>
+          </a:prstGeom>
+          <a:solidFill>
+            <a:srgbClr val="F7F8FA"/>
+          </a:solidFill>
+          <a:ln/>
+        </p:spPr>
+      </p:sp>
+      <p:sp>
+        <p:nvSpPr>
+          <p:cNvPr id="11" name="Text 9"/>
+          <p:cNvSpPr/>
+          <p:nvPr/>
+        </p:nvSpPr>
+        <p:spPr>
+          <a:xfrm>
+            <a:off x="731520" y="3474720"/>
+            <a:ext cx="10698480" cy="292608"/>
+          </a:xfrm>
+          <a:prstGeom prst="rect">
+            <a:avLst/>
+          </a:prstGeom>
+          <a:noFill/>
+          <a:ln/>
+        </p:spPr>
+        <p:txBody>
+          <a:bodyPr wrap="square" lIns="0" tIns="0" rIns="0" bIns="0" rtlCol="0" anchor="ctr"/>
+          <a:lstStyle/>
+          <a:p>
+            <a:pPr indent="0" marL="0">
+              <a:buNone/>
+            </a:pPr>
+            <a:r>
+              <a:rPr lang="en-US" sz="1600" b="1" dirty="0">
+                <a:solidFill>
+                  <a:srgbClr val="1E2A3A"/>
+                </a:solidFill>
+                <a:latin typeface="PingFang SC" pitchFamily="34" charset="0"/>
+                <a:ea typeface="PingFang SC" pitchFamily="34" charset="-122"/>
+                <a:cs typeface="PingFang SC" pitchFamily="34" charset="-120"/>
+              </a:rPr>
+              <a:t>运营</a:t>
+            </a:r>
+            <a:endParaRPr lang="en-US" sz="1600" dirty="0"/>
+          </a:p>
+        </p:txBody>
+      </p:sp>
+      <p:sp>
+        <p:nvSpPr>
+          <p:cNvPr id="12" name="Text 10"/>
+          <p:cNvSpPr/>
+          <p:nvPr/>
+        </p:nvSpPr>
+        <p:spPr>
+          <a:xfrm>
+            <a:off x="731520" y="3822192"/>
+            <a:ext cx="10698480" cy="566928"/>
+          </a:xfrm>
+          <a:prstGeom prst="rect">
+            <a:avLst/>
+          </a:prstGeom>
+          <a:noFill/>
+          <a:ln/>
+        </p:spPr>
+        <p:txBody>
+          <a:bodyPr wrap="square" lIns="0" tIns="0" rIns="0" bIns="0" rtlCol="0" anchor="ctr"/>
+          <a:lstStyle/>
+          <a:p>
+            <a:pPr indent="0" marL="0">
+              <a:buNone/>
+            </a:pPr>
+            <a:r>
+              <a:rPr lang="en-US" sz="1300" dirty="0">
+                <a:solidFill>
+                  <a:srgbClr val="6B7280"/>
+                </a:solidFill>
+                <a:latin typeface="PingFang SC" pitchFamily="34" charset="0"/>
+                <a:ea typeface="PingFang SC" pitchFamily="34" charset="-122"/>
+                <a:cs typeface="PingFang SC" pitchFamily="34" charset="-120"/>
+              </a:rPr>
+              <a:t>L1 短目录。L2 ops_data__ 三工具。L3 先 list_telemetry_files 文件摘要，再 recent_events 文件详情。无 JSONL 不编造。</a:t>
+            </a:r>
+            <a:endParaRPr lang="en-US" sz="1300" dirty="0"/>
+          </a:p>
+        </p:txBody>
+      </p:sp>
+      <p:sp>
+        <p:nvSpPr>
+          <p:cNvPr id="13" name="Shape 11"/>
+          <p:cNvSpPr/>
+          <p:nvPr/>
+        </p:nvSpPr>
+        <p:spPr>
+          <a:xfrm>
+            <a:off x="502920" y="4617720"/>
+            <a:ext cx="11155680" cy="1115568"/>
+          </a:xfrm>
+          <a:prstGeom prst="rect">
+            <a:avLst/>
+          </a:prstGeom>
+          <a:solidFill>
+            <a:srgbClr val="F7F8FA"/>
+          </a:solidFill>
+          <a:ln/>
+        </p:spPr>
+      </p:sp>
+      <p:sp>
+        <p:nvSpPr>
+          <p:cNvPr id="14" name="Text 12"/>
+          <p:cNvSpPr/>
+          <p:nvPr/>
+        </p:nvSpPr>
+        <p:spPr>
+          <a:xfrm>
+            <a:off x="731520" y="4709160"/>
+            <a:ext cx="10698480" cy="292608"/>
+          </a:xfrm>
+          <a:prstGeom prst="rect">
+            <a:avLst/>
+          </a:prstGeom>
+          <a:noFill/>
+          <a:ln/>
+        </p:spPr>
+        <p:txBody>
+          <a:bodyPr wrap="square" lIns="0" tIns="0" rIns="0" bIns="0" rtlCol="0" anchor="ctr"/>
+          <a:lstStyle/>
+          <a:p>
+            <a:pPr indent="0" marL="0">
+              <a:buNone/>
+            </a:pPr>
+            <a:r>
+              <a:rPr lang="en-US" sz="1600" b="1" dirty="0">
+                <a:solidFill>
+                  <a:srgbClr val="1E2A3A"/>
+                </a:solidFill>
+                <a:latin typeface="PingFang SC" pitchFamily="34" charset="0"/>
+                <a:ea typeface="PingFang SC" pitchFamily="34" charset="-122"/>
+                <a:cs typeface="PingFang SC" pitchFamily="34" charset="-120"/>
+              </a:rPr>
+              <a:t>报告可视化</a:t>
+            </a:r>
+            <a:endParaRPr lang="en-US" sz="1600" dirty="0"/>
+          </a:p>
+        </p:txBody>
+      </p:sp>
+      <p:sp>
+        <p:nvSpPr>
+          <p:cNvPr id="15" name="Text 13"/>
+          <p:cNvSpPr/>
+          <p:nvPr/>
+        </p:nvSpPr>
+        <p:spPr>
+          <a:xfrm>
+            <a:off x="731520" y="5056632"/>
+            <a:ext cx="10698480" cy="566928"/>
+          </a:xfrm>
+          <a:prstGeom prst="rect">
+            <a:avLst/>
+          </a:prstGeom>
+          <a:noFill/>
+          <a:ln/>
+        </p:spPr>
+        <p:txBody>
+          <a:bodyPr wrap="square" lIns="0" tIns="0" rIns="0" bIns="0" rtlCol="0" anchor="ctr"/>
+          <a:lstStyle/>
+          <a:p>
+            <a:pPr indent="0" marL="0">
+              <a:buNone/>
+            </a:pPr>
+            <a:r>
+              <a:rPr lang="en-US" sz="1300" dirty="0">
+                <a:solidFill>
+                  <a:srgbClr val="6B7280"/>
+                </a:solidFill>
+                <a:latin typeface="PingFang SC" pitchFamily="34" charset="0"/>
+                <a:ea typeface="PingFang SC" pitchFamily="34" charset="-122"/>
+                <a:cs typeface="PingFang SC" pitchFamily="34" charset="-120"/>
+              </a:rPr>
+              <a:t>L1 短目录。L2 report_visualizer__ 七工具。L3 先交叉表文件摘要，再 render_docx 文件详情。产物走 Files 查看/下载。</a:t>
+            </a:r>
+            <a:endParaRPr lang="en-US" sz="1300" dirty="0"/>
+          </a:p>
+        </p:txBody>
+      </p:sp>
+      <p:sp>
+        <p:nvSpPr>
+          <p:cNvPr id="16" name="Text 14"/>
+          <p:cNvSpPr/>
+          <p:nvPr/>
+        </p:nvSpPr>
+        <p:spPr>
+          <a:xfrm>
+            <a:off x="548640" y="6473952"/>
+            <a:ext cx="10241280" cy="256032"/>
+          </a:xfrm>
+          <a:prstGeom prst="rect">
+            <a:avLst/>
+          </a:prstGeom>
+          <a:noFill/>
+          <a:ln/>
+        </p:spPr>
+        <p:txBody>
+          <a:bodyPr wrap="square" lIns="0" tIns="0" rIns="0" bIns="0" rtlCol="0" anchor="ctr"/>
+          <a:lstStyle/>
+          <a:p>
+            <a:pPr indent="0" marL="0">
+              <a:buNone/>
+            </a:pPr>
+            <a:r>
+              <a:rPr lang="en-US" sz="1000" i="1" dirty="0">
+                <a:solidFill>
+                  <a:srgbClr val="9CA3AF"/>
+                </a:solidFill>
+                <a:latin typeface="PingFang SC" pitchFamily="34" charset="0"/>
+                <a:ea typeface="PingFang SC" pitchFamily="34" charset="-122"/>
+                <a:cs typeface="PingFang SC" pitchFamily="34" charset="-120"/>
+              </a:rPr>
+              <a:t>落地：poc/skills/*/SKILL.md 渐进加载合同 + poc/config/mcp-*.json namespace 字段。</a:t>
+            </a:r>
+            <a:endParaRPr lang="en-US" sz="1000" dirty="0"/>
+          </a:p>
+        </p:txBody>
+      </p:sp>
+    </p:spTree>
+  </p:cSld>
+  <p:clrMapOvr>
+    <a:masterClrMapping/>
+  </p:clrMapOvr>
+</p:sld>
+</file>
+
+<file path=ppt/slides/slide29.xml><?xml version="1.0" encoding="utf-8"?>
+<p:sld xmlns:a="http://schemas.openxmlformats.org/drawingml/2006/main" xmlns:r="http://schemas.openxmlformats.org/officeDocument/2006/relationships" xmlns:p="http://schemas.openxmlformats.org/presentationml/2006/main">
+  <p:cSld name="Slide 29">
     <p:bg>
       <p:bgPr>
         <a:solidFill>
@@ -17135,7 +20868,7 @@
                 <a:ea typeface="PingFang SC" pitchFamily="34" charset="-122"/>
                 <a:cs typeface="PingFang SC" pitchFamily="34" charset="-120"/>
               </a:rPr>
-              <a:t>四个助手都在 QwenPaw 旁路跑通：护栏先过、数字用代码、来源带页码、没有数据不编造。</a:t>
+              <a:t>L1/L2/L3 渐进加载 + 2.2.2b1 Files/缓存命中率：比 2.0.0 黑盒更省 token、更高 ROI。</a:t>
             </a:r>
             <a:endParaRPr lang="en-US" sz="2600" dirty="0"/>
           </a:p>
@@ -17233,7 +20966,7 @@
                 <a:ea typeface="PingFang SC" pitchFamily="34" charset="-122"/>
                 <a:cs typeface="PingFang SC" pitchFamily="34" charset="-120"/>
               </a:rPr>
-              <a:t>5 工具 + 黄金 10/10</a:t>
+              <a:t>excel_guard__ 先摘要后详情</a:t>
             </a:r>
             <a:endParaRPr lang="en-US" sz="1300" dirty="0"/>
           </a:p>
@@ -17331,7 +21064,7 @@
                 <a:ea typeface="PingFang SC" pitchFamily="34" charset="-122"/>
                 <a:cs typeface="PingFang SC" pitchFamily="34" charset="-120"/>
               </a:rPr>
-              <a:t>6 工具 + 看图 + 可降级四库</a:t>
+              <a:t>kb_qa__ 先检索再看图</a:t>
             </a:r>
             <a:endParaRPr lang="en-US" sz="1300" dirty="0"/>
           </a:p>
@@ -17429,7 +21162,7 @@
                 <a:ea typeface="PingFang SC" pitchFamily="34" charset="-122"/>
                 <a:cs typeface="PingFang SC" pitchFamily="34" charset="-120"/>
               </a:rPr>
-              <a:t>插件 Hook 写 JSONL；token 另有内核账本</a:t>
+              <a:t>ops_data__ 先列文件再事件</a:t>
             </a:r>
             <a:endParaRPr lang="en-US" sz="1300" dirty="0"/>
           </a:p>
@@ -17527,7 +21260,7 @@
                 <a:ea typeface="PingFang SC" pitchFamily="34" charset="-122"/>
                 <a:cs typeface="PingFang SC" pitchFamily="34" charset="-120"/>
               </a:rPr>
-              <a:t>7 工具出交叉表与五类图</a:t>
+              <a:t>docx 可在 Files 下载</a:t>
             </a:r>
             <a:endParaRPr lang="en-US" sz="1300" dirty="0"/>
           </a:p>
@@ -17566,7 +21299,7 @@
                 <a:ea typeface="PingFang SC" pitchFamily="34" charset="-122"/>
                 <a:cs typeface="PingFang SC" pitchFamily="34" charset="-120"/>
               </a:rPr>
-              <a:t>顺德农商行 POC  |  2026-09-14  |  仓库旁路 poc/  |  内核 0 行</a:t>
+              <a:t>顺德农商行 POC  |  2026-09-15  |  宿主 2.2.2b1 vs 2.0.0 黑盒  |  旁路 poc/</a:t>
             </a:r>
             <a:endParaRPr lang="en-US" sz="1200" dirty="0"/>
           </a:p>
@@ -17676,7 +21409,7 @@
                 <a:ea typeface="PingFang SC" pitchFamily="34" charset="-122"/>
                 <a:cs typeface="PingFang SC" pitchFamily="34" charset="-120"/>
               </a:rPr>
-              <a:t>3 / 21</a:t>
+              <a:t>3 / 29</a:t>
             </a:r>
             <a:endParaRPr lang="en-US" sz="1000" dirty="0"/>
           </a:p>
@@ -18266,7 +21999,7 @@
                           <a:ea typeface="PingFang SC" pitchFamily="34" charset="-122"/>
                           <a:cs typeface="PingFang SC" pitchFamily="34" charset="-120"/>
                         </a:rPr>
-                        <a:t>excel-guard ×5</a:t>
+                        <a:t>excel-guard ×9</a:t>
                       </a:r>
                       <a:endParaRPr lang="en-US" sz="1200" dirty="0">
                         <a:latin typeface="PingFang SC" charset="0"/>
@@ -18331,7 +22064,7 @@
                           <a:ea typeface="PingFang SC" pitchFamily="34" charset="-122"/>
                           <a:cs typeface="PingFang SC" pitchFamily="34" charset="-120"/>
                         </a:rPr>
-                        <a:t>检测损坏 / 识别编码 / 分块 / 描述结构 / 转 Markdown</a:t>
+                        <a:t>检测损坏 / 识别编码 / 分块 / 描述结构 / 转 Markdown / 守卫写回 / 结构化读取 / OpenXML 校验 / 渲染成图</a:t>
                       </a:r>
                       <a:endParaRPr lang="en-US" sz="1200" dirty="0">
                         <a:latin typeface="PingFang SC" charset="0"/>
@@ -19660,7 +23393,7 @@
                 <a:ea typeface="PingFang SC" pitchFamily="34" charset="-122"/>
                 <a:cs typeface="PingFang SC" pitchFamily="34" charset="-120"/>
               </a:rPr>
-              <a:t>4 / 21</a:t>
+              <a:t>4 / 29</a:t>
             </a:r>
             <a:endParaRPr lang="en-US" sz="1000" dirty="0"/>
           </a:p>
@@ -19778,7 +23511,7 @@
                 <a:ea typeface="PingFang SC" pitchFamily="34" charset="-122"/>
                 <a:cs typeface="PingFang SC" pitchFamily="34" charset="-120"/>
               </a:rPr>
-              <a:t>QwenPaw v2.0.0</a:t>
+              <a:t>QwenPaw 2.2.2b1</a:t>
             </a:r>
             <a:endParaRPr lang="en-US" sz="2000" dirty="0"/>
           </a:p>
@@ -19817,7 +23550,7 @@
                 <a:ea typeface="PingFang SC" pitchFamily="34" charset="-122"/>
                 <a:cs typeface="PingFang SC" pitchFamily="34" charset="-120"/>
               </a:rPr>
-              <a:t>git submodule，不 fork。Agent Runtime / Skill Pool / MCP Host / Plugin API 原样使用。</a:t>
+              <a:t>当前宿主，git submodule，不 fork。相对旧版 2.0.0 多了 Files 查看/下载与 cache_read_tokens。</a:t>
             </a:r>
             <a:endParaRPr lang="en-US" sz="1300" dirty="0"/>
           </a:p>
@@ -20131,7 +23864,7 @@
                 <a:ea typeface="PingFang SC" pitchFamily="34" charset="-122"/>
                 <a:cs typeface="PingFang SC" pitchFamily="34" charset="-120"/>
               </a:rPr>
-              <a:t>poc/config/mcp-*.json 导入 Console。21 个工具（Excel 5 + KB 6 + 运营 3 + 报告 7）。</a:t>
+              <a:t>poc/config/mcp-*.json 导入 Console。25 个工具（Excel 9 + KB 6 + 运营 3 + 报告 7）。</a:t>
             </a:r>
             <a:endParaRPr lang="en-US" sz="1300" dirty="0"/>
           </a:p>
@@ -20437,7 +24170,7 @@
                 <a:ea typeface="PingFang SC" pitchFamily="34" charset="-122"/>
                 <a:cs typeface="PingFang SC" pitchFamily="34" charset="-120"/>
               </a:rPr>
-              <a:t>5 / 21</a:t>
+              <a:t>5 / 29</a:t>
             </a:r>
             <a:endParaRPr lang="en-US" sz="1000" dirty="0"/>
           </a:p>
@@ -20516,7 +24249,7 @@
                 <a:ea typeface="PingFang SC" pitchFamily="34" charset="-122"/>
                 <a:cs typeface="PingFang SC" pitchFamily="34" charset="-120"/>
               </a:rPr>
-              <a:t>Excel · excel-guard 3→5 工具</a:t>
+              <a:t>Excel · excel-guard 现为 9 工具</a:t>
             </a:r>
             <a:endParaRPr lang="en-US" sz="1500" dirty="0"/>
           </a:p>
@@ -20555,7 +24288,7 @@
                 <a:ea typeface="PingFang SC" pitchFamily="34" charset="-122"/>
                 <a:cs typeface="PingFang SC" pitchFamily="34" charset="-120"/>
               </a:rPr>
-              <a:t>新增 describe_workbook、sheet_to_markdown；python 内 preflight_workbook 串行损坏/编码/分块并短路。</a:t>
+              <a:t>护栏 5 个 + 守卫写回 edit_workbook、结构化读取 inspect_workbook、OpenXML 校验 validate_workbook、渲染成图 render_workbook。</a:t>
             </a:r>
             <a:endParaRPr lang="en-US" sz="1300" dirty="0"/>
           </a:p>
@@ -21294,7 +25027,7 @@
                 <a:ea typeface="PingFang SC" pitchFamily="34" charset="-122"/>
                 <a:cs typeface="PingFang SC" pitchFamily="34" charset="-120"/>
               </a:rPr>
-              <a:t>6 / 21</a:t>
+              <a:t>6 / 29</a:t>
             </a:r>
             <a:endParaRPr lang="en-US" sz="1000" dirty="0"/>
           </a:p>
@@ -21357,7 +25090,7 @@
                 <a:ea typeface="PingFang SC" pitchFamily="34" charset="-122"/>
                 <a:cs typeface="PingFang SC" pitchFamily="34" charset="-120"/>
               </a:rPr>
-              <a:t>excel-guard：检测损坏表 · 识别编码 · 超大表分块 · 描述表结构 · 表转 Markdown</a:t>
+              <a:t>excel-guard ×9：检测损坏表 · 识别编码 · 超大表分块 · 描述表结构 · 表转 Markdown · 守卫写回 · 结构化读取 · OpenXML 校验 · 渲染成图</a:t>
             </a:r>
             <a:endParaRPr lang="en-US" sz="1000" dirty="0"/>
           </a:p>
@@ -21467,7 +25200,7 @@
                 <a:ea typeface="PingFang SC" pitchFamily="34" charset="-122"/>
                 <a:cs typeface="PingFang SC" pitchFamily="34" charset="-120"/>
               </a:rPr>
-              <a:t>7 / 21</a:t>
+              <a:t>7 / 29</a:t>
             </a:r>
             <a:endParaRPr lang="en-US" sz="1000" dirty="0"/>
           </a:p>
@@ -21640,7 +25373,7 @@
                 <a:ea typeface="PingFang SC" pitchFamily="34" charset="-122"/>
                 <a:cs typeface="PingFang SC" pitchFamily="34" charset="-120"/>
               </a:rPr>
-              <a:t>8 / 21</a:t>
+              <a:t>8 / 29</a:t>
             </a:r>
             <a:endParaRPr lang="en-US" sz="1000" dirty="0"/>
           </a:p>
@@ -21813,7 +25546,7 @@
                 <a:ea typeface="PingFang SC" pitchFamily="34" charset="-122"/>
                 <a:cs typeface="PingFang SC" pitchFamily="34" charset="-120"/>
               </a:rPr>
-              <a:t>9 / 21</a:t>
+              <a:t>9 / 29</a:t>
             </a:r>
             <a:endParaRPr lang="en-US" sz="1000" dirty="0"/>
           </a:p>

--- a/docs/演示材料/顺德POC四助手架构.pptx
+++ b/docs/演示材料/顺德POC四助手架构.pptx
@@ -18052,7 +18052,7 @@
                 <a:ea typeface="PingFang SC" pitchFamily="34" charset="-122"/>
                 <a:cs typeface="PingFang SC" pitchFamily="34" charset="-120"/>
               </a:rPr>
-              <a:t>L1 / L2 / L3：上下文渐进式工具加载</a:t>
+              <a:t>L1 / L2 / L3：skill列表摘要 → skill → mcp列表namespace前缀 → 详细mcp → 文件摘要 → 文件详情</a:t>
             </a:r>
             <a:endParaRPr lang="en-US" sz="2000" dirty="0"/>
           </a:p>
@@ -18097,498 +18097,33 @@
           </a:p>
         </p:txBody>
       </p:sp>
-      <p:sp>
-        <p:nvSpPr>
-          <p:cNvPr id="4" name="Text 2"/>
-          <p:cNvSpPr/>
-          <p:nvPr/>
-        </p:nvSpPr>
-        <p:spPr>
-          <a:xfrm>
-            <a:off x="457200" y="841248"/>
-            <a:ext cx="11247120" cy="384048"/>
-          </a:xfrm>
-          <a:prstGeom prst="rect">
-            <a:avLst/>
-          </a:prstGeom>
-          <a:noFill/>
-          <a:ln/>
-        </p:spPr>
-        <p:txBody>
-          <a:bodyPr wrap="square" lIns="0" tIns="0" rIns="0" bIns="0" rtlCol="0" anchor="ctr"/>
-          <a:lstStyle/>
-          <a:p>
-            <a:pPr algn="ctr" indent="0" marL="0">
-              <a:buNone/>
-            </a:pPr>
-            <a:r>
-              <a:rPr lang="en-US" sz="1400" b="1" dirty="0">
-                <a:solidFill>
-                  <a:srgbClr val="1E2A3A"/>
-                </a:solidFill>
-                <a:latin typeface="PingFang SC" pitchFamily="34" charset="0"/>
-                <a:ea typeface="PingFang SC" pitchFamily="34" charset="-122"/>
-                <a:cs typeface="PingFang SC" pitchFamily="34" charset="-120"/>
-              </a:rPr>
-              <a:t>skill列表摘要 → skill → mcp列表namespace前缀 → 详细mcp → 文件摘要 → 文件详情</a:t>
-            </a:r>
-            <a:endParaRPr lang="en-US" sz="1400" dirty="0"/>
-          </a:p>
-        </p:txBody>
-      </p:sp>
-      <p:sp>
-        <p:nvSpPr>
-          <p:cNvPr id="5" name="Shape 3"/>
-          <p:cNvSpPr/>
-          <p:nvPr/>
-        </p:nvSpPr>
-        <p:spPr>
-          <a:xfrm>
-            <a:off x="457200" y="1371600"/>
-            <a:ext cx="3657600" cy="3246120"/>
-          </a:xfrm>
-          <a:prstGeom prst="rect">
-            <a:avLst/>
-          </a:prstGeom>
-          <a:solidFill>
-            <a:srgbClr val="F7F8FA"/>
-          </a:solidFill>
-          <a:ln/>
-        </p:spPr>
-      </p:sp>
-      <p:sp>
-        <p:nvSpPr>
-          <p:cNvPr id="6" name="Text 4"/>
-          <p:cNvSpPr/>
-          <p:nvPr/>
-        </p:nvSpPr>
-        <p:spPr>
-          <a:xfrm>
-            <a:off x="457200" y="1508760"/>
-            <a:ext cx="3657600" cy="457200"/>
-          </a:xfrm>
-          <a:prstGeom prst="rect">
-            <a:avLst/>
-          </a:prstGeom>
-          <a:noFill/>
-          <a:ln/>
-        </p:spPr>
-        <p:txBody>
-          <a:bodyPr wrap="square" lIns="0" tIns="0" rIns="0" bIns="0" rtlCol="0" anchor="ctr"/>
-          <a:lstStyle/>
-          <a:p>
-            <a:pPr algn="ctr" indent="0" marL="0">
-              <a:buNone/>
-            </a:pPr>
-            <a:r>
-              <a:rPr lang="en-US" sz="2200" b="1" dirty="0">
-                <a:solidFill>
-                  <a:srgbClr val="C5A55A"/>
-                </a:solidFill>
-                <a:latin typeface="PingFang SC" pitchFamily="34" charset="0"/>
-                <a:ea typeface="PingFang SC" pitchFamily="34" charset="-122"/>
-                <a:cs typeface="PingFang SC" pitchFamily="34" charset="-120"/>
-              </a:rPr>
-              <a:t>L1</a:t>
-            </a:r>
-            <a:endParaRPr lang="en-US" sz="2200" dirty="0"/>
-          </a:p>
-        </p:txBody>
-      </p:sp>
-      <p:sp>
-        <p:nvSpPr>
-          <p:cNvPr id="7" name="Text 5"/>
-          <p:cNvSpPr/>
-          <p:nvPr/>
-        </p:nvSpPr>
-        <p:spPr>
-          <a:xfrm>
-            <a:off x="640080" y="2011680"/>
-            <a:ext cx="3291840" cy="502920"/>
-          </a:xfrm>
-          <a:prstGeom prst="rect">
-            <a:avLst/>
-          </a:prstGeom>
-          <a:noFill/>
-          <a:ln/>
-        </p:spPr>
-        <p:txBody>
-          <a:bodyPr wrap="square" lIns="0" tIns="0" rIns="0" bIns="0" rtlCol="0" anchor="ctr"/>
-          <a:lstStyle/>
-          <a:p>
-            <a:pPr algn="ctr" indent="0" marL="0">
-              <a:buNone/>
-            </a:pPr>
-            <a:r>
-              <a:rPr lang="en-US" sz="1600" b="1" dirty="0">
-                <a:solidFill>
-                  <a:srgbClr val="1F2937"/>
-                </a:solidFill>
-                <a:latin typeface="PingFang SC" pitchFamily="34" charset="0"/>
-                <a:ea typeface="PingFang SC" pitchFamily="34" charset="-122"/>
-                <a:cs typeface="PingFang SC" pitchFamily="34" charset="-120"/>
-              </a:rPr>
-              <a:t>skill列表摘要</a:t>
-            </a:r>
-            <a:endParaRPr lang="en-US" sz="1600" dirty="0"/>
-          </a:p>
-        </p:txBody>
-      </p:sp>
-      <p:sp>
-        <p:nvSpPr>
-          <p:cNvPr id="8" name="Text 6"/>
-          <p:cNvSpPr/>
-          <p:nvPr/>
-        </p:nvSpPr>
-        <p:spPr>
-          <a:xfrm>
-            <a:off x="685800" y="2651760"/>
-            <a:ext cx="3200400" cy="1737360"/>
-          </a:xfrm>
-          <a:prstGeom prst="rect">
-            <a:avLst/>
-          </a:prstGeom>
-          <a:noFill/>
-          <a:ln/>
-        </p:spPr>
-        <p:txBody>
-          <a:bodyPr wrap="square" lIns="0" tIns="0" rIns="0" bIns="0" rtlCol="0" anchor="ctr"/>
-          <a:lstStyle/>
-          <a:p>
-            <a:pPr indent="0" marL="0">
-              <a:buNone/>
-            </a:pPr>
-            <a:r>
-              <a:rPr lang="en-US" sz="1300" dirty="0">
-                <a:solidFill>
-                  <a:srgbClr val="6B7280"/>
-                </a:solidFill>
-                <a:latin typeface="PingFang SC" pitchFamily="34" charset="0"/>
-                <a:ea typeface="PingFang SC" pitchFamily="34" charset="-122"/>
-                <a:cs typeface="PingFang SC" pitchFamily="34" charset="-120"/>
-              </a:rPr>
-              <a:t>YAML description 短目录。始终在上下文最前面，前缀不变，利于缓存命中率。</a:t>
-            </a:r>
-            <a:endParaRPr lang="en-US" sz="1300" dirty="0"/>
-          </a:p>
-        </p:txBody>
-      </p:sp>
-      <p:sp>
-        <p:nvSpPr>
-          <p:cNvPr id="9" name="Shape 7"/>
-          <p:cNvSpPr/>
-          <p:nvPr/>
-        </p:nvSpPr>
-        <p:spPr>
-          <a:xfrm>
-            <a:off x="4297680" y="1371600"/>
-            <a:ext cx="3657600" cy="3246120"/>
-          </a:xfrm>
-          <a:prstGeom prst="rect">
-            <a:avLst/>
-          </a:prstGeom>
-          <a:solidFill>
-            <a:srgbClr val="F7F8FA"/>
-          </a:solidFill>
-          <a:ln/>
-        </p:spPr>
-      </p:sp>
-      <p:sp>
-        <p:nvSpPr>
-          <p:cNvPr id="10" name="Text 8"/>
-          <p:cNvSpPr/>
-          <p:nvPr/>
-        </p:nvSpPr>
-        <p:spPr>
-          <a:xfrm>
-            <a:off x="4297680" y="1508760"/>
-            <a:ext cx="3657600" cy="457200"/>
-          </a:xfrm>
-          <a:prstGeom prst="rect">
-            <a:avLst/>
-          </a:prstGeom>
-          <a:noFill/>
-          <a:ln/>
-        </p:spPr>
-        <p:txBody>
-          <a:bodyPr wrap="square" lIns="0" tIns="0" rIns="0" bIns="0" rtlCol="0" anchor="ctr"/>
-          <a:lstStyle/>
-          <a:p>
-            <a:pPr algn="ctr" indent="0" marL="0">
-              <a:buNone/>
-            </a:pPr>
-            <a:r>
-              <a:rPr lang="en-US" sz="2200" b="1" dirty="0">
-                <a:solidFill>
-                  <a:srgbClr val="C5A55A"/>
-                </a:solidFill>
-                <a:latin typeface="PingFang SC" pitchFamily="34" charset="0"/>
-                <a:ea typeface="PingFang SC" pitchFamily="34" charset="-122"/>
-                <a:cs typeface="PingFang SC" pitchFamily="34" charset="-120"/>
-              </a:rPr>
-              <a:t>L2</a:t>
-            </a:r>
-            <a:endParaRPr lang="en-US" sz="2200" dirty="0"/>
-          </a:p>
-        </p:txBody>
-      </p:sp>
-      <p:sp>
-        <p:nvSpPr>
-          <p:cNvPr id="11" name="Text 9"/>
-          <p:cNvSpPr/>
-          <p:nvPr/>
-        </p:nvSpPr>
-        <p:spPr>
-          <a:xfrm>
-            <a:off x="4480560" y="2011680"/>
-            <a:ext cx="3291840" cy="502920"/>
-          </a:xfrm>
-          <a:prstGeom prst="rect">
-            <a:avLst/>
-          </a:prstGeom>
-          <a:noFill/>
-          <a:ln/>
-        </p:spPr>
-        <p:txBody>
-          <a:bodyPr wrap="square" lIns="0" tIns="0" rIns="0" bIns="0" rtlCol="0" anchor="ctr"/>
-          <a:lstStyle/>
-          <a:p>
-            <a:pPr algn="ctr" indent="0" marL="0">
-              <a:buNone/>
-            </a:pPr>
-            <a:r>
-              <a:rPr lang="en-US" sz="1600" b="1" dirty="0">
-                <a:solidFill>
-                  <a:srgbClr val="1F2937"/>
-                </a:solidFill>
-                <a:latin typeface="PingFang SC" pitchFamily="34" charset="0"/>
-                <a:ea typeface="PingFang SC" pitchFamily="34" charset="-122"/>
-                <a:cs typeface="PingFang SC" pitchFamily="34" charset="-120"/>
-              </a:rPr>
-              <a:t>skill + mcp列表</a:t>
-            </a:r>
-            <a:endParaRPr lang="en-US" sz="1600" dirty="0"/>
-          </a:p>
-        </p:txBody>
-      </p:sp>
-      <p:sp>
-        <p:nvSpPr>
-          <p:cNvPr id="12" name="Text 10"/>
-          <p:cNvSpPr/>
-          <p:nvPr/>
-        </p:nvSpPr>
-        <p:spPr>
-          <a:xfrm>
-            <a:off x="4526280" y="2651760"/>
-            <a:ext cx="3200400" cy="1737360"/>
-          </a:xfrm>
-          <a:prstGeom prst="rect">
-            <a:avLst/>
-          </a:prstGeom>
-          <a:noFill/>
-          <a:ln/>
-        </p:spPr>
-        <p:txBody>
-          <a:bodyPr wrap="square" lIns="0" tIns="0" rIns="0" bIns="0" rtlCol="0" anchor="ctr"/>
-          <a:lstStyle/>
-          <a:p>
-            <a:pPr indent="0" marL="0">
-              <a:buNone/>
-            </a:pPr>
-            <a:r>
-              <a:rPr lang="en-US" sz="1300" dirty="0">
-                <a:solidFill>
-                  <a:srgbClr val="6B7280"/>
-                </a:solidFill>
-                <a:latin typeface="PingFang SC" pitchFamily="34" charset="0"/>
-                <a:ea typeface="PingFang SC" pitchFamily="34" charset="-122"/>
-                <a:cs typeface="PingFang SC" pitchFamily="34" charset="-120"/>
-              </a:rPr>
-              <a:t>选中助手后才加载 skill 正文，再给带 namespace前缀 的 mcp列表（excel_guard__ / kb_qa__ / ops_data__ / report_visualizer__）。</a:t>
-            </a:r>
-            <a:endParaRPr lang="en-US" sz="1300" dirty="0"/>
-          </a:p>
-        </p:txBody>
-      </p:sp>
-      <p:sp>
-        <p:nvSpPr>
-          <p:cNvPr id="13" name="Shape 11"/>
-          <p:cNvSpPr/>
-          <p:nvPr/>
-        </p:nvSpPr>
-        <p:spPr>
-          <a:xfrm>
-            <a:off x="8138160" y="1371600"/>
-            <a:ext cx="3657600" cy="3246120"/>
-          </a:xfrm>
-          <a:prstGeom prst="rect">
-            <a:avLst/>
-          </a:prstGeom>
-          <a:solidFill>
-            <a:srgbClr val="F7F8FA"/>
-          </a:solidFill>
-          <a:ln/>
-        </p:spPr>
-      </p:sp>
-      <p:sp>
-        <p:nvSpPr>
-          <p:cNvPr id="14" name="Text 12"/>
-          <p:cNvSpPr/>
-          <p:nvPr/>
-        </p:nvSpPr>
-        <p:spPr>
-          <a:xfrm>
-            <a:off x="8138160" y="1508760"/>
-            <a:ext cx="3657600" cy="457200"/>
-          </a:xfrm>
-          <a:prstGeom prst="rect">
-            <a:avLst/>
-          </a:prstGeom>
-          <a:noFill/>
-          <a:ln/>
-        </p:spPr>
-        <p:txBody>
-          <a:bodyPr wrap="square" lIns="0" tIns="0" rIns="0" bIns="0" rtlCol="0" anchor="ctr"/>
-          <a:lstStyle/>
-          <a:p>
-            <a:pPr algn="ctr" indent="0" marL="0">
-              <a:buNone/>
-            </a:pPr>
-            <a:r>
-              <a:rPr lang="en-US" sz="2200" b="1" dirty="0">
-                <a:solidFill>
-                  <a:srgbClr val="C5A55A"/>
-                </a:solidFill>
-                <a:latin typeface="PingFang SC" pitchFamily="34" charset="0"/>
-                <a:ea typeface="PingFang SC" pitchFamily="34" charset="-122"/>
-                <a:cs typeface="PingFang SC" pitchFamily="34" charset="-120"/>
-              </a:rPr>
-              <a:t>L3</a:t>
-            </a:r>
-            <a:endParaRPr lang="en-US" sz="2200" dirty="0"/>
-          </a:p>
-        </p:txBody>
-      </p:sp>
-      <p:sp>
-        <p:nvSpPr>
-          <p:cNvPr id="15" name="Text 13"/>
-          <p:cNvSpPr/>
-          <p:nvPr/>
-        </p:nvSpPr>
-        <p:spPr>
-          <a:xfrm>
-            <a:off x="8321040" y="2011680"/>
-            <a:ext cx="3291840" cy="502920"/>
-          </a:xfrm>
-          <a:prstGeom prst="rect">
-            <a:avLst/>
-          </a:prstGeom>
-          <a:noFill/>
-          <a:ln/>
-        </p:spPr>
-        <p:txBody>
-          <a:bodyPr wrap="square" lIns="0" tIns="0" rIns="0" bIns="0" rtlCol="0" anchor="ctr"/>
-          <a:lstStyle/>
-          <a:p>
-            <a:pPr algn="ctr" indent="0" marL="0">
-              <a:buNone/>
-            </a:pPr>
-            <a:r>
-              <a:rPr lang="en-US" sz="1600" b="1" dirty="0">
-                <a:solidFill>
-                  <a:srgbClr val="1F2937"/>
-                </a:solidFill>
-                <a:latin typeface="PingFang SC" pitchFamily="34" charset="0"/>
-                <a:ea typeface="PingFang SC" pitchFamily="34" charset="-122"/>
-                <a:cs typeface="PingFang SC" pitchFamily="34" charset="-120"/>
-              </a:rPr>
-              <a:t>详细mcp → 文件</a:t>
-            </a:r>
-            <a:endParaRPr lang="en-US" sz="1600" dirty="0"/>
-          </a:p>
-        </p:txBody>
-      </p:sp>
-      <p:sp>
-        <p:nvSpPr>
-          <p:cNvPr id="16" name="Text 14"/>
-          <p:cNvSpPr/>
-          <p:nvPr/>
-        </p:nvSpPr>
-        <p:spPr>
-          <a:xfrm>
-            <a:off x="8366760" y="2651760"/>
-            <a:ext cx="3200400" cy="1737360"/>
-          </a:xfrm>
-          <a:prstGeom prst="rect">
-            <a:avLst/>
-          </a:prstGeom>
-          <a:noFill/>
-          <a:ln/>
-        </p:spPr>
-        <p:txBody>
-          <a:bodyPr wrap="square" lIns="0" tIns="0" rIns="0" bIns="0" rtlCol="0" anchor="ctr"/>
-          <a:lstStyle/>
-          <a:p>
-            <a:pPr indent="0" marL="0">
-              <a:buNone/>
-            </a:pPr>
-            <a:r>
-              <a:rPr lang="en-US" sz="1300" dirty="0">
-                <a:solidFill>
-                  <a:srgbClr val="6B7280"/>
-                </a:solidFill>
-                <a:latin typeface="PingFang SC" pitchFamily="34" charset="0"/>
-                <a:ea typeface="PingFang SC" pitchFamily="34" charset="-122"/>
-                <a:cs typeface="PingFang SC" pitchFamily="34" charset="-120"/>
-              </a:rPr>
-              <a:t>调用时才展开详细mcp 入参。文件摘要（describe / list / parse）之后才文件详情（markdown / 看图 / 事件 / docx）。</a:t>
-            </a:r>
-            <a:endParaRPr lang="en-US" sz="1300" dirty="0"/>
-          </a:p>
-        </p:txBody>
-      </p:sp>
-      <p:sp>
-        <p:nvSpPr>
-          <p:cNvPr id="17" name="Text 15"/>
-          <p:cNvSpPr/>
-          <p:nvPr/>
-        </p:nvSpPr>
-        <p:spPr>
-          <a:xfrm>
-            <a:off x="457200" y="4800600"/>
-            <a:ext cx="11247120" cy="1371600"/>
-          </a:xfrm>
-          <a:prstGeom prst="rect">
-            <a:avLst/>
-          </a:prstGeom>
-          <a:noFill/>
-          <a:ln/>
-        </p:spPr>
-        <p:txBody>
-          <a:bodyPr wrap="square" lIns="0" tIns="0" rIns="0" bIns="0" rtlCol="0" anchor="ctr"/>
-          <a:lstStyle/>
-          <a:p>
-            <a:pPr indent="0" marL="0">
-              <a:buNone/>
-            </a:pPr>
-            <a:r>
-              <a:rPr lang="en-US" sz="1400" dirty="0">
-                <a:solidFill>
-                  <a:srgbClr val="1F2937"/>
-                </a:solidFill>
-                <a:latin typeface="PingFang SC" pitchFamily="34" charset="0"/>
-                <a:ea typeface="PingFang SC" pitchFamily="34" charset="-122"/>
-                <a:cs typeface="PingFang SC" pitchFamily="34" charset="-120"/>
-              </a:rPr>
-              <a:t>同一套顺序同时降低任务完成时间、提高准确率与完成效率：模型先看见目录，再按需打开工具和文件，不把整表/整库灌进第一轮上下文。</a:t>
-            </a:r>
-            <a:endParaRPr lang="en-US" sz="1400" dirty="0"/>
-          </a:p>
-        </p:txBody>
-      </p:sp>
-      <p:sp>
-        <p:nvSpPr>
-          <p:cNvPr id="18" name="Text 16"/>
+      <p:pic>
+        <p:nvPicPr>
+          <p:cNvPr id="4" name="Image 0" descr="/Users/linan/Desktop/aicode/shunde/docs/演示材料/architecture/l123-chain.png">    </p:cNvPr>
+          <p:cNvPicPr>
+            <a:picLocks noChangeAspect="1"/>
+          </p:cNvPicPr>
+          <p:nvPr/>
+        </p:nvPicPr>
+        <p:blipFill>
+          <a:blip r:embed="rId1"/>
+          <a:stretch>
+            <a:fillRect/>
+          </a:stretch>
+        </p:blipFill>
+        <p:spPr>
+          <a:xfrm>
+            <a:off x="1728216" y="804672"/>
+            <a:ext cx="8705088" cy="5440680"/>
+          </a:xfrm>
+          <a:prstGeom prst="rect">
+            <a:avLst/>
+          </a:prstGeom>
+        </p:spPr>
+      </p:pic>
+      <p:sp>
+        <p:nvSpPr>
+          <p:cNvPr id="5" name="Text 2"/>
           <p:cNvSpPr/>
           <p:nvPr/>
         </p:nvSpPr>
@@ -18619,7 +18154,7 @@
                 <a:ea typeface="PingFang SC" pitchFamily="34" charset="-122"/>
                 <a:cs typeface="PingFang SC" pitchFamily="34" charset="-120"/>
               </a:rPr>
-              <a:t>合同写在四个 SKILL.md「渐进加载合同」；MCP 配置声明 namespace。POC 不改 QwenPaw 内核。</a:t>
+              <a:t>降低完成时间、提高准确率与效率；前缀一致性提高缓存命中率，省 token，提高 ROI</a:t>
             </a:r>
             <a:endParaRPr lang="en-US" sz="1000" dirty="0"/>
           </a:p>
@@ -18735,401 +18270,33 @@
           </a:p>
         </p:txBody>
       </p:sp>
-      <p:sp>
-        <p:nvSpPr>
-          <p:cNvPr id="4" name="Shape 2"/>
-          <p:cNvSpPr/>
-          <p:nvPr/>
-        </p:nvSpPr>
-        <p:spPr>
-          <a:xfrm>
-            <a:off x="502920" y="960120"/>
-            <a:ext cx="5623560" cy="2286000"/>
-          </a:xfrm>
-          <a:prstGeom prst="rect">
-            <a:avLst/>
-          </a:prstGeom>
-          <a:solidFill>
-            <a:srgbClr val="F7F8FA"/>
-          </a:solidFill>
-          <a:ln/>
-        </p:spPr>
-      </p:sp>
-      <p:sp>
-        <p:nvSpPr>
-          <p:cNvPr id="5" name="Text 3"/>
-          <p:cNvSpPr/>
-          <p:nvPr/>
-        </p:nvSpPr>
-        <p:spPr>
-          <a:xfrm>
-            <a:off x="777240" y="1188720"/>
-            <a:ext cx="5074920" cy="411480"/>
-          </a:xfrm>
-          <a:prstGeom prst="rect">
-            <a:avLst/>
-          </a:prstGeom>
-          <a:noFill/>
-          <a:ln/>
-        </p:spPr>
-        <p:txBody>
-          <a:bodyPr wrap="square" lIns="0" tIns="0" rIns="0" bIns="0" rtlCol="0" anchor="ctr"/>
-          <a:lstStyle/>
-          <a:p>
-            <a:pPr indent="0" marL="0">
-              <a:buNone/>
-            </a:pPr>
-            <a:r>
-              <a:rPr lang="en-US" sz="1800" b="1" dirty="0">
-                <a:solidFill>
-                  <a:srgbClr val="1E2A3A"/>
-                </a:solidFill>
-                <a:latin typeface="PingFang SC" pitchFamily="34" charset="0"/>
-                <a:ea typeface="PingFang SC" pitchFamily="34" charset="-122"/>
-                <a:cs typeface="PingFang SC" pitchFamily="34" charset="-120"/>
-              </a:rPr>
-              <a:t>缓存命中率</a:t>
-            </a:r>
-            <a:endParaRPr lang="en-US" sz="1800" dirty="0"/>
-          </a:p>
-        </p:txBody>
-      </p:sp>
-      <p:sp>
-        <p:nvSpPr>
-          <p:cNvPr id="6" name="Text 4"/>
-          <p:cNvSpPr/>
-          <p:nvPr/>
-        </p:nvSpPr>
-        <p:spPr>
-          <a:xfrm>
-            <a:off x="777240" y="1737360"/>
-            <a:ext cx="5074920" cy="1280160"/>
-          </a:xfrm>
-          <a:prstGeom prst="rect">
-            <a:avLst/>
-          </a:prstGeom>
-          <a:noFill/>
-          <a:ln/>
-        </p:spPr>
-        <p:txBody>
-          <a:bodyPr wrap="square" lIns="0" tIns="0" rIns="0" bIns="0" rtlCol="0" anchor="ctr"/>
-          <a:lstStyle/>
-          <a:p>
-            <a:pPr indent="0" marL="0">
-              <a:buNone/>
-            </a:pPr>
-            <a:r>
-              <a:rPr lang="en-US" sz="1400" dirty="0">
-                <a:solidFill>
-                  <a:srgbClr val="6B7280"/>
-                </a:solidFill>
-                <a:latin typeface="PingFang SC" pitchFamily="34" charset="0"/>
-                <a:ea typeface="PingFang SC" pitchFamily="34" charset="-122"/>
-                <a:cs typeface="PingFang SC" pitchFamily="34" charset="-120"/>
-              </a:rPr>
-              <a:t>L1 skill列表摘要每轮相同。宿主 2.2.2b1 用 cache_read_tokens / cache_hit_rate 记账。前缀稳定 → 更多 prompt 走缓存。</a:t>
-            </a:r>
-            <a:endParaRPr lang="en-US" sz="1400" dirty="0"/>
-          </a:p>
-        </p:txBody>
-      </p:sp>
-      <p:sp>
-        <p:nvSpPr>
-          <p:cNvPr id="7" name="Shape 5"/>
-          <p:cNvSpPr/>
-          <p:nvPr/>
-        </p:nvSpPr>
-        <p:spPr>
-          <a:xfrm>
-            <a:off x="6309360" y="960120"/>
-            <a:ext cx="5623560" cy="2286000"/>
-          </a:xfrm>
-          <a:prstGeom prst="rect">
-            <a:avLst/>
-          </a:prstGeom>
-          <a:solidFill>
-            <a:srgbClr val="F7F8FA"/>
-          </a:solidFill>
-          <a:ln/>
-        </p:spPr>
-      </p:sp>
-      <p:sp>
-        <p:nvSpPr>
-          <p:cNvPr id="8" name="Text 6"/>
-          <p:cNvSpPr/>
-          <p:nvPr/>
-        </p:nvSpPr>
-        <p:spPr>
-          <a:xfrm>
-            <a:off x="6583680" y="1188720"/>
-            <a:ext cx="5074920" cy="411480"/>
-          </a:xfrm>
-          <a:prstGeom prst="rect">
-            <a:avLst/>
-          </a:prstGeom>
-          <a:noFill/>
-          <a:ln/>
-        </p:spPr>
-        <p:txBody>
-          <a:bodyPr wrap="square" lIns="0" tIns="0" rIns="0" bIns="0" rtlCol="0" anchor="ctr"/>
-          <a:lstStyle/>
-          <a:p>
-            <a:pPr indent="0" marL="0">
-              <a:buNone/>
-            </a:pPr>
-            <a:r>
-              <a:rPr lang="en-US" sz="1800" b="1" dirty="0">
-                <a:solidFill>
-                  <a:srgbClr val="1E2A3A"/>
-                </a:solidFill>
-                <a:latin typeface="PingFang SC" pitchFamily="34" charset="0"/>
-                <a:ea typeface="PingFang SC" pitchFamily="34" charset="-122"/>
-                <a:cs typeface="PingFang SC" pitchFamily="34" charset="-120"/>
-              </a:rPr>
-              <a:t>前缀一致性</a:t>
-            </a:r>
-            <a:endParaRPr lang="en-US" sz="1800" dirty="0"/>
-          </a:p>
-        </p:txBody>
-      </p:sp>
-      <p:sp>
-        <p:nvSpPr>
-          <p:cNvPr id="9" name="Text 7"/>
-          <p:cNvSpPr/>
-          <p:nvPr/>
-        </p:nvSpPr>
-        <p:spPr>
-          <a:xfrm>
-            <a:off x="6583680" y="1737360"/>
-            <a:ext cx="5074920" cy="1280160"/>
-          </a:xfrm>
-          <a:prstGeom prst="rect">
-            <a:avLst/>
-          </a:prstGeom>
-          <a:noFill/>
-          <a:ln/>
-        </p:spPr>
-        <p:txBody>
-          <a:bodyPr wrap="square" lIns="0" tIns="0" rIns="0" bIns="0" rtlCol="0" anchor="ctr"/>
-          <a:lstStyle/>
-          <a:p>
-            <a:pPr indent="0" marL="0">
-              <a:buNone/>
-            </a:pPr>
-            <a:r>
-              <a:rPr lang="en-US" sz="1400" dirty="0">
-                <a:solidFill>
-                  <a:srgbClr val="6B7280"/>
-                </a:solidFill>
-                <a:latin typeface="PingFang SC" pitchFamily="34" charset="0"/>
-                <a:ea typeface="PingFang SC" pitchFamily="34" charset="-122"/>
-                <a:cs typeface="PingFang SC" pitchFamily="34" charset="-120"/>
-              </a:rPr>
-              <a:t>后置 skill 正文、mcp列表、详细mcp、文件摘要、文件详情。变的是后缀，不变的是前缀，KV cache 可复用。</a:t>
-            </a:r>
-            <a:endParaRPr lang="en-US" sz="1400" dirty="0"/>
-          </a:p>
-        </p:txBody>
-      </p:sp>
-      <p:sp>
-        <p:nvSpPr>
-          <p:cNvPr id="10" name="Shape 8"/>
-          <p:cNvSpPr/>
-          <p:nvPr/>
-        </p:nvSpPr>
-        <p:spPr>
-          <a:xfrm>
-            <a:off x="502920" y="3429000"/>
-            <a:ext cx="5623560" cy="2286000"/>
-          </a:xfrm>
-          <a:prstGeom prst="rect">
-            <a:avLst/>
-          </a:prstGeom>
-          <a:solidFill>
-            <a:srgbClr val="F7F8FA"/>
-          </a:solidFill>
-          <a:ln/>
-        </p:spPr>
-      </p:sp>
-      <p:sp>
-        <p:nvSpPr>
-          <p:cNvPr id="11" name="Text 9"/>
-          <p:cNvSpPr/>
-          <p:nvPr/>
-        </p:nvSpPr>
-        <p:spPr>
-          <a:xfrm>
-            <a:off x="777240" y="3657600"/>
-            <a:ext cx="5074920" cy="411480"/>
-          </a:xfrm>
-          <a:prstGeom prst="rect">
-            <a:avLst/>
-          </a:prstGeom>
-          <a:noFill/>
-          <a:ln/>
-        </p:spPr>
-        <p:txBody>
-          <a:bodyPr wrap="square" lIns="0" tIns="0" rIns="0" bIns="0" rtlCol="0" anchor="ctr"/>
-          <a:lstStyle/>
-          <a:p>
-            <a:pPr indent="0" marL="0">
-              <a:buNone/>
-            </a:pPr>
-            <a:r>
-              <a:rPr lang="en-US" sz="1800" b="1" dirty="0">
-                <a:solidFill>
-                  <a:srgbClr val="1E2A3A"/>
-                </a:solidFill>
-                <a:latin typeface="PingFang SC" pitchFamily="34" charset="0"/>
-                <a:ea typeface="PingFang SC" pitchFamily="34" charset="-122"/>
-                <a:cs typeface="PingFang SC" pitchFamily="34" charset="-120"/>
-              </a:rPr>
-              <a:t>token 经济型 ROI</a:t>
-            </a:r>
-            <a:endParaRPr lang="en-US" sz="1800" dirty="0"/>
-          </a:p>
-        </p:txBody>
-      </p:sp>
-      <p:sp>
-        <p:nvSpPr>
-          <p:cNvPr id="12" name="Text 10"/>
-          <p:cNvSpPr/>
-          <p:nvPr/>
-        </p:nvSpPr>
-        <p:spPr>
-          <a:xfrm>
-            <a:off x="777240" y="4206240"/>
-            <a:ext cx="5074920" cy="1280160"/>
-          </a:xfrm>
-          <a:prstGeom prst="rect">
-            <a:avLst/>
-          </a:prstGeom>
-          <a:noFill/>
-          <a:ln/>
-        </p:spPr>
-        <p:txBody>
-          <a:bodyPr wrap="square" lIns="0" tIns="0" rIns="0" bIns="0" rtlCol="0" anchor="ctr"/>
-          <a:lstStyle/>
-          <a:p>
-            <a:pPr indent="0" marL="0">
-              <a:buNone/>
-            </a:pPr>
-            <a:r>
-              <a:rPr lang="en-US" sz="1400" dirty="0">
-                <a:solidFill>
-                  <a:srgbClr val="6B7280"/>
-                </a:solidFill>
-                <a:latin typeface="PingFang SC" pitchFamily="34" charset="0"/>
-                <a:ea typeface="PingFang SC" pitchFamily="34" charset="-122"/>
-                <a:cs typeface="PingFang SC" pitchFamily="34" charset="-120"/>
-              </a:rPr>
-              <a:t>少灌 schema 和整文件，完成时间下降、准确率上升（先摘要再详情），单位任务 token 下降，ROI 提高。</a:t>
-            </a:r>
-            <a:endParaRPr lang="en-US" sz="1400" dirty="0"/>
-          </a:p>
-        </p:txBody>
-      </p:sp>
-      <p:sp>
-        <p:nvSpPr>
-          <p:cNvPr id="13" name="Shape 11"/>
-          <p:cNvSpPr/>
-          <p:nvPr/>
-        </p:nvSpPr>
-        <p:spPr>
-          <a:xfrm>
-            <a:off x="6309360" y="3429000"/>
-            <a:ext cx="5623560" cy="2286000"/>
-          </a:xfrm>
-          <a:prstGeom prst="rect">
-            <a:avLst/>
-          </a:prstGeom>
-          <a:solidFill>
-            <a:srgbClr val="F7F8FA"/>
-          </a:solidFill>
-          <a:ln/>
-        </p:spPr>
-      </p:sp>
-      <p:sp>
-        <p:nvSpPr>
-          <p:cNvPr id="14" name="Text 12"/>
-          <p:cNvSpPr/>
-          <p:nvPr/>
-        </p:nvSpPr>
-        <p:spPr>
-          <a:xfrm>
-            <a:off x="6583680" y="3657600"/>
-            <a:ext cx="5074920" cy="411480"/>
-          </a:xfrm>
-          <a:prstGeom prst="rect">
-            <a:avLst/>
-          </a:prstGeom>
-          <a:noFill/>
-          <a:ln/>
-        </p:spPr>
-        <p:txBody>
-          <a:bodyPr wrap="square" lIns="0" tIns="0" rIns="0" bIns="0" rtlCol="0" anchor="ctr"/>
-          <a:lstStyle/>
-          <a:p>
-            <a:pPr indent="0" marL="0">
-              <a:buNone/>
-            </a:pPr>
-            <a:r>
-              <a:rPr lang="en-US" sz="1800" b="1" dirty="0">
-                <a:solidFill>
-                  <a:srgbClr val="1E2A3A"/>
-                </a:solidFill>
-                <a:latin typeface="PingFang SC" pitchFamily="34" charset="0"/>
-                <a:ea typeface="PingFang SC" pitchFamily="34" charset="-122"/>
-                <a:cs typeface="PingFang SC" pitchFamily="34" charset="-120"/>
-              </a:rPr>
-              <a:t>完成时间 / 准确率</a:t>
-            </a:r>
-            <a:endParaRPr lang="en-US" sz="1800" dirty="0"/>
-          </a:p>
-        </p:txBody>
-      </p:sp>
-      <p:sp>
-        <p:nvSpPr>
-          <p:cNvPr id="15" name="Text 13"/>
-          <p:cNvSpPr/>
-          <p:nvPr/>
-        </p:nvSpPr>
-        <p:spPr>
-          <a:xfrm>
-            <a:off x="6583680" y="4206240"/>
-            <a:ext cx="5074920" cy="1280160"/>
-          </a:xfrm>
-          <a:prstGeom prst="rect">
-            <a:avLst/>
-          </a:prstGeom>
-          <a:noFill/>
-          <a:ln/>
-        </p:spPr>
-        <p:txBody>
-          <a:bodyPr wrap="square" lIns="0" tIns="0" rIns="0" bIns="0" rtlCol="0" anchor="ctr"/>
-          <a:lstStyle/>
-          <a:p>
-            <a:pPr indent="0" marL="0">
-              <a:buNone/>
-            </a:pPr>
-            <a:r>
-              <a:rPr lang="en-US" sz="1400" dirty="0">
-                <a:solidFill>
-                  <a:srgbClr val="6B7280"/>
-                </a:solidFill>
-                <a:latin typeface="PingFang SC" pitchFamily="34" charset="0"/>
-                <a:ea typeface="PingFang SC" pitchFamily="34" charset="-122"/>
-                <a:cs typeface="PingFang SC" pitchFamily="34" charset="-120"/>
-              </a:rPr>
-              <a:t>不必每次重读 25 个工具全文。Excel 先描述表结构再读区间；知识库先检索再看图；运营先列 JSONL 再读事件。</a:t>
-            </a:r>
-            <a:endParaRPr lang="en-US" sz="1400" dirty="0"/>
-          </a:p>
-        </p:txBody>
-      </p:sp>
-      <p:sp>
-        <p:nvSpPr>
-          <p:cNvPr id="16" name="Text 14"/>
+      <p:pic>
+        <p:nvPicPr>
+          <p:cNvPr id="4" name="Image 0" descr="/Users/linan/Desktop/aicode/shunde/docs/演示材料/architecture/prefix-cache-roi.png">    </p:cNvPr>
+          <p:cNvPicPr>
+            <a:picLocks noChangeAspect="1"/>
+          </p:cNvPicPr>
+          <p:nvPr/>
+        </p:nvPicPr>
+        <p:blipFill>
+          <a:blip r:embed="rId1"/>
+          <a:stretch>
+            <a:fillRect/>
+          </a:stretch>
+        </p:blipFill>
+        <p:spPr>
+          <a:xfrm>
+            <a:off x="1728216" y="804672"/>
+            <a:ext cx="8705088" cy="5440680"/>
+          </a:xfrm>
+          <a:prstGeom prst="rect">
+            <a:avLst/>
+          </a:prstGeom>
+        </p:spPr>
+      </p:pic>
+      <p:sp>
+        <p:nvSpPr>
+          <p:cNvPr id="5" name="Text 2"/>
           <p:cNvSpPr/>
           <p:nvPr/>
         </p:nvSpPr>
@@ -19160,7 +18327,7 @@
                 <a:ea typeface="PingFang SC" pitchFamily="34" charset="-122"/>
                 <a:cs typeface="PingFang SC" pitchFamily="34" charset="-120"/>
               </a:rPr>
-              <a:t>机制对比，不编造线上命中百分比。字段见 QwenPaw token_usage.cache_read_tokens。</a:t>
+              <a:t>L1 skill列表摘要每轮相同；详细mcp / 文件摘要 / 文件详情后置。cache_read_tokens 记账，不编造命中百分比。</a:t>
             </a:r>
             <a:endParaRPr lang="en-US" sz="1000" dirty="0"/>
           </a:p>
@@ -19231,7 +18398,7 @@
                 <a:ea typeface="PingFang SC" pitchFamily="34" charset="-122"/>
                 <a:cs typeface="PingFang SC" pitchFamily="34" charset="-120"/>
               </a:rPr>
-              <a:t>新版本比 2.0.0 好：有缓存命中率，还有文件管理系统</a:t>
+              <a:t>新版本比 2.0.0 好：有缓存命中率，Files 可查看、操作、生成、下载；旧版是黑盒</a:t>
             </a:r>
             <a:endParaRPr lang="en-US" sz="2000" dirty="0"/>
           </a:p>
@@ -19276,205 +18443,33 @@
           </a:p>
         </p:txBody>
       </p:sp>
-      <p:sp>
-        <p:nvSpPr>
-          <p:cNvPr id="4" name="Shape 2"/>
-          <p:cNvSpPr/>
-          <p:nvPr/>
-        </p:nvSpPr>
-        <p:spPr>
-          <a:xfrm>
-            <a:off x="502920" y="960120"/>
-            <a:ext cx="5486400" cy="5029200"/>
-          </a:xfrm>
-          <a:prstGeom prst="rect">
-            <a:avLst/>
-          </a:prstGeom>
-          <a:solidFill>
-            <a:srgbClr val="F7F8FA"/>
-          </a:solidFill>
-          <a:ln/>
-        </p:spPr>
-      </p:sp>
-      <p:sp>
-        <p:nvSpPr>
-          <p:cNvPr id="5" name="Text 3"/>
-          <p:cNvSpPr/>
-          <p:nvPr/>
-        </p:nvSpPr>
-        <p:spPr>
-          <a:xfrm>
-            <a:off x="731520" y="1143000"/>
-            <a:ext cx="5029200" cy="411480"/>
-          </a:xfrm>
-          <a:prstGeom prst="rect">
-            <a:avLst/>
-          </a:prstGeom>
-          <a:noFill/>
-          <a:ln/>
-        </p:spPr>
-        <p:txBody>
-          <a:bodyPr wrap="square" lIns="0" tIns="0" rIns="0" bIns="0" rtlCol="0" anchor="ctr"/>
-          <a:lstStyle/>
-          <a:p>
-            <a:pPr indent="0" marL="0">
-              <a:buNone/>
-            </a:pPr>
-            <a:r>
-              <a:rPr lang="en-US" sz="2000" b="1" dirty="0">
-                <a:solidFill>
-                  <a:srgbClr val="C0392B"/>
-                </a:solidFill>
-                <a:latin typeface="PingFang SC" pitchFamily="34" charset="0"/>
-                <a:ea typeface="PingFang SC" pitchFamily="34" charset="-122"/>
-                <a:cs typeface="PingFang SC" pitchFamily="34" charset="-120"/>
-              </a:rPr>
-              <a:t>QwenPaw 2.0.0</a:t>
-            </a:r>
-            <a:endParaRPr lang="en-US" sz="2000" dirty="0"/>
-          </a:p>
-        </p:txBody>
-      </p:sp>
-      <p:sp>
-        <p:nvSpPr>
-          <p:cNvPr id="6" name="Text 4"/>
-          <p:cNvSpPr/>
-          <p:nvPr/>
-        </p:nvSpPr>
-        <p:spPr>
-          <a:xfrm>
-            <a:off x="731520" y="1737360"/>
-            <a:ext cx="5029200" cy="3840480"/>
-          </a:xfrm>
-          <a:prstGeom prst="rect">
-            <a:avLst/>
-          </a:prstGeom>
-          <a:noFill/>
-          <a:ln/>
-        </p:spPr>
-        <p:txBody>
-          <a:bodyPr wrap="square" lIns="0" tIns="0" rIns="0" bIns="0" rtlCol="0" anchor="ctr"/>
-          <a:lstStyle/>
-          <a:p>
-            <a:pPr indent="0" marL="0">
-              <a:buNone/>
-            </a:pPr>
-            <a:r>
-              <a:rPr lang="en-US" sz="1600" dirty="0">
-                <a:solidFill>
-                  <a:srgbClr val="1F2937"/>
-                </a:solidFill>
-                <a:latin typeface="PingFang SC" pitchFamily="34" charset="0"/>
-                <a:ea typeface="PingFang SC" pitchFamily="34" charset="-122"/>
-                <a:cs typeface="PingFang SC" pitchFamily="34" charset="-120"/>
-              </a:rPr>
-              <a:t>操作像黑盒。没有 Files 页，生成的表格/报告/页图你看不见、不能下载。没有 cache_read_tokens，前缀即使用了也无从计量缓存命中率。助手在工作区里读写，评委只能看聊天窗口。</a:t>
-            </a:r>
-            <a:endParaRPr lang="en-US" sz="1600" dirty="0"/>
-          </a:p>
-        </p:txBody>
-      </p:sp>
-      <p:sp>
-        <p:nvSpPr>
-          <p:cNvPr id="7" name="Shape 5"/>
-          <p:cNvSpPr/>
-          <p:nvPr/>
-        </p:nvSpPr>
-        <p:spPr>
-          <a:xfrm>
-            <a:off x="6172200" y="960120"/>
-            <a:ext cx="5486400" cy="5029200"/>
-          </a:xfrm>
-          <a:prstGeom prst="rect">
-            <a:avLst/>
-          </a:prstGeom>
-          <a:solidFill>
-            <a:srgbClr val="F7F8FA"/>
-          </a:solidFill>
-          <a:ln/>
-        </p:spPr>
-      </p:sp>
-      <p:sp>
-        <p:nvSpPr>
-          <p:cNvPr id="8" name="Text 6"/>
-          <p:cNvSpPr/>
-          <p:nvPr/>
-        </p:nvSpPr>
-        <p:spPr>
-          <a:xfrm>
-            <a:off x="6400800" y="1143000"/>
-            <a:ext cx="5029200" cy="411480"/>
-          </a:xfrm>
-          <a:prstGeom prst="rect">
-            <a:avLst/>
-          </a:prstGeom>
-          <a:noFill/>
-          <a:ln/>
-        </p:spPr>
-        <p:txBody>
-          <a:bodyPr wrap="square" lIns="0" tIns="0" rIns="0" bIns="0" rtlCol="0" anchor="ctr"/>
-          <a:lstStyle/>
-          <a:p>
-            <a:pPr indent="0" marL="0">
-              <a:buNone/>
-            </a:pPr>
-            <a:r>
-              <a:rPr lang="en-US" sz="2000" b="1" dirty="0">
-                <a:solidFill>
-                  <a:srgbClr val="27AE60"/>
-                </a:solidFill>
-                <a:latin typeface="PingFang SC" pitchFamily="34" charset="0"/>
-                <a:ea typeface="PingFang SC" pitchFamily="34" charset="-122"/>
-                <a:cs typeface="PingFang SC" pitchFamily="34" charset="-120"/>
-              </a:rPr>
-              <a:t>QwenPaw 2.2.2b1</a:t>
-            </a:r>
-            <a:endParaRPr lang="en-US" sz="2000" dirty="0"/>
-          </a:p>
-        </p:txBody>
-      </p:sp>
-      <p:sp>
-        <p:nvSpPr>
-          <p:cNvPr id="9" name="Text 7"/>
-          <p:cNvSpPr/>
-          <p:nvPr/>
-        </p:nvSpPr>
-        <p:spPr>
-          <a:xfrm>
-            <a:off x="6400800" y="1737360"/>
-            <a:ext cx="5029200" cy="3840480"/>
-          </a:xfrm>
-          <a:prstGeom prst="rect">
-            <a:avLst/>
-          </a:prstGeom>
-          <a:noFill/>
-          <a:ln/>
-        </p:spPr>
-        <p:txBody>
-          <a:bodyPr wrap="square" lIns="0" tIns="0" rIns="0" bIns="0" rtlCol="0" anchor="ctr"/>
-          <a:lstStyle/>
-          <a:p>
-            <a:pPr indent="0" marL="0">
-              <a:buNone/>
-            </a:pPr>
-            <a:r>
-              <a:rPr lang="en-US" sz="1600" dirty="0">
-                <a:solidFill>
-                  <a:srgbClr val="1F2937"/>
-                </a:solidFill>
-                <a:latin typeface="PingFang SC" pitchFamily="34" charset="0"/>
-                <a:ea typeface="PingFang SC" pitchFamily="34" charset="-122"/>
-                <a:cs typeface="PingFang SC" pitchFamily="34" charset="-120"/>
-              </a:rPr>
-              <a:t>Console Files 可查看、操作、生成并下载工作区文件。token 账本含 cache_read_tokens，能算缓存命中率。前缀一致性让 L1 目录复用缓存，省 token、提高 ROI。POC 仍不改内核，只对齐渐进加载合同。</a:t>
-            </a:r>
-            <a:endParaRPr lang="en-US" sz="1600" dirty="0"/>
-          </a:p>
-        </p:txBody>
-      </p:sp>
-      <p:sp>
-        <p:nvSpPr>
-          <p:cNvPr id="10" name="Text 8"/>
+      <p:pic>
+        <p:nvPicPr>
+          <p:cNvPr id="4" name="Image 0" descr="/Users/linan/Desktop/aicode/shunde/docs/演示材料/architecture/files-vs-blackbox.png">    </p:cNvPr>
+          <p:cNvPicPr>
+            <a:picLocks noChangeAspect="1"/>
+          </p:cNvPicPr>
+          <p:nvPr/>
+        </p:nvPicPr>
+        <p:blipFill>
+          <a:blip r:embed="rId1"/>
+          <a:stretch>
+            <a:fillRect/>
+          </a:stretch>
+        </p:blipFill>
+        <p:spPr>
+          <a:xfrm>
+            <a:off x="1728216" y="804672"/>
+            <a:ext cx="8705088" cy="5440680"/>
+          </a:xfrm>
+          <a:prstGeom prst="rect">
+            <a:avLst/>
+          </a:prstGeom>
+        </p:spPr>
+      </p:pic>
+      <p:sp>
+        <p:nvSpPr>
+          <p:cNvPr id="5" name="Text 2"/>
           <p:cNvSpPr/>
           <p:nvPr/>
         </p:nvSpPr>
@@ -19505,7 +18500,7 @@
                 <a:ea typeface="PingFang SC" pitchFamily="34" charset="-122"/>
                 <a:cs typeface="PingFang SC" pitchFamily="34" charset="-120"/>
               </a:rPr>
-              <a:t>Files：console/src/pages/Files + files-workspace 下载按钮。2.0.0 无此页。</a:t>
+              <a:t>2.2.2b1 Console Files；2.0.0 没有 Files 页，只能看聊天窗口。</a:t>
             </a:r>
             <a:endParaRPr lang="en-US" sz="1000" dirty="0"/>
           </a:p>
@@ -25552,749 +24547,33 @@
           </a:p>
         </p:txBody>
       </p:sp>
-      <p:sp>
-        <p:nvSpPr>
-          <p:cNvPr id="4" name="Shape 2"/>
-          <p:cNvSpPr/>
-          <p:nvPr/>
-        </p:nvSpPr>
-        <p:spPr>
-          <a:xfrm>
-            <a:off x="502920" y="960120"/>
-            <a:ext cx="3657600" cy="3246120"/>
-          </a:xfrm>
-          <a:prstGeom prst="rect">
-            <a:avLst/>
-          </a:prstGeom>
-          <a:solidFill>
-            <a:srgbClr val="F7F8FA"/>
-          </a:solidFill>
-          <a:ln/>
-        </p:spPr>
-      </p:sp>
-      <p:sp>
-        <p:nvSpPr>
-          <p:cNvPr id="5" name="Shape 3"/>
-          <p:cNvSpPr/>
-          <p:nvPr/>
-        </p:nvSpPr>
-        <p:spPr>
-          <a:xfrm>
-            <a:off x="502920" y="960120"/>
-            <a:ext cx="73152" cy="3246120"/>
-          </a:xfrm>
-          <a:prstGeom prst="rect">
-            <a:avLst/>
-          </a:prstGeom>
-          <a:solidFill>
-            <a:srgbClr val="1E2A3A"/>
-          </a:solidFill>
-          <a:ln/>
-        </p:spPr>
-      </p:sp>
-      <p:sp>
-        <p:nvSpPr>
-          <p:cNvPr id="6" name="Text 4"/>
-          <p:cNvSpPr/>
-          <p:nvPr/>
-        </p:nvSpPr>
-        <p:spPr>
-          <a:xfrm>
-            <a:off x="758952" y="1115568"/>
-            <a:ext cx="3246120" cy="292608"/>
-          </a:xfrm>
-          <a:prstGeom prst="rect">
-            <a:avLst/>
-          </a:prstGeom>
-          <a:noFill/>
-          <a:ln/>
-        </p:spPr>
-        <p:txBody>
-          <a:bodyPr wrap="square" lIns="0" tIns="0" rIns="0" bIns="0" rtlCol="0" anchor="ctr"/>
-          <a:lstStyle/>
-          <a:p>
-            <a:pPr indent="0" marL="0">
-              <a:buNone/>
-            </a:pPr>
-            <a:r>
-              <a:rPr lang="en-US" sz="1200" b="1" dirty="0">
-                <a:solidFill>
-                  <a:srgbClr val="C5A55A"/>
-                </a:solidFill>
-                <a:latin typeface="PingFang SC" pitchFamily="34" charset="0"/>
-                <a:ea typeface="PingFang SC" pitchFamily="34" charset="-122"/>
-                <a:cs typeface="PingFang SC" pitchFamily="34" charset="-120"/>
-              </a:rPr>
-              <a:t>1  安装</a:t>
-            </a:r>
-            <a:endParaRPr lang="en-US" sz="1200" dirty="0"/>
-          </a:p>
-        </p:txBody>
-      </p:sp>
-      <p:sp>
-        <p:nvSpPr>
-          <p:cNvPr id="7" name="Text 5"/>
-          <p:cNvSpPr/>
-          <p:nvPr/>
-        </p:nvSpPr>
-        <p:spPr>
-          <a:xfrm>
-            <a:off x="758952" y="1444752"/>
-            <a:ext cx="3246120" cy="365760"/>
-          </a:xfrm>
-          <a:prstGeom prst="rect">
-            <a:avLst/>
-          </a:prstGeom>
-          <a:noFill/>
-          <a:ln/>
-        </p:spPr>
-        <p:txBody>
-          <a:bodyPr wrap="square" lIns="0" tIns="0" rIns="0" bIns="0" rtlCol="0" anchor="ctr"/>
-          <a:lstStyle/>
-          <a:p>
-            <a:pPr indent="0" marL="0">
-              <a:buNone/>
-            </a:pPr>
-            <a:r>
-              <a:rPr lang="en-US" sz="1600" b="1" dirty="0">
-                <a:solidFill>
-                  <a:srgbClr val="1F2937"/>
-                </a:solidFill>
-                <a:latin typeface="PingFang SC" pitchFamily="34" charset="0"/>
-                <a:ea typeface="PingFang SC" pitchFamily="34" charset="-122"/>
-                <a:cs typeface="PingFang SC" pitchFamily="34" charset="-120"/>
-              </a:rPr>
-              <a:t>插件形态</a:t>
-            </a:r>
-            <a:endParaRPr lang="en-US" sz="1600" dirty="0"/>
-          </a:p>
-        </p:txBody>
-      </p:sp>
-      <p:sp>
-        <p:nvSpPr>
-          <p:cNvPr id="8" name="Text 6"/>
-          <p:cNvSpPr/>
-          <p:nvPr/>
-        </p:nvSpPr>
-        <p:spPr>
-          <a:xfrm>
-            <a:off x="758952" y="1874520"/>
-            <a:ext cx="3246120" cy="502920"/>
-          </a:xfrm>
-          <a:prstGeom prst="rect">
-            <a:avLst/>
-          </a:prstGeom>
-          <a:noFill/>
-          <a:ln/>
-        </p:spPr>
-        <p:txBody>
-          <a:bodyPr wrap="square" lIns="0" tIns="0" rIns="0" bIns="0" rtlCol="0" anchor="ctr"/>
-          <a:lstStyle/>
-          <a:p>
-            <a:pPr indent="0" marL="0">
-              <a:buNone/>
-            </a:pPr>
-            <a:r>
-              <a:rPr lang="en-US" sz="1800" b="1" dirty="0">
-                <a:solidFill>
-                  <a:srgbClr val="1E2A3A"/>
-                </a:solidFill>
-                <a:latin typeface="PingFang SC" pitchFamily="34" charset="0"/>
-                <a:ea typeface="PingFang SC" pitchFamily="34" charset="-122"/>
-                <a:cs typeface="PingFang SC" pitchFamily="34" charset="-120"/>
-              </a:rPr>
-              <a:t>poc-ops-telemetry</a:t>
-            </a:r>
-            <a:endParaRPr lang="en-US" sz="1800" dirty="0"/>
-          </a:p>
-        </p:txBody>
-      </p:sp>
-      <p:sp>
-        <p:nvSpPr>
-          <p:cNvPr id="9" name="Text 7"/>
-          <p:cNvSpPr/>
-          <p:nvPr/>
-        </p:nvSpPr>
-        <p:spPr>
-          <a:xfrm>
-            <a:off x="758952" y="2468880"/>
-            <a:ext cx="3246120" cy="1463040"/>
-          </a:xfrm>
-          <a:prstGeom prst="rect">
-            <a:avLst/>
-          </a:prstGeom>
-          <a:noFill/>
-          <a:ln/>
-        </p:spPr>
-        <p:txBody>
-          <a:bodyPr wrap="square" lIns="0" tIns="0" rIns="0" bIns="0" rtlCol="0" anchor="ctr"/>
-          <a:lstStyle/>
-          <a:p>
-            <a:pPr indent="0" marL="0">
-              <a:buNone/>
-            </a:pPr>
-            <a:r>
-              <a:rPr lang="en-US" sz="1300" dirty="0">
-                <a:solidFill>
-                  <a:srgbClr val="6B7280"/>
-                </a:solidFill>
-                <a:latin typeface="PingFang SC" pitchFamily="34" charset="0"/>
-                <a:ea typeface="PingFang SC" pitchFamily="34" charset="-122"/>
-                <a:cs typeface="PingFang SC" pitchFamily="34" charset="-120"/>
-              </a:rPr>
-              <a:t>plugin.json 写 type=hook、hook_type=runtime。qwenpaw plugin install 旁路装入，不改 QwenPaw/src。</a:t>
-            </a:r>
-            <a:endParaRPr lang="en-US" sz="1300" dirty="0"/>
-          </a:p>
-        </p:txBody>
-      </p:sp>
-      <p:sp>
-        <p:nvSpPr>
-          <p:cNvPr id="10" name="Shape 8"/>
-          <p:cNvSpPr/>
-          <p:nvPr/>
-        </p:nvSpPr>
-        <p:spPr>
-          <a:xfrm>
-            <a:off x="4343400" y="960120"/>
-            <a:ext cx="3657600" cy="3246120"/>
-          </a:xfrm>
-          <a:prstGeom prst="rect">
-            <a:avLst/>
-          </a:prstGeom>
-          <a:solidFill>
-            <a:srgbClr val="F7F8FA"/>
-          </a:solidFill>
-          <a:ln/>
-        </p:spPr>
-      </p:sp>
-      <p:sp>
-        <p:nvSpPr>
-          <p:cNvPr id="11" name="Shape 9"/>
-          <p:cNvSpPr/>
-          <p:nvPr/>
-        </p:nvSpPr>
-        <p:spPr>
-          <a:xfrm>
-            <a:off x="4343400" y="960120"/>
-            <a:ext cx="73152" cy="3246120"/>
-          </a:xfrm>
-          <a:prstGeom prst="rect">
-            <a:avLst/>
-          </a:prstGeom>
-          <a:solidFill>
-            <a:srgbClr val="C5A55A"/>
-          </a:solidFill>
-          <a:ln/>
-        </p:spPr>
-      </p:sp>
-      <p:sp>
-        <p:nvSpPr>
-          <p:cNvPr id="12" name="Text 10"/>
-          <p:cNvSpPr/>
-          <p:nvPr/>
-        </p:nvSpPr>
-        <p:spPr>
-          <a:xfrm>
-            <a:off x="4599432" y="1115568"/>
-            <a:ext cx="3246120" cy="292608"/>
-          </a:xfrm>
-          <a:prstGeom prst="rect">
-            <a:avLst/>
-          </a:prstGeom>
-          <a:noFill/>
-          <a:ln/>
-        </p:spPr>
-        <p:txBody>
-          <a:bodyPr wrap="square" lIns="0" tIns="0" rIns="0" bIns="0" rtlCol="0" anchor="ctr"/>
-          <a:lstStyle/>
-          <a:p>
-            <a:pPr indent="0" marL="0">
-              <a:buNone/>
-            </a:pPr>
-            <a:r>
-              <a:rPr lang="en-US" sz="1200" b="1" dirty="0">
-                <a:solidFill>
-                  <a:srgbClr val="C5A55A"/>
-                </a:solidFill>
-                <a:latin typeface="PingFang SC" pitchFamily="34" charset="0"/>
-                <a:ea typeface="PingFang SC" pitchFamily="34" charset="-122"/>
-                <a:cs typeface="PingFang SC" pitchFamily="34" charset="-120"/>
-              </a:rPr>
-              <a:t>2  执行</a:t>
-            </a:r>
-            <a:endParaRPr lang="en-US" sz="1200" dirty="0"/>
-          </a:p>
-        </p:txBody>
-      </p:sp>
-      <p:sp>
-        <p:nvSpPr>
-          <p:cNvPr id="13" name="Text 11"/>
-          <p:cNvSpPr/>
-          <p:nvPr/>
-        </p:nvSpPr>
-        <p:spPr>
-          <a:xfrm>
-            <a:off x="4599432" y="1444752"/>
-            <a:ext cx="3246120" cy="365760"/>
-          </a:xfrm>
-          <a:prstGeom prst="rect">
-            <a:avLst/>
-          </a:prstGeom>
-          <a:noFill/>
-          <a:ln/>
-        </p:spPr>
-        <p:txBody>
-          <a:bodyPr wrap="square" lIns="0" tIns="0" rIns="0" bIns="0" rtlCol="0" anchor="ctr"/>
-          <a:lstStyle/>
-          <a:p>
-            <a:pPr indent="0" marL="0">
-              <a:buNone/>
-            </a:pPr>
-            <a:r>
-              <a:rPr lang="en-US" sz="1600" b="1" dirty="0">
-                <a:solidFill>
-                  <a:srgbClr val="1F2937"/>
-                </a:solidFill>
-                <a:latin typeface="PingFang SC" pitchFamily="34" charset="0"/>
-                <a:ea typeface="PingFang SC" pitchFamily="34" charset="-122"/>
-                <a:cs typeface="PingFang SC" pitchFamily="34" charset="-120"/>
-              </a:rPr>
-              <a:t>Runtime 形态</a:t>
-            </a:r>
-            <a:endParaRPr lang="en-US" sz="1600" dirty="0"/>
-          </a:p>
-        </p:txBody>
-      </p:sp>
-      <p:sp>
-        <p:nvSpPr>
-          <p:cNvPr id="14" name="Text 12"/>
-          <p:cNvSpPr/>
-          <p:nvPr/>
-        </p:nvSpPr>
-        <p:spPr>
-          <a:xfrm>
-            <a:off x="4599432" y="1874520"/>
-            <a:ext cx="3246120" cy="502920"/>
-          </a:xfrm>
-          <a:prstGeom prst="rect">
-            <a:avLst/>
-          </a:prstGeom>
-          <a:noFill/>
-          <a:ln/>
-        </p:spPr>
-        <p:txBody>
-          <a:bodyPr wrap="square" lIns="0" tIns="0" rIns="0" bIns="0" rtlCol="0" anchor="ctr"/>
-          <a:lstStyle/>
-          <a:p>
-            <a:pPr indent="0" marL="0">
-              <a:buNone/>
-            </a:pPr>
-            <a:r>
-              <a:rPr lang="en-US" sz="1800" b="1" dirty="0">
-                <a:solidFill>
-                  <a:srgbClr val="1E2A3A"/>
-                </a:solidFill>
-                <a:latin typeface="PingFang SC" pitchFamily="34" charset="0"/>
-                <a:ea typeface="PingFang SC" pitchFamily="34" charset="-122"/>
-                <a:cs typeface="PingFang SC" pitchFamily="34" charset="-120"/>
-              </a:rPr>
-              <a:t>register_runtime_hook</a:t>
-            </a:r>
-            <a:endParaRPr lang="en-US" sz="1800" dirty="0"/>
-          </a:p>
-        </p:txBody>
-      </p:sp>
-      <p:sp>
-        <p:nvSpPr>
-          <p:cNvPr id="15" name="Text 13"/>
-          <p:cNvSpPr/>
-          <p:nvPr/>
-        </p:nvSpPr>
-        <p:spPr>
-          <a:xfrm>
-            <a:off x="4599432" y="2468880"/>
-            <a:ext cx="3246120" cy="1463040"/>
-          </a:xfrm>
-          <a:prstGeom prst="rect">
-            <a:avLst/>
-          </a:prstGeom>
-          <a:noFill/>
-          <a:ln/>
-        </p:spPr>
-        <p:txBody>
-          <a:bodyPr wrap="square" lIns="0" tIns="0" rIns="0" bIns="0" rtlCol="0" anchor="ctr"/>
-          <a:lstStyle/>
-          <a:p>
-            <a:pPr indent="0" marL="0">
-              <a:buNone/>
-            </a:pPr>
-            <a:r>
-              <a:rPr lang="en-US" sz="1300" dirty="0">
-                <a:solidFill>
-                  <a:srgbClr val="6B7280"/>
-                </a:solidFill>
-                <a:latin typeface="PingFang SC" pitchFamily="34" charset="0"/>
-                <a:ea typeface="PingFang SC" pitchFamily="34" charset="-122"/>
-                <a:cs typeface="PingFang SC" pitchFamily="34" charset="-120"/>
-              </a:rPr>
-              <a:t>6 个 HookBase 挂进 8 个相位。每次请求从 HookContext 内存取值，不读业务文件。</a:t>
-            </a:r>
-            <a:endParaRPr lang="en-US" sz="1300" dirty="0"/>
-          </a:p>
-        </p:txBody>
-      </p:sp>
-      <p:sp>
-        <p:nvSpPr>
-          <p:cNvPr id="16" name="Shape 14"/>
-          <p:cNvSpPr/>
-          <p:nvPr/>
-        </p:nvSpPr>
-        <p:spPr>
-          <a:xfrm>
-            <a:off x="8183880" y="960120"/>
-            <a:ext cx="3657600" cy="3246120"/>
-          </a:xfrm>
-          <a:prstGeom prst="rect">
-            <a:avLst/>
-          </a:prstGeom>
-          <a:solidFill>
-            <a:srgbClr val="F7F8FA"/>
-          </a:solidFill>
-          <a:ln/>
-        </p:spPr>
-      </p:sp>
-      <p:sp>
-        <p:nvSpPr>
-          <p:cNvPr id="17" name="Shape 15"/>
-          <p:cNvSpPr/>
-          <p:nvPr/>
-        </p:nvSpPr>
-        <p:spPr>
-          <a:xfrm>
-            <a:off x="8183880" y="960120"/>
-            <a:ext cx="73152" cy="3246120"/>
-          </a:xfrm>
-          <a:prstGeom prst="rect">
-            <a:avLst/>
-          </a:prstGeom>
-          <a:solidFill>
-            <a:srgbClr val="1E2A3A"/>
-          </a:solidFill>
-          <a:ln/>
-        </p:spPr>
-      </p:sp>
-      <p:sp>
-        <p:nvSpPr>
-          <p:cNvPr id="18" name="Text 16"/>
-          <p:cNvSpPr/>
-          <p:nvPr/>
-        </p:nvSpPr>
-        <p:spPr>
-          <a:xfrm>
-            <a:off x="8439912" y="1115568"/>
-            <a:ext cx="3246120" cy="292608"/>
-          </a:xfrm>
-          <a:prstGeom prst="rect">
-            <a:avLst/>
-          </a:prstGeom>
-          <a:noFill/>
-          <a:ln/>
-        </p:spPr>
-        <p:txBody>
-          <a:bodyPr wrap="square" lIns="0" tIns="0" rIns="0" bIns="0" rtlCol="0" anchor="ctr"/>
-          <a:lstStyle/>
-          <a:p>
-            <a:pPr indent="0" marL="0">
-              <a:buNone/>
-            </a:pPr>
-            <a:r>
-              <a:rPr lang="en-US" sz="1200" b="1" dirty="0">
-                <a:solidFill>
-                  <a:srgbClr val="C5A55A"/>
-                </a:solidFill>
-                <a:latin typeface="PingFang SC" pitchFamily="34" charset="0"/>
-                <a:ea typeface="PingFang SC" pitchFamily="34" charset="-122"/>
-                <a:cs typeface="PingFang SC" pitchFamily="34" charset="-120"/>
-              </a:rPr>
-              <a:t>3  落盘</a:t>
-            </a:r>
-            <a:endParaRPr lang="en-US" sz="1200" dirty="0"/>
-          </a:p>
-        </p:txBody>
-      </p:sp>
-      <p:sp>
-        <p:nvSpPr>
-          <p:cNvPr id="19" name="Text 17"/>
-          <p:cNvSpPr/>
-          <p:nvPr/>
-        </p:nvSpPr>
-        <p:spPr>
-          <a:xfrm>
-            <a:off x="8439912" y="1444752"/>
-            <a:ext cx="3246120" cy="365760"/>
-          </a:xfrm>
-          <a:prstGeom prst="rect">
-            <a:avLst/>
-          </a:prstGeom>
-          <a:noFill/>
-          <a:ln/>
-        </p:spPr>
-        <p:txBody>
-          <a:bodyPr wrap="square" lIns="0" tIns="0" rIns="0" bIns="0" rtlCol="0" anchor="ctr"/>
-          <a:lstStyle/>
-          <a:p>
-            <a:pPr indent="0" marL="0">
-              <a:buNone/>
-            </a:pPr>
-            <a:r>
-              <a:rPr lang="en-US" sz="1600" b="1" dirty="0">
-                <a:solidFill>
-                  <a:srgbClr val="1F2937"/>
-                </a:solidFill>
-                <a:latin typeface="PingFang SC" pitchFamily="34" charset="0"/>
-                <a:ea typeface="PingFang SC" pitchFamily="34" charset="-122"/>
-                <a:cs typeface="PingFang SC" pitchFamily="34" charset="-120"/>
-              </a:rPr>
-              <a:t>不是日志、不是库</a:t>
-            </a:r>
-            <a:endParaRPr lang="en-US" sz="1600" dirty="0"/>
-          </a:p>
-        </p:txBody>
-      </p:sp>
-      <p:sp>
-        <p:nvSpPr>
-          <p:cNvPr id="20" name="Text 18"/>
-          <p:cNvSpPr/>
-          <p:nvPr/>
-        </p:nvSpPr>
-        <p:spPr>
-          <a:xfrm>
-            <a:off x="8439912" y="1874520"/>
-            <a:ext cx="3246120" cy="502920"/>
-          </a:xfrm>
-          <a:prstGeom prst="rect">
-            <a:avLst/>
-          </a:prstGeom>
-          <a:noFill/>
-          <a:ln/>
-        </p:spPr>
-        <p:txBody>
-          <a:bodyPr wrap="square" lIns="0" tIns="0" rIns="0" bIns="0" rtlCol="0" anchor="ctr"/>
-          <a:lstStyle/>
-          <a:p>
-            <a:pPr indent="0" marL="0">
-              <a:buNone/>
-            </a:pPr>
-            <a:r>
-              <a:rPr lang="en-US" sz="1800" b="1" dirty="0">
-                <a:solidFill>
-                  <a:srgbClr val="1E2A3A"/>
-                </a:solidFill>
-                <a:latin typeface="PingFang SC" pitchFamily="34" charset="0"/>
-                <a:ea typeface="PingFang SC" pitchFamily="34" charset="-122"/>
-                <a:cs typeface="PingFang SC" pitchFamily="34" charset="-120"/>
-              </a:rPr>
-              <a:t>ops.jsonl</a:t>
-            </a:r>
-            <a:endParaRPr lang="en-US" sz="1800" dirty="0"/>
-          </a:p>
-        </p:txBody>
-      </p:sp>
-      <p:sp>
-        <p:nvSpPr>
-          <p:cNvPr id="21" name="Text 19"/>
-          <p:cNvSpPr/>
-          <p:nvPr/>
-        </p:nvSpPr>
-        <p:spPr>
-          <a:xfrm>
-            <a:off x="8439912" y="2468880"/>
-            <a:ext cx="3246120" cy="1463040"/>
-          </a:xfrm>
-          <a:prstGeom prst="rect">
-            <a:avLst/>
-          </a:prstGeom>
-          <a:noFill/>
-          <a:ln/>
-        </p:spPr>
-        <p:txBody>
-          <a:bodyPr wrap="square" lIns="0" tIns="0" rIns="0" bIns="0" rtlCol="0" anchor="ctr"/>
-          <a:lstStyle/>
-          <a:p>
-            <a:pPr indent="0" marL="0">
-              <a:buNone/>
-            </a:pPr>
-            <a:r>
-              <a:rPr lang="en-US" sz="1300" dirty="0">
-                <a:solidFill>
-                  <a:srgbClr val="6B7280"/>
-                </a:solidFill>
-                <a:latin typeface="PingFang SC" pitchFamily="34" charset="0"/>
-                <a:ea typeface="PingFang SC" pitchFamily="34" charset="-122"/>
-                <a:cs typeface="PingFang SC" pitchFamily="34" charset="-120"/>
-              </a:rPr>
-              <a:t>telemetry.write 追加一行 JSON。失败只打 stderr。运营问答由 ops-data MCP 再读这个文件。</a:t>
-            </a:r>
-            <a:endParaRPr lang="en-US" sz="1300" dirty="0"/>
-          </a:p>
-        </p:txBody>
-      </p:sp>
-      <p:sp>
-        <p:nvSpPr>
-          <p:cNvPr id="22" name="Shape 20"/>
-          <p:cNvSpPr/>
-          <p:nvPr/>
-        </p:nvSpPr>
-        <p:spPr>
-          <a:xfrm>
-            <a:off x="502920" y="4389120"/>
-            <a:ext cx="11155680" cy="1737360"/>
-          </a:xfrm>
-          <a:prstGeom prst="rect">
-            <a:avLst/>
-          </a:prstGeom>
-          <a:solidFill>
-            <a:srgbClr val="F7F8FA"/>
-          </a:solidFill>
-          <a:ln/>
-        </p:spPr>
-      </p:sp>
-      <p:sp>
-        <p:nvSpPr>
-          <p:cNvPr id="23" name="Shape 21"/>
-          <p:cNvSpPr/>
-          <p:nvPr/>
-        </p:nvSpPr>
-        <p:spPr>
-          <a:xfrm>
-            <a:off x="502920" y="4389120"/>
-            <a:ext cx="73152" cy="1737360"/>
-          </a:xfrm>
-          <a:prstGeom prst="rect">
-            <a:avLst/>
-          </a:prstGeom>
-          <a:solidFill>
-            <a:srgbClr val="C5A55A"/>
-          </a:solidFill>
-          <a:ln/>
-        </p:spPr>
-      </p:sp>
-      <p:sp>
-        <p:nvSpPr>
-          <p:cNvPr id="24" name="Text 22"/>
-          <p:cNvSpPr/>
-          <p:nvPr/>
-        </p:nvSpPr>
-        <p:spPr>
-          <a:xfrm>
-            <a:off x="777240" y="4526280"/>
-            <a:ext cx="10607040" cy="320040"/>
-          </a:xfrm>
-          <a:prstGeom prst="rect">
-            <a:avLst/>
-          </a:prstGeom>
-          <a:noFill/>
-          <a:ln/>
-        </p:spPr>
-        <p:txBody>
-          <a:bodyPr wrap="square" lIns="0" tIns="0" rIns="0" bIns="0" rtlCol="0" anchor="ctr"/>
-          <a:lstStyle/>
-          <a:p>
-            <a:pPr indent="0" marL="0">
-              <a:buNone/>
-            </a:pPr>
-            <a:r>
-              <a:rPr lang="en-US" sz="1500" b="1" dirty="0">
-                <a:solidFill>
-                  <a:srgbClr val="1F2937"/>
-                </a:solidFill>
-                <a:latin typeface="PingFang SC" pitchFamily="34" charset="0"/>
-                <a:ea typeface="PingFang SC" pitchFamily="34" charset="-122"/>
-                <a:cs typeface="PingFang SC" pitchFamily="34" charset="-120"/>
-              </a:rPr>
-              <a:t>Hook 读什么 / 不读什么</a:t>
-            </a:r>
-            <a:endParaRPr lang="en-US" sz="1500" dirty="0"/>
-          </a:p>
-        </p:txBody>
-      </p:sp>
-      <p:sp>
-        <p:nvSpPr>
-          <p:cNvPr id="25" name="Text 23"/>
-          <p:cNvSpPr/>
-          <p:nvPr/>
-        </p:nvSpPr>
-        <p:spPr>
-          <a:xfrm>
-            <a:off x="777240" y="4892040"/>
-            <a:ext cx="10607040" cy="1097280"/>
-          </a:xfrm>
-          <a:prstGeom prst="rect">
-            <a:avLst/>
-          </a:prstGeom>
-          <a:noFill/>
-          <a:ln/>
-        </p:spPr>
-        <p:txBody>
-          <a:bodyPr wrap="square" lIns="0" tIns="0" rIns="0" bIns="0" rtlCol="0" anchor="ctr"/>
-          <a:lstStyle/>
-          <a:p>
-            <a:pPr indent="0" marL="0">
-              <a:buNone/>
-            </a:pPr>
-            <a:r>
-              <a:rPr lang="en-US" sz="1300" dirty="0">
-                <a:solidFill>
-                  <a:srgbClr val="6B7280"/>
-                </a:solidFill>
-                <a:latin typeface="PingFang SC" pitchFamily="34" charset="0"/>
-                <a:ea typeface="PingFang SC" pitchFamily="34" charset="-122"/>
-                <a:cs typeface="PingFang SC" pitchFamily="34" charset="-120"/>
-              </a:rPr>
-              <a:t>读：当次请求的 HookContext（session_id / agent_id / tokens_in / tool_name / error）。</a:t>
-            </a:r>
-            <a:endParaRPr lang="en-US" sz="1300" dirty="0"/>
-          </a:p>
-          <a:p>
-            <a:pPr indent="0" marL="0">
-              <a:buNone/>
-            </a:pPr>
-            <a:r>
-              <a:rPr lang="en-US" sz="1300" dirty="0">
-                <a:solidFill>
-                  <a:srgbClr val="6B7280"/>
-                </a:solidFill>
-                <a:latin typeface="PingFang SC" pitchFamily="34" charset="0"/>
-                <a:ea typeface="PingFang SC" pitchFamily="34" charset="-122"/>
-                <a:cs typeface="PingFang SC" pitchFamily="34" charset="-120"/>
-              </a:rPr>
-              <a:t>写：&lt;workspace&gt;/telemetry/&lt;UTC-日期&gt;/ops.jsonl。没有 POC_WORKSPACE 则退到 QWENPAW_WORKING_DIR。</a:t>
-            </a:r>
-            <a:endParaRPr lang="en-US" sz="1300" dirty="0"/>
-          </a:p>
-          <a:p>
-            <a:pPr indent="0" marL="0">
-              <a:buNone/>
-            </a:pPr>
-            <a:r>
-              <a:rPr lang="en-US" sz="1300" dirty="0">
-                <a:solidFill>
-                  <a:srgbClr val="6B7280"/>
-                </a:solidFill>
-                <a:latin typeface="PingFang SC" pitchFamily="34" charset="0"/>
-                <a:ea typeface="PingFang SC" pitchFamily="34" charset="-122"/>
-                <a:cs typeface="PingFang SC" pitchFamily="34" charset="-120"/>
-              </a:rPr>
-              <a:t>不读：Excel、知识库、MySQL、ES。不是 logging.info，也没有自研 HTTP 接口。</a:t>
-            </a:r>
-            <a:endParaRPr lang="en-US" sz="1300" dirty="0"/>
-          </a:p>
-        </p:txBody>
-      </p:sp>
-      <p:sp>
-        <p:nvSpPr>
-          <p:cNvPr id="26" name="Text 24"/>
+      <p:pic>
+        <p:nvPicPr>
+          <p:cNvPr id="4" name="Image 0" descr="/Users/linan/Desktop/aicode/shunde/docs/演示材料/architecture/hook-plugin-runtime.png">    </p:cNvPr>
+          <p:cNvPicPr>
+            <a:picLocks noChangeAspect="1"/>
+          </p:cNvPicPr>
+          <p:nvPr/>
+        </p:nvPicPr>
+        <p:blipFill>
+          <a:blip r:embed="rId1"/>
+          <a:stretch>
+            <a:fillRect/>
+          </a:stretch>
+        </p:blipFill>
+        <p:spPr>
+          <a:xfrm>
+            <a:off x="1728216" y="804672"/>
+            <a:ext cx="8705088" cy="5440680"/>
+          </a:xfrm>
+          <a:prstGeom prst="rect">
+            <a:avLst/>
+          </a:prstGeom>
+        </p:spPr>
+      </p:pic>
+      <p:sp>
+        <p:nvSpPr>
+          <p:cNvPr id="5" name="Text 2"/>
           <p:cNvSpPr/>
           <p:nvPr/>
         </p:nvSpPr>
@@ -26325,7 +24604,7 @@
                 <a:ea typeface="PingFang SC" pitchFamily="34" charset="-122"/>
                 <a:cs typeface="PingFang SC" pitchFamily="34" charset="-120"/>
               </a:rPr>
-              <a:t>来源：poc/plugins/ops-telemetry/plugin.py  ·  poc/hooks/{ops_hooks,telemetry}.py  ·  PluginApi.register_runtime_hook</a:t>
+              <a:t>poc-ops-telemetry 一个插件注册 6 HookBase；市场看不到，已安装 Tab 才有</a:t>
             </a:r>
             <a:endParaRPr lang="en-US" sz="1000" dirty="0"/>
           </a:p>
